--- a/slides/novabank.pptx
+++ b/slides/novabank.pptx
@@ -5,18 +5,22 @@
     <p:sldMasterId id="2147483648" r:id="rId4"/>
   </p:sldMasterIdLst>
   <p:notesMasterIdLst>
-    <p:notesMasterId r:id="rId11"/>
+    <p:notesMasterId r:id="rId15"/>
   </p:notesMasterIdLst>
   <p:handoutMasterIdLst>
-    <p:handoutMasterId r:id="rId12"/>
+    <p:handoutMasterId r:id="rId16"/>
   </p:handoutMasterIdLst>
   <p:sldIdLst>
     <p:sldId id="278" r:id="rId5"/>
     <p:sldId id="281" r:id="rId6"/>
     <p:sldId id="279" r:id="rId7"/>
     <p:sldId id="280" r:id="rId8"/>
-    <p:sldId id="282" r:id="rId9"/>
-    <p:sldId id="271" r:id="rId10"/>
+    <p:sldId id="286" r:id="rId9"/>
+    <p:sldId id="282" r:id="rId10"/>
+    <p:sldId id="283" r:id="rId11"/>
+    <p:sldId id="284" r:id="rId12"/>
+    <p:sldId id="287" r:id="rId13"/>
+    <p:sldId id="271" r:id="rId14"/>
   </p:sldIdLst>
   <p:sldSz cx="12192000" cy="6858000"/>
   <p:notesSz cx="6858000" cy="9144000"/>
@@ -129,7 +133,7 @@
 <file path=ppt/revisionInfo.xml><?xml version="1.0" encoding="utf-8"?>
 <p1510:revInfo xmlns:a="http://schemas.openxmlformats.org/drawingml/2006/main" xmlns:r="http://schemas.openxmlformats.org/officeDocument/2006/relationships" xmlns:p1510="http://schemas.microsoft.com/office/powerpoint/2015/10/main">
   <p1510:revLst>
-    <p1510:client id="{71F9AD6F-ACAE-4D67-8DDA-D98C7612B477}" v="5" dt="2026-10-07T12:56:58.747"/>
+    <p1510:client id="{71F9AD6F-ACAE-4D67-8DDA-D98C7612B477}" v="45" dt="2026-10-07T16:13:00.148"/>
   </p1510:revLst>
 </p1510:revInfo>
 </file>
@@ -138,8 +142,8 @@
 <pc:chgInfo xmlns:a="http://schemas.openxmlformats.org/drawingml/2006/main" xmlns:r="http://schemas.openxmlformats.org/officeDocument/2006/relationships" xmlns:ac="http://schemas.microsoft.com/office/drawing/2013/main/command" xmlns:pc="http://schemas.microsoft.com/office/powerpoint/2013/main/command">
   <pc:docChgLst>
     <pc:chgData name="Marc de Droog" userId="3ea1787d3693c09c" providerId="LiveId" clId="{20620065-C08F-41CF-B954-B8DD4409FD95}"/>
-    <pc:docChg chg="addSld modSld sldOrd">
-      <pc:chgData name="Marc de Droog" userId="3ea1787d3693c09c" providerId="LiveId" clId="{20620065-C08F-41CF-B954-B8DD4409FD95}" dt="2026-10-07T12:56:58.747" v="5"/>
+    <pc:docChg chg="addSld delSld modSld sldOrd">
+      <pc:chgData name="Marc de Droog" userId="3ea1787d3693c09c" providerId="LiveId" clId="{20620065-C08F-41CF-B954-B8DD4409FD95}" dt="2026-10-07T16:13:00.148" v="42"/>
       <pc:docMkLst>
         <pc:docMk/>
       </pc:docMkLst>
@@ -203,6 +207,86 @@
             <ac:spMk id="23" creationId="{2D21117B-EF7B-A567-8832-15C3BAEFC833}"/>
           </ac:spMkLst>
         </pc:spChg>
+      </pc:sldChg>
+      <pc:sldChg chg="modAnim">
+        <pc:chgData name="Marc de Droog" userId="3ea1787d3693c09c" providerId="LiveId" clId="{20620065-C08F-41CF-B954-B8DD4409FD95}" dt="2026-10-07T16:06:07.223" v="34"/>
+        <pc:sldMkLst>
+          <pc:docMk/>
+          <pc:sldMk cId="1030026327" sldId="282"/>
+        </pc:sldMkLst>
+      </pc:sldChg>
+      <pc:sldChg chg="modSp add">
+        <pc:chgData name="Marc de Droog" userId="3ea1787d3693c09c" providerId="LiveId" clId="{20620065-C08F-41CF-B954-B8DD4409FD95}" dt="2026-10-07T15:35:02.965" v="8"/>
+        <pc:sldMkLst>
+          <pc:docMk/>
+          <pc:sldMk cId="1400367988" sldId="283"/>
+        </pc:sldMkLst>
+        <pc:spChg chg="mod">
+          <ac:chgData name="Marc de Droog" userId="3ea1787d3693c09c" providerId="LiveId" clId="{20620065-C08F-41CF-B954-B8DD4409FD95}" dt="2026-10-07T15:35:02.965" v="8"/>
+          <ac:spMkLst>
+            <pc:docMk/>
+            <pc:sldMk cId="1400367988" sldId="283"/>
+            <ac:spMk id="6" creationId="{930B1B1C-759D-9AF0-EBAD-C7E4CD189027}"/>
+          </ac:spMkLst>
+        </pc:spChg>
+      </pc:sldChg>
+      <pc:sldChg chg="modSp add">
+        <pc:chgData name="Marc de Droog" userId="3ea1787d3693c09c" providerId="LiveId" clId="{20620065-C08F-41CF-B954-B8DD4409FD95}" dt="2026-10-07T16:09:00.465" v="38"/>
+        <pc:sldMkLst>
+          <pc:docMk/>
+          <pc:sldMk cId="2018970457" sldId="284"/>
+        </pc:sldMkLst>
+        <pc:spChg chg="mod">
+          <ac:chgData name="Marc de Droog" userId="3ea1787d3693c09c" providerId="LiveId" clId="{20620065-C08F-41CF-B954-B8DD4409FD95}" dt="2026-10-07T16:09:00.465" v="38"/>
+          <ac:spMkLst>
+            <pc:docMk/>
+            <pc:sldMk cId="2018970457" sldId="284"/>
+            <ac:spMk id="6" creationId="{11B7893D-8A22-EA01-6F2D-54F7D7593EF2}"/>
+          </ac:spMkLst>
+        </pc:spChg>
+      </pc:sldChg>
+      <pc:sldChg chg="add">
+        <pc:chgData name="Marc de Droog" userId="3ea1787d3693c09c" providerId="LiveId" clId="{20620065-C08F-41CF-B954-B8DD4409FD95}" dt="2026-10-07T15:56:04.465" v="19"/>
+        <pc:sldMkLst>
+          <pc:docMk/>
+          <pc:sldMk cId="406916842" sldId="285"/>
+        </pc:sldMkLst>
+      </pc:sldChg>
+      <pc:sldChg chg="add del">
+        <pc:chgData name="Marc de Droog" userId="3ea1787d3693c09c" providerId="LiveId" clId="{20620065-C08F-41CF-B954-B8DD4409FD95}" dt="2026-10-07T15:55:54.165" v="18"/>
+        <pc:sldMkLst>
+          <pc:docMk/>
+          <pc:sldMk cId="1211760635" sldId="285"/>
+        </pc:sldMkLst>
+      </pc:sldChg>
+      <pc:sldChg chg="add">
+        <pc:chgData name="Marc de Droog" userId="3ea1787d3693c09c" providerId="LiveId" clId="{20620065-C08F-41CF-B954-B8DD4409FD95}" dt="2026-10-07T15:56:35.871" v="20"/>
+        <pc:sldMkLst>
+          <pc:docMk/>
+          <pc:sldMk cId="804405547" sldId="286"/>
+        </pc:sldMkLst>
+      </pc:sldChg>
+      <pc:sldChg chg="modSp add">
+        <pc:chgData name="Marc de Droog" userId="3ea1787d3693c09c" providerId="LiveId" clId="{20620065-C08F-41CF-B954-B8DD4409FD95}" dt="2026-10-07T16:13:00.148" v="42"/>
+        <pc:sldMkLst>
+          <pc:docMk/>
+          <pc:sldMk cId="2440905073" sldId="287"/>
+        </pc:sldMkLst>
+        <pc:spChg chg="mod">
+          <ac:chgData name="Marc de Droog" userId="3ea1787d3693c09c" providerId="LiveId" clId="{20620065-C08F-41CF-B954-B8DD4409FD95}" dt="2026-10-07T16:13:00.148" v="42"/>
+          <ac:spMkLst>
+            <pc:docMk/>
+            <pc:sldMk cId="2440905073" sldId="287"/>
+            <ac:spMk id="6" creationId="{25855E2E-9EDB-6E19-A737-906AC26190D0}"/>
+          </ac:spMkLst>
+        </pc:spChg>
+      </pc:sldChg>
+      <pc:sldChg chg="add del">
+        <pc:chgData name="Marc de Droog" userId="3ea1787d3693c09c" providerId="LiveId" clId="{20620065-C08F-41CF-B954-B8DD4409FD95}" dt="2026-10-07T16:08:05.890" v="36"/>
+        <pc:sldMkLst>
+          <pc:docMk/>
+          <pc:sldMk cId="2600672683" sldId="287"/>
+        </pc:sldMkLst>
       </pc:sldChg>
     </pc:docChg>
   </pc:docChgLst>
@@ -896,7 +980,7 @@
           <a:p>
             <a:fld id="{22289C57-55D7-40A4-A101-E74FAC7A092B}" type="slidenum">
               <a:rPr lang="en-US" smtClean="0"/>
-              <a:t>6</a:t>
+              <a:t>10</a:t>
             </a:fld>
             <a:endParaRPr lang="en-US" dirty="0"/>
           </a:p>
@@ -6294,8 +6378,8 @@
         </p:nvSpPr>
         <p:spPr>
           <a:xfrm>
-            <a:off x="6991350" y="487018"/>
-            <a:ext cx="4607092" cy="3377354"/>
+            <a:off x="5638801" y="487018"/>
+            <a:ext cx="5959642" cy="3377354"/>
           </a:xfrm>
         </p:spPr>
         <p:txBody>
@@ -6338,6 +6422,151 @@
     <p:extLst>
       <p:ext uri="{BB962C8B-B14F-4D97-AF65-F5344CB8AC3E}">
         <p14:creationId xmlns:p14="http://schemas.microsoft.com/office/powerpoint/2010/main" val="608796113"/>
+      </p:ext>
+    </p:extLst>
+  </p:cSld>
+  <p:clrMapOvr>
+    <a:masterClrMapping/>
+  </p:clrMapOvr>
+</p:sld>
+</file>
+
+<file path=ppt/slides/slide10.xml><?xml version="1.0" encoding="utf-8"?>
+<p:sld xmlns:a="http://schemas.openxmlformats.org/drawingml/2006/main" xmlns:r="http://schemas.openxmlformats.org/officeDocument/2006/relationships" xmlns:p="http://schemas.openxmlformats.org/presentationml/2006/main">
+  <p:cSld>
+    <p:spTree>
+      <p:nvGrpSpPr>
+        <p:cNvPr id="1" name=""/>
+        <p:cNvGrpSpPr/>
+        <p:nvPr/>
+      </p:nvGrpSpPr>
+      <p:grpSpPr>
+        <a:xfrm>
+          <a:off x="0" y="0"/>
+          <a:ext cx="0" cy="0"/>
+          <a:chOff x="0" y="0"/>
+          <a:chExt cx="0" cy="0"/>
+        </a:xfrm>
+      </p:grpSpPr>
+      <p:sp>
+        <p:nvSpPr>
+          <p:cNvPr id="2" name="Title 1">
+            <a:extLst>
+              <a:ext uri="{FF2B5EF4-FFF2-40B4-BE49-F238E27FC236}">
+                <a16:creationId xmlns:a16="http://schemas.microsoft.com/office/drawing/2014/main" id="{8BDF1EDE-5423-435C-B149-87AB1BC22B83}"/>
+              </a:ext>
+            </a:extLst>
+          </p:cNvPr>
+          <p:cNvSpPr>
+            <a:spLocks noGrp="1"/>
+          </p:cNvSpPr>
+          <p:nvPr>
+            <p:ph type="ctrTitle"/>
+          </p:nvPr>
+        </p:nvSpPr>
+        <p:spPr>
+          <a:xfrm>
+            <a:off x="4267200" y="1615736"/>
+            <a:ext cx="4179570" cy="1524735"/>
+          </a:xfrm>
+        </p:spPr>
+        <p:txBody>
+          <a:bodyPr/>
+          <a:lstStyle/>
+          <a:p>
+            <a:r>
+              <a:rPr lang="en-US" dirty="0"/>
+              <a:t>THANK YOU</a:t>
+            </a:r>
+          </a:p>
+        </p:txBody>
+      </p:sp>
+      <p:sp>
+        <p:nvSpPr>
+          <p:cNvPr id="3" name="Subtitle 2">
+            <a:extLst>
+              <a:ext uri="{FF2B5EF4-FFF2-40B4-BE49-F238E27FC236}">
+                <a16:creationId xmlns:a16="http://schemas.microsoft.com/office/drawing/2014/main" id="{AF64C29E-DF30-4DC6-AB95-2016F9A703B6}"/>
+              </a:ext>
+            </a:extLst>
+          </p:cNvPr>
+          <p:cNvSpPr>
+            <a:spLocks noGrp="1"/>
+          </p:cNvSpPr>
+          <p:nvPr>
+            <p:ph type="subTitle" idx="1"/>
+          </p:nvPr>
+        </p:nvSpPr>
+        <p:spPr>
+          <a:xfrm>
+            <a:off x="4267200" y="3238103"/>
+            <a:ext cx="4179570" cy="2367567"/>
+          </a:xfrm>
+        </p:spPr>
+        <p:txBody>
+          <a:bodyPr>
+            <a:noAutofit/>
+          </a:bodyPr>
+          <a:lstStyle/>
+          <a:p>
+            <a:r>
+              <a:rPr lang="en-US" dirty="0"/>
+              <a:t>Marc de Droog</a:t>
+            </a:r>
+          </a:p>
+          <a:p>
+            <a:r>
+              <a:rPr lang="en-US" dirty="0"/>
+              <a:t>+31 6 55 29 00 07</a:t>
+            </a:r>
+          </a:p>
+          <a:p>
+            <a:r>
+              <a:rPr lang="en-US" dirty="0"/>
+              <a:t>marcdedroog@quicknet.nl</a:t>
+            </a:r>
+          </a:p>
+        </p:txBody>
+      </p:sp>
+      <p:sp>
+        <p:nvSpPr>
+          <p:cNvPr id="6" name="Slide Number Placeholder 5">
+            <a:extLst>
+              <a:ext uri="{FF2B5EF4-FFF2-40B4-BE49-F238E27FC236}">
+                <a16:creationId xmlns:a16="http://schemas.microsoft.com/office/drawing/2014/main" id="{4C127D99-645F-4FCF-9573-FDFE2A344FA9}"/>
+              </a:ext>
+            </a:extLst>
+          </p:cNvPr>
+          <p:cNvSpPr>
+            <a:spLocks noGrp="1"/>
+          </p:cNvSpPr>
+          <p:nvPr>
+            <p:ph type="sldNum" sz="quarter" idx="12"/>
+          </p:nvPr>
+        </p:nvSpPr>
+        <p:spPr>
+          <a:xfrm>
+            <a:off x="9579428" y="6356350"/>
+            <a:ext cx="1774371" cy="365125"/>
+          </a:xfrm>
+        </p:spPr>
+        <p:txBody>
+          <a:bodyPr/>
+          <a:lstStyle/>
+          <a:p>
+            <a:fld id="{A49DFD55-3C28-40EF-9E31-A92D2E4017FF}" type="slidenum">
+              <a:rPr lang="en-US" smtClean="0"/>
+              <a:pPr/>
+              <a:t>10</a:t>
+            </a:fld>
+            <a:endParaRPr lang="en-US" dirty="0"/>
+          </a:p>
+        </p:txBody>
+      </p:sp>
+    </p:spTree>
+    <p:extLst>
+      <p:ext uri="{BB962C8B-B14F-4D97-AF65-F5344CB8AC3E}">
+        <p14:creationId xmlns:p14="http://schemas.microsoft.com/office/powerpoint/2010/main" val="1969787568"/>
       </p:ext>
     </p:extLst>
   </p:cSld>
@@ -6386,7 +6615,12 @@
             <p:ph type="title"/>
           </p:nvPr>
         </p:nvSpPr>
-        <p:spPr/>
+        <p:spPr>
+          <a:xfrm>
+            <a:off x="1341120" y="705676"/>
+            <a:ext cx="9953308" cy="560557"/>
+          </a:xfrm>
+        </p:spPr>
         <p:txBody>
           <a:bodyPr/>
           <a:lstStyle/>
@@ -6446,8 +6680,8 @@
         </p:nvSpPr>
         <p:spPr>
           <a:xfrm>
-            <a:off x="1325216" y="2705177"/>
-            <a:ext cx="9637643" cy="448990"/>
+            <a:off x="1325216" y="1850412"/>
+            <a:ext cx="9637643" cy="753640"/>
           </a:xfrm>
         </p:spPr>
         <p:txBody>
@@ -6466,7 +6700,14 @@
             </a:r>
             <a:r>
               <a:rPr lang="en-US" sz="2400" dirty="0"/>
-              <a:t> wants to evaluate public cloud and has asked </a:t>
+              <a:t> wants to evaluate public cloud.</a:t>
+            </a:r>
+            <a:br>
+              <a:rPr lang="en-US" sz="2400" dirty="0"/>
+            </a:br>
+            <a:r>
+              <a:rPr lang="en-US" sz="2400" dirty="0"/>
+              <a:t>They have asked </a:t>
             </a:r>
             <a:r>
               <a:rPr lang="en-US" sz="2400" dirty="0" err="1"/>
@@ -6474,7 +6715,7 @@
             </a:r>
             <a:r>
               <a:rPr lang="en-US" sz="2400" dirty="0"/>
-              <a:t> to develop a  proof of concept to migrate a Web API </a:t>
+              <a:t> to develop a  proof of concept to migrate and modernize a Web API </a:t>
             </a:r>
           </a:p>
           <a:p>
@@ -6498,8 +6739,8 @@
         </p:nvSpPr>
         <p:spPr>
           <a:xfrm>
-            <a:off x="1315275" y="3462474"/>
-            <a:ext cx="8623434" cy="3032125"/>
+            <a:off x="1315275" y="2985396"/>
+            <a:ext cx="10263812" cy="3032125"/>
           </a:xfrm>
           <a:prstGeom prst="rect">
             <a:avLst/>
@@ -6674,28 +6915,28 @@
           <a:p>
             <a:r>
               <a:rPr lang="en-US" sz="2400" dirty="0"/>
-              <a:t>Requirements:</a:t>
+              <a:t>Requirements</a:t>
             </a:r>
           </a:p>
           <a:p>
             <a:pPr lvl="1"/>
             <a:r>
               <a:rPr lang="en-US" dirty="0"/>
-              <a:t>Financial Services – regulated, EU data residency requirement </a:t>
+              <a:t>Financial Services: regulated, EU data residency requirement applies </a:t>
             </a:r>
           </a:p>
           <a:p>
             <a:pPr lvl="1"/>
             <a:r>
               <a:rPr lang="en-US" dirty="0"/>
-              <a:t>Explicit availability target – 99.90%</a:t>
+              <a:t>Explicit availability target: 99.90%</a:t>
             </a:r>
           </a:p>
           <a:p>
             <a:pPr lvl="1"/>
             <a:r>
               <a:rPr lang="en-US" dirty="0"/>
-              <a:t>Disaster Recovery targets – RPO 1 </a:t>
+              <a:t>Disaster Recovery targets: RPO 1 </a:t>
             </a:r>
             <a:r>
               <a:rPr lang="en-US" dirty="0" err="1"/>
@@ -6715,7 +6956,7 @@
             <a:pPr lvl="1"/>
             <a:r>
               <a:rPr lang="en-US" dirty="0"/>
-              <a:t>Auditability – store and retain logs centrally for a defined term, control and restrict access</a:t>
+              <a:t>Auditability: store and retain logs centrally for a defined term, control and restrict access</a:t>
             </a:r>
           </a:p>
         </p:txBody>
@@ -6812,7 +7053,7 @@
               <a:buChar char="•"/>
             </a:pPr>
             <a:r>
-              <a:rPr lang="en-US" sz="2400" dirty="0"/>
+              <a:rPr lang="en-US" sz="2400" b="0" dirty="0"/>
               <a:t>Single VM</a:t>
             </a:r>
           </a:p>
@@ -6822,7 +7063,7 @@
               <a:buChar char="•"/>
             </a:pPr>
             <a:r>
-              <a:rPr lang="en-US" sz="2400" dirty="0"/>
+              <a:rPr lang="en-US" sz="2400" b="0" dirty="0"/>
               <a:t>PostgreSQL database – assumed on a single VM</a:t>
             </a:r>
           </a:p>
@@ -6832,7 +7073,7 @@
               <a:buChar char="•"/>
             </a:pPr>
             <a:r>
-              <a:rPr lang="en-US" sz="2400" dirty="0"/>
+              <a:rPr lang="en-US" sz="2400" b="0" dirty="0"/>
               <a:t>Single environment – no separate dev/test</a:t>
             </a:r>
           </a:p>
@@ -6842,7 +7083,7 @@
               <a:buChar char="•"/>
             </a:pPr>
             <a:r>
-              <a:rPr lang="en-US" sz="2400" dirty="0"/>
+              <a:rPr lang="en-US" sz="2400" b="0" dirty="0"/>
               <a:t>No stated, evaluated availability target</a:t>
             </a:r>
           </a:p>
@@ -6852,7 +7093,7 @@
               <a:buChar char="•"/>
             </a:pPr>
             <a:r>
-              <a:rPr lang="en-US" sz="2400" dirty="0"/>
+              <a:rPr lang="en-US" sz="2400" b="0" dirty="0"/>
               <a:t>Logs kept locally</a:t>
             </a:r>
           </a:p>
@@ -6946,7 +7187,7 @@
           <a:p>
             <a:r>
               <a:rPr lang="en-US" dirty="0"/>
-              <a:t>Target architecture</a:t>
+              <a:t>Target architecture (1) </a:t>
             </a:r>
           </a:p>
         </p:txBody>
@@ -6970,38 +7211,38 @@
         <p:spPr>
           <a:xfrm>
             <a:off x="1341437" y="1224556"/>
-            <a:ext cx="10170377" cy="4897947"/>
+            <a:ext cx="10170377" cy="5265696"/>
           </a:xfrm>
         </p:spPr>
         <p:txBody>
           <a:bodyPr>
-            <a:normAutofit lnSpcReduction="10000"/>
+            <a:normAutofit/>
           </a:bodyPr>
           <a:lstStyle/>
           <a:p>
             <a:r>
-              <a:rPr lang="en-US" dirty="0"/>
+              <a:rPr lang="en-US" sz="2400" u="sng" dirty="0"/>
               <a:t>Cloud platform – Azure</a:t>
             </a:r>
           </a:p>
           <a:p>
             <a:pPr lvl="1"/>
             <a:r>
-              <a:rPr lang="en-US" sz="1600" dirty="0"/>
+              <a:rPr lang="en-US" sz="2400" dirty="0"/>
               <a:t>Driven by skills available in the project team</a:t>
             </a:r>
           </a:p>
           <a:p>
             <a:pPr lvl="1"/>
             <a:r>
-              <a:rPr lang="en-US" sz="1600" dirty="0"/>
+              <a:rPr lang="en-US" sz="2400" dirty="0"/>
               <a:t>Deployment to Azure meets stated requirements</a:t>
             </a:r>
           </a:p>
           <a:p>
             <a:pPr lvl="1"/>
             <a:r>
-              <a:rPr lang="en-US" sz="1600" dirty="0"/>
+              <a:rPr lang="en-US" sz="2400" dirty="0"/>
               <a:t>Other cloud platforms may be evaluated later</a:t>
             </a:r>
           </a:p>
@@ -7010,75 +7251,36 @@
               <a:buNone/>
             </a:pPr>
             <a:r>
-              <a:rPr lang="en-US" dirty="0"/>
+              <a:rPr lang="en-US" sz="2400" u="sng" dirty="0"/>
               <a:t>Prefer Platform Services (PaaS) over Infrastructure (IaaS)</a:t>
             </a:r>
           </a:p>
           <a:p>
             <a:pPr marL="285750" lvl="1"/>
             <a:r>
-              <a:rPr lang="en-US" sz="1600" dirty="0"/>
+              <a:rPr lang="en-US" sz="2400" dirty="0"/>
               <a:t>Azure App Service and PostgreSQL Flexible Server</a:t>
             </a:r>
           </a:p>
           <a:p>
             <a:pPr marL="285750" lvl="1"/>
             <a:r>
-              <a:rPr lang="en-US" sz="1600" dirty="0"/>
+              <a:rPr lang="en-US" sz="2400" dirty="0"/>
               <a:t>Reduce operational overhead, improve security posture, built-in high availability features</a:t>
             </a:r>
           </a:p>
           <a:p>
-            <a:pPr marL="0" lvl="1" indent="0">
-              <a:buNone/>
-            </a:pPr>
-            <a:r>
-              <a:rPr lang="en-US" sz="1600" dirty="0"/>
-              <a:t>Primary – Disaster Recovery</a:t>
-            </a:r>
-          </a:p>
-          <a:p>
             <a:pPr marL="285750" lvl="1"/>
             <a:r>
-              <a:rPr lang="en-US" sz="1600" dirty="0"/>
-              <a:t>Primary - West Europe, DR - North Europe</a:t>
+              <a:rPr lang="en-US" sz="2400" dirty="0"/>
+              <a:t>PostgreSQL server is VNET injected, it has no public endpoint</a:t>
             </a:r>
           </a:p>
           <a:p>
             <a:pPr marL="285750" lvl="1"/>
             <a:r>
-              <a:rPr lang="en-US" sz="1600" dirty="0"/>
-              <a:t>DR only deployed when needed</a:t>
-            </a:r>
-          </a:p>
-          <a:p>
-            <a:pPr marL="285750" lvl="1"/>
-            <a:r>
-              <a:rPr lang="en-US" sz="1600" dirty="0"/>
-              <a:t>PostgreSQL database set for Geo Redundant back – data copied to North Europe, restored in DR</a:t>
-            </a:r>
-          </a:p>
-          <a:p>
-            <a:pPr marL="0" lvl="1" indent="0">
-              <a:buNone/>
-            </a:pPr>
-            <a:r>
-              <a:rPr lang="en-US" sz="1600" dirty="0"/>
-              <a:t>Development environment</a:t>
-            </a:r>
-          </a:p>
-          <a:p>
-            <a:pPr marL="285750" lvl="1"/>
-            <a:r>
-              <a:rPr lang="en-US" sz="1600" dirty="0"/>
-              <a:t>Separate deployment</a:t>
-            </a:r>
-          </a:p>
-          <a:p>
-            <a:pPr marL="285750" lvl="1"/>
-            <a:r>
-              <a:rPr lang="en-US" sz="1600" dirty="0"/>
-              <a:t>Uses lower grade, cheaper component SKUs</a:t>
+              <a:rPr lang="en-US" sz="2400" dirty="0"/>
+              <a:t>Web App connects to database privately through VNET Integration </a:t>
             </a:r>
           </a:p>
           <a:p>
@@ -7139,7 +7341,13 @@
   <p:cSld>
     <p:spTree>
       <p:nvGrpSpPr>
-        <p:cNvPr id="1" name=""/>
+        <p:cNvPr id="1" name="">
+          <a:extLst>
+            <a:ext uri="{FF2B5EF4-FFF2-40B4-BE49-F238E27FC236}">
+              <a16:creationId xmlns:a16="http://schemas.microsoft.com/office/drawing/2014/main" id="{24253792-3AFF-B257-4630-743081B54EE9}"/>
+            </a:ext>
+          </a:extLst>
+        </p:cNvPr>
         <p:cNvGrpSpPr/>
         <p:nvPr/>
       </p:nvGrpSpPr>
@@ -7153,10 +7361,10 @@
       </p:grpSpPr>
       <p:sp>
         <p:nvSpPr>
-          <p:cNvPr id="4" name="Slide Number Placeholder 3">
-            <a:extLst>
-              <a:ext uri="{FF2B5EF4-FFF2-40B4-BE49-F238E27FC236}">
-                <a16:creationId xmlns:a16="http://schemas.microsoft.com/office/drawing/2014/main" id="{962F4E82-E66E-5C66-B8F3-71047AFD8AC6}"/>
+          <p:cNvPr id="2" name="Title 1">
+            <a:extLst>
+              <a:ext uri="{FF2B5EF4-FFF2-40B4-BE49-F238E27FC236}">
+                <a16:creationId xmlns:a16="http://schemas.microsoft.com/office/drawing/2014/main" id="{555A47DF-AC40-8C92-F418-61FF61A9D856}"/>
               </a:ext>
             </a:extLst>
           </p:cNvPr>
@@ -7164,10 +7372,166 @@
             <a:spLocks noGrp="1"/>
           </p:cNvSpPr>
           <p:nvPr>
-            <p:ph type="sldNum" sz="quarter" idx="12"/>
+            <p:ph type="title"/>
           </p:nvPr>
         </p:nvSpPr>
-        <p:spPr/>
+        <p:spPr>
+          <a:xfrm>
+            <a:off x="1341438" y="506895"/>
+            <a:ext cx="9953625" cy="660262"/>
+          </a:xfrm>
+        </p:spPr>
+        <p:txBody>
+          <a:bodyPr/>
+          <a:lstStyle/>
+          <a:p>
+            <a:r>
+              <a:rPr lang="en-US" dirty="0"/>
+              <a:t>Target architecture (2) </a:t>
+            </a:r>
+          </a:p>
+        </p:txBody>
+      </p:sp>
+      <p:sp>
+        <p:nvSpPr>
+          <p:cNvPr id="6" name="Content Placeholder 5">
+            <a:extLst>
+              <a:ext uri="{FF2B5EF4-FFF2-40B4-BE49-F238E27FC236}">
+                <a16:creationId xmlns:a16="http://schemas.microsoft.com/office/drawing/2014/main" id="{4694C536-14F7-4890-67F3-293EE50E67A5}"/>
+              </a:ext>
+            </a:extLst>
+          </p:cNvPr>
+          <p:cNvSpPr>
+            <a:spLocks noGrp="1"/>
+          </p:cNvSpPr>
+          <p:nvPr>
+            <p:ph sz="half" idx="14"/>
+          </p:nvPr>
+        </p:nvSpPr>
+        <p:spPr>
+          <a:xfrm>
+            <a:off x="1341437" y="1224556"/>
+            <a:ext cx="10170377" cy="5265696"/>
+          </a:xfrm>
+        </p:spPr>
+        <p:txBody>
+          <a:bodyPr>
+            <a:normAutofit lnSpcReduction="10000"/>
+          </a:bodyPr>
+          <a:lstStyle/>
+          <a:p>
+            <a:pPr marL="0" lvl="1" indent="0">
+              <a:buNone/>
+            </a:pPr>
+            <a:r>
+              <a:rPr lang="en-US" sz="2400" u="sng" dirty="0"/>
+              <a:t>Primary – Disaster Recovery</a:t>
+            </a:r>
+          </a:p>
+          <a:p>
+            <a:pPr marL="285750" lvl="1"/>
+            <a:r>
+              <a:rPr lang="en-US" sz="2400" dirty="0"/>
+              <a:t>Primary: West Europe, DR: North Europe</a:t>
+            </a:r>
+          </a:p>
+          <a:p>
+            <a:pPr marL="285750" lvl="1"/>
+            <a:r>
+              <a:rPr lang="en-US" sz="2400" dirty="0"/>
+              <a:t>DR is only deployed when Primary fails – no running costs when not needed</a:t>
+            </a:r>
+          </a:p>
+          <a:p>
+            <a:pPr marL="285750" lvl="1"/>
+            <a:r>
+              <a:rPr lang="en-US" sz="2400" dirty="0"/>
+              <a:t>PostgreSQL database configured for Geo Redundant backup</a:t>
+            </a:r>
+          </a:p>
+          <a:p>
+            <a:pPr marL="569214" lvl="2"/>
+            <a:r>
+              <a:rPr lang="en-US" sz="2400" dirty="0"/>
+              <a:t>Data is copied asynchronously to North Europe, restored in DR</a:t>
+            </a:r>
+          </a:p>
+          <a:p>
+            <a:pPr marL="569214" lvl="2"/>
+            <a:r>
+              <a:rPr lang="en-US" sz="2400" dirty="0"/>
+              <a:t>Database is restored in North Europe from copy when needed</a:t>
+            </a:r>
+          </a:p>
+          <a:p>
+            <a:pPr marL="0" lvl="1" indent="0">
+              <a:buNone/>
+            </a:pPr>
+            <a:r>
+              <a:rPr lang="en-US" sz="2400" u="sng" dirty="0"/>
+              <a:t>Logging</a:t>
+            </a:r>
+          </a:p>
+          <a:p>
+            <a:pPr marL="342900" lvl="1" indent="-342900"/>
+            <a:r>
+              <a:rPr lang="en-US" sz="2400" dirty="0"/>
+              <a:t>Logs sent to </a:t>
+            </a:r>
+            <a:r>
+              <a:rPr lang="en-US" sz="2400" dirty="0" err="1"/>
+              <a:t>LogAnalytics</a:t>
+            </a:r>
+            <a:r>
+              <a:rPr lang="en-US" sz="2400" dirty="0"/>
+              <a:t> Workspaces for each environment</a:t>
+            </a:r>
+          </a:p>
+          <a:p>
+            <a:pPr marL="342900" lvl="1" indent="-342900"/>
+            <a:r>
+              <a:rPr lang="en-US" sz="2400" dirty="0"/>
+              <a:t>Retention set to 2 years</a:t>
+            </a:r>
+          </a:p>
+          <a:p>
+            <a:pPr marL="342900" lvl="1" indent="-342900"/>
+            <a:r>
+              <a:rPr lang="en-US" sz="2400" dirty="0"/>
+              <a:t>Access to log content restricted to members of specific Entra Security Group with </a:t>
+            </a:r>
+          </a:p>
+          <a:p>
+            <a:pPr marL="342900" lvl="1" indent="-342900"/>
+            <a:endParaRPr lang="en-US" sz="2400" dirty="0"/>
+          </a:p>
+          <a:p>
+            <a:endParaRPr lang="en-US" dirty="0"/>
+          </a:p>
+        </p:txBody>
+      </p:sp>
+      <p:sp>
+        <p:nvSpPr>
+          <p:cNvPr id="7" name="Slide Number Placeholder 6">
+            <a:extLst>
+              <a:ext uri="{FF2B5EF4-FFF2-40B4-BE49-F238E27FC236}">
+                <a16:creationId xmlns:a16="http://schemas.microsoft.com/office/drawing/2014/main" id="{A6C4D517-EBB6-FAA7-C2DA-B85D34EB3421}"/>
+              </a:ext>
+            </a:extLst>
+          </p:cNvPr>
+          <p:cNvSpPr>
+            <a:spLocks noGrp="1"/>
+          </p:cNvSpPr>
+          <p:nvPr>
+            <p:ph type="sldNum" sz="quarter" idx="13"/>
+          </p:nvPr>
+        </p:nvSpPr>
+        <p:spPr>
+          <a:xfrm>
+            <a:off x="10373350" y="6356349"/>
+            <a:ext cx="987552" cy="365125"/>
+          </a:xfrm>
+        </p:spPr>
         <p:txBody>
           <a:bodyPr/>
           <a:lstStyle/>
@@ -7181,40 +7545,10 @@
           </a:p>
         </p:txBody>
       </p:sp>
-      <p:pic>
-        <p:nvPicPr>
-          <p:cNvPr id="6" name="Picture 5">
-            <a:extLst>
-              <a:ext uri="{FF2B5EF4-FFF2-40B4-BE49-F238E27FC236}">
-                <a16:creationId xmlns:a16="http://schemas.microsoft.com/office/drawing/2014/main" id="{F18133CE-0D6D-8932-0A36-20116CC865E7}"/>
-              </a:ext>
-            </a:extLst>
-          </p:cNvPr>
-          <p:cNvPicPr>
-            <a:picLocks noChangeAspect="1"/>
-          </p:cNvPicPr>
-          <p:nvPr/>
-        </p:nvPicPr>
-        <p:blipFill>
-          <a:blip r:embed="rId2"/>
-          <a:stretch>
-            <a:fillRect/>
-          </a:stretch>
-        </p:blipFill>
-        <p:spPr>
-          <a:xfrm>
-            <a:off x="1981793" y="0"/>
-            <a:ext cx="8228413" cy="6858000"/>
-          </a:xfrm>
-          <a:prstGeom prst="rect">
-            <a:avLst/>
-          </a:prstGeom>
-        </p:spPr>
-      </p:pic>
     </p:spTree>
     <p:extLst>
       <p:ext uri="{BB962C8B-B14F-4D97-AF65-F5344CB8AC3E}">
-        <p14:creationId xmlns:p14="http://schemas.microsoft.com/office/powerpoint/2010/main" val="1030026327"/>
+        <p14:creationId xmlns:p14="http://schemas.microsoft.com/office/powerpoint/2010/main" val="804405547"/>
       </p:ext>
     </p:extLst>
   </p:cSld>
@@ -7243,96 +7577,10 @@
       </p:grpSpPr>
       <p:sp>
         <p:nvSpPr>
-          <p:cNvPr id="2" name="Title 1">
-            <a:extLst>
-              <a:ext uri="{FF2B5EF4-FFF2-40B4-BE49-F238E27FC236}">
-                <a16:creationId xmlns:a16="http://schemas.microsoft.com/office/drawing/2014/main" id="{8BDF1EDE-5423-435C-B149-87AB1BC22B83}"/>
-              </a:ext>
-            </a:extLst>
-          </p:cNvPr>
-          <p:cNvSpPr>
-            <a:spLocks noGrp="1"/>
-          </p:cNvSpPr>
-          <p:nvPr>
-            <p:ph type="ctrTitle"/>
-          </p:nvPr>
-        </p:nvSpPr>
-        <p:spPr>
-          <a:xfrm>
-            <a:off x="4267200" y="1615736"/>
-            <a:ext cx="4179570" cy="1524735"/>
-          </a:xfrm>
-        </p:spPr>
-        <p:txBody>
-          <a:bodyPr/>
-          <a:lstStyle/>
-          <a:p>
-            <a:r>
-              <a:rPr lang="en-US" dirty="0"/>
-              <a:t>THANK YOU</a:t>
-            </a:r>
-          </a:p>
-        </p:txBody>
-      </p:sp>
-      <p:sp>
-        <p:nvSpPr>
-          <p:cNvPr id="3" name="Subtitle 2">
-            <a:extLst>
-              <a:ext uri="{FF2B5EF4-FFF2-40B4-BE49-F238E27FC236}">
-                <a16:creationId xmlns:a16="http://schemas.microsoft.com/office/drawing/2014/main" id="{AF64C29E-DF30-4DC6-AB95-2016F9A703B6}"/>
-              </a:ext>
-            </a:extLst>
-          </p:cNvPr>
-          <p:cNvSpPr>
-            <a:spLocks noGrp="1"/>
-          </p:cNvSpPr>
-          <p:nvPr>
-            <p:ph type="subTitle" idx="1"/>
-          </p:nvPr>
-        </p:nvSpPr>
-        <p:spPr>
-          <a:xfrm>
-            <a:off x="4267200" y="3238103"/>
-            <a:ext cx="4179570" cy="2850181"/>
-          </a:xfrm>
-        </p:spPr>
-        <p:txBody>
-          <a:bodyPr>
-            <a:noAutofit/>
-          </a:bodyPr>
-          <a:lstStyle/>
-          <a:p>
-            <a:r>
-              <a:rPr lang="en-US" dirty="0"/>
-              <a:t>Brita Tamm</a:t>
-            </a:r>
-          </a:p>
-          <a:p>
-            <a:r>
-              <a:rPr lang="en-US" dirty="0"/>
-              <a:t>502-555-0152</a:t>
-            </a:r>
-          </a:p>
-          <a:p>
-            <a:r>
-              <a:rPr lang="en-US" dirty="0"/>
-              <a:t>brita@firstupconsultants.com</a:t>
-            </a:r>
-          </a:p>
-          <a:p>
-            <a:r>
-              <a:rPr lang="en-US" dirty="0"/>
-              <a:t>www.firstupconsultants.com</a:t>
-            </a:r>
-          </a:p>
-        </p:txBody>
-      </p:sp>
-      <p:sp>
-        <p:nvSpPr>
-          <p:cNvPr id="6" name="Slide Number Placeholder 5">
-            <a:extLst>
-              <a:ext uri="{FF2B5EF4-FFF2-40B4-BE49-F238E27FC236}">
-                <a16:creationId xmlns:a16="http://schemas.microsoft.com/office/drawing/2014/main" id="{4C127D99-645F-4FCF-9573-FDFE2A344FA9}"/>
+          <p:cNvPr id="4" name="Slide Number Placeholder 3">
+            <a:extLst>
+              <a:ext uri="{FF2B5EF4-FFF2-40B4-BE49-F238E27FC236}">
+                <a16:creationId xmlns:a16="http://schemas.microsoft.com/office/drawing/2014/main" id="{962F4E82-E66E-5C66-B8F3-71047AFD8AC6}"/>
               </a:ext>
             </a:extLst>
           </p:cNvPr>
@@ -7343,12 +7591,7 @@
             <p:ph type="sldNum" sz="quarter" idx="12"/>
           </p:nvPr>
         </p:nvSpPr>
-        <p:spPr>
-          <a:xfrm>
-            <a:off x="9579428" y="6356350"/>
-            <a:ext cx="1774371" cy="365125"/>
-          </a:xfrm>
-        </p:spPr>
+        <p:spPr/>
         <p:txBody>
           <a:bodyPr/>
           <a:lstStyle/>
@@ -7362,10 +7605,1165 @@
           </a:p>
         </p:txBody>
       </p:sp>
+      <p:pic>
+        <p:nvPicPr>
+          <p:cNvPr id="6" name="Picture 5">
+            <a:extLst>
+              <a:ext uri="{FF2B5EF4-FFF2-40B4-BE49-F238E27FC236}">
+                <a16:creationId xmlns:a16="http://schemas.microsoft.com/office/drawing/2014/main" id="{F18133CE-0D6D-8932-0A36-20116CC865E7}"/>
+              </a:ext>
+            </a:extLst>
+          </p:cNvPr>
+          <p:cNvPicPr>
+            <a:picLocks noChangeAspect="1"/>
+          </p:cNvPicPr>
+          <p:nvPr/>
+        </p:nvPicPr>
+        <p:blipFill>
+          <a:blip r:embed="rId2"/>
+          <a:stretch>
+            <a:fillRect/>
+          </a:stretch>
+        </p:blipFill>
+        <p:spPr>
+          <a:xfrm>
+            <a:off x="1981793" y="0"/>
+            <a:ext cx="8228413" cy="6858000"/>
+          </a:xfrm>
+          <a:prstGeom prst="rect">
+            <a:avLst/>
+          </a:prstGeom>
+        </p:spPr>
+      </p:pic>
+      <p:sp>
+        <p:nvSpPr>
+          <p:cNvPr id="7" name="Rectangle 6">
+            <a:extLst>
+              <a:ext uri="{FF2B5EF4-FFF2-40B4-BE49-F238E27FC236}">
+                <a16:creationId xmlns:a16="http://schemas.microsoft.com/office/drawing/2014/main" id="{0C807597-5FEF-B45E-C0A3-0E21ACA3E6EB}"/>
+              </a:ext>
+            </a:extLst>
+          </p:cNvPr>
+          <p:cNvSpPr/>
+          <p:nvPr/>
+        </p:nvSpPr>
+        <p:spPr>
+          <a:xfrm>
+            <a:off x="6401001" y="240632"/>
+            <a:ext cx="3953299" cy="5621153"/>
+          </a:xfrm>
+          <a:prstGeom prst="rect">
+            <a:avLst/>
+          </a:prstGeom>
+          <a:solidFill>
+            <a:schemeClr val="bg1"/>
+          </a:solidFill>
+          <a:ln>
+            <a:noFill/>
+          </a:ln>
+        </p:spPr>
+        <p:style>
+          <a:lnRef idx="2">
+            <a:schemeClr val="accent1">
+              <a:shade val="15000"/>
+            </a:schemeClr>
+          </a:lnRef>
+          <a:fillRef idx="1">
+            <a:schemeClr val="accent1"/>
+          </a:fillRef>
+          <a:effectRef idx="0">
+            <a:schemeClr val="accent1"/>
+          </a:effectRef>
+          <a:fontRef idx="minor">
+            <a:schemeClr val="lt1"/>
+          </a:fontRef>
+        </p:style>
+        <p:txBody>
+          <a:bodyPr rtlCol="0" anchor="ctr"/>
+          <a:lstStyle/>
+          <a:p>
+            <a:pPr algn="ctr"/>
+            <a:endParaRPr lang="en-US"/>
+          </a:p>
+        </p:txBody>
+      </p:sp>
     </p:spTree>
     <p:extLst>
       <p:ext uri="{BB962C8B-B14F-4D97-AF65-F5344CB8AC3E}">
-        <p14:creationId xmlns:p14="http://schemas.microsoft.com/office/powerpoint/2010/main" val="1969787568"/>
+        <p14:creationId xmlns:p14="http://schemas.microsoft.com/office/powerpoint/2010/main" val="1030026327"/>
+      </p:ext>
+    </p:extLst>
+  </p:cSld>
+  <p:clrMapOvr>
+    <a:masterClrMapping/>
+  </p:clrMapOvr>
+  <p:timing>
+    <p:tnLst>
+      <p:par>
+        <p:cTn id="1" dur="indefinite" restart="never" nodeType="tmRoot">
+          <p:childTnLst>
+            <p:seq concurrent="1" nextAc="seek">
+              <p:cTn id="2" dur="indefinite" nodeType="mainSeq">
+                <p:childTnLst>
+                  <p:par>
+                    <p:cTn id="3" fill="hold">
+                      <p:stCondLst>
+                        <p:cond delay="indefinite"/>
+                      </p:stCondLst>
+                      <p:childTnLst>
+                        <p:par>
+                          <p:cTn id="4" fill="hold">
+                            <p:stCondLst>
+                              <p:cond delay="0"/>
+                            </p:stCondLst>
+                            <p:childTnLst>
+                              <p:par>
+                                <p:cTn id="5" presetID="35" presetClass="path" presetSubtype="0" accel="50000" decel="50000" fill="hold" grpId="0" nodeType="clickEffect">
+                                  <p:stCondLst>
+                                    <p:cond delay="0"/>
+                                  </p:stCondLst>
+                                  <p:childTnLst>
+                                    <p:animMotion origin="layout" path="M -0.08789 2.59259E-6 L -0.33789 2.59259E-6 " pathEditMode="relative" rAng="0" ptsTypes="AA">
+                                      <p:cBhvr>
+                                        <p:cTn id="6" dur="2000" fill="hold"/>
+                                        <p:tgtEl>
+                                          <p:spTgt spid="7"/>
+                                        </p:tgtEl>
+                                        <p:attrNameLst>
+                                          <p:attrName>ppt_x</p:attrName>
+                                          <p:attrName>ppt_y</p:attrName>
+                                        </p:attrNameLst>
+                                      </p:cBhvr>
+                                      <p:rCtr x="-12500" y="0"/>
+                                    </p:animMotion>
+                                  </p:childTnLst>
+                                </p:cTn>
+                              </p:par>
+                            </p:childTnLst>
+                          </p:cTn>
+                        </p:par>
+                      </p:childTnLst>
+                    </p:cTn>
+                  </p:par>
+                  <p:par>
+                    <p:cTn id="7" fill="hold">
+                      <p:stCondLst>
+                        <p:cond delay="indefinite"/>
+                      </p:stCondLst>
+                      <p:childTnLst>
+                        <p:par>
+                          <p:cTn id="8" fill="hold">
+                            <p:stCondLst>
+                              <p:cond delay="0"/>
+                            </p:stCondLst>
+                            <p:childTnLst>
+                              <p:par>
+                                <p:cTn id="9" presetID="10" presetClass="exit" presetSubtype="0" fill="hold" grpId="1" nodeType="clickEffect">
+                                  <p:stCondLst>
+                                    <p:cond delay="0"/>
+                                  </p:stCondLst>
+                                  <p:childTnLst>
+                                    <p:animEffect transition="out" filter="fade">
+                                      <p:cBhvr>
+                                        <p:cTn id="10" dur="500"/>
+                                        <p:tgtEl>
+                                          <p:spTgt spid="7"/>
+                                        </p:tgtEl>
+                                      </p:cBhvr>
+                                    </p:animEffect>
+                                    <p:set>
+                                      <p:cBhvr>
+                                        <p:cTn id="11" dur="1" fill="hold">
+                                          <p:stCondLst>
+                                            <p:cond delay="499"/>
+                                          </p:stCondLst>
+                                        </p:cTn>
+                                        <p:tgtEl>
+                                          <p:spTgt spid="7"/>
+                                        </p:tgtEl>
+                                        <p:attrNameLst>
+                                          <p:attrName>style.visibility</p:attrName>
+                                        </p:attrNameLst>
+                                      </p:cBhvr>
+                                      <p:to>
+                                        <p:strVal val="hidden"/>
+                                      </p:to>
+                                    </p:set>
+                                  </p:childTnLst>
+                                </p:cTn>
+                              </p:par>
+                            </p:childTnLst>
+                          </p:cTn>
+                        </p:par>
+                      </p:childTnLst>
+                    </p:cTn>
+                  </p:par>
+                </p:childTnLst>
+              </p:cTn>
+              <p:prevCondLst>
+                <p:cond evt="onPrev" delay="0">
+                  <p:tgtEl>
+                    <p:sldTgt/>
+                  </p:tgtEl>
+                </p:cond>
+              </p:prevCondLst>
+              <p:nextCondLst>
+                <p:cond evt="onNext" delay="0">
+                  <p:tgtEl>
+                    <p:sldTgt/>
+                  </p:tgtEl>
+                </p:cond>
+              </p:nextCondLst>
+            </p:seq>
+          </p:childTnLst>
+        </p:cTn>
+      </p:par>
+    </p:tnLst>
+    <p:bldLst>
+      <p:bldP spid="7" grpId="0" animBg="1"/>
+      <p:bldP spid="7" grpId="1" animBg="1"/>
+    </p:bldLst>
+  </p:timing>
+</p:sld>
+</file>
+
+<file path=ppt/slides/slide7.xml><?xml version="1.0" encoding="utf-8"?>
+<p:sld xmlns:a="http://schemas.openxmlformats.org/drawingml/2006/main" xmlns:r="http://schemas.openxmlformats.org/officeDocument/2006/relationships" xmlns:p="http://schemas.openxmlformats.org/presentationml/2006/main">
+  <p:cSld>
+    <p:spTree>
+      <p:nvGrpSpPr>
+        <p:cNvPr id="1" name="">
+          <a:extLst>
+            <a:ext uri="{FF2B5EF4-FFF2-40B4-BE49-F238E27FC236}">
+              <a16:creationId xmlns:a16="http://schemas.microsoft.com/office/drawing/2014/main" id="{96B890D6-C13C-7964-6812-AE917390CDF3}"/>
+            </a:ext>
+          </a:extLst>
+        </p:cNvPr>
+        <p:cNvGrpSpPr/>
+        <p:nvPr/>
+      </p:nvGrpSpPr>
+      <p:grpSpPr>
+        <a:xfrm>
+          <a:off x="0" y="0"/>
+          <a:ext cx="0" cy="0"/>
+          <a:chOff x="0" y="0"/>
+          <a:chExt cx="0" cy="0"/>
+        </a:xfrm>
+      </p:grpSpPr>
+      <p:sp>
+        <p:nvSpPr>
+          <p:cNvPr id="2" name="Title 1">
+            <a:extLst>
+              <a:ext uri="{FF2B5EF4-FFF2-40B4-BE49-F238E27FC236}">
+                <a16:creationId xmlns:a16="http://schemas.microsoft.com/office/drawing/2014/main" id="{E434CD8D-A71F-03FF-5F3A-E3BC98BACA61}"/>
+              </a:ext>
+            </a:extLst>
+          </p:cNvPr>
+          <p:cNvSpPr>
+            <a:spLocks noGrp="1"/>
+          </p:cNvSpPr>
+          <p:nvPr>
+            <p:ph type="title"/>
+          </p:nvPr>
+        </p:nvSpPr>
+        <p:spPr>
+          <a:xfrm>
+            <a:off x="1341438" y="506895"/>
+            <a:ext cx="9953625" cy="660262"/>
+          </a:xfrm>
+        </p:spPr>
+        <p:txBody>
+          <a:bodyPr/>
+          <a:lstStyle/>
+          <a:p>
+            <a:r>
+              <a:rPr lang="en-US"/>
+              <a:t>development</a:t>
+            </a:r>
+            <a:endParaRPr lang="en-US" dirty="0"/>
+          </a:p>
+        </p:txBody>
+      </p:sp>
+      <p:sp>
+        <p:nvSpPr>
+          <p:cNvPr id="6" name="Content Placeholder 5">
+            <a:extLst>
+              <a:ext uri="{FF2B5EF4-FFF2-40B4-BE49-F238E27FC236}">
+                <a16:creationId xmlns:a16="http://schemas.microsoft.com/office/drawing/2014/main" id="{930B1B1C-759D-9AF0-EBAD-C7E4CD189027}"/>
+              </a:ext>
+            </a:extLst>
+          </p:cNvPr>
+          <p:cNvSpPr>
+            <a:spLocks noGrp="1"/>
+          </p:cNvSpPr>
+          <p:nvPr>
+            <p:ph sz="half" idx="14"/>
+          </p:nvPr>
+        </p:nvSpPr>
+        <p:spPr>
+          <a:xfrm>
+            <a:off x="1341437" y="1224556"/>
+            <a:ext cx="10170377" cy="5315392"/>
+          </a:xfrm>
+        </p:spPr>
+        <p:txBody>
+          <a:bodyPr>
+            <a:normAutofit/>
+          </a:bodyPr>
+          <a:lstStyle/>
+          <a:p>
+            <a:r>
+              <a:rPr lang="en-US" u="sng" dirty="0"/>
+              <a:t>Infrastructure as Code</a:t>
+            </a:r>
+          </a:p>
+          <a:p>
+            <a:pPr lvl="1"/>
+            <a:r>
+              <a:rPr lang="en-US" sz="1600" dirty="0"/>
+              <a:t>Bicep – leveraging Azure Verified Modules where possible</a:t>
+            </a:r>
+          </a:p>
+          <a:p>
+            <a:pPr lvl="1"/>
+            <a:r>
+              <a:rPr lang="en-US" sz="1600" dirty="0"/>
+              <a:t>Single code base, parameterized for primary, dr and dev deployments </a:t>
+            </a:r>
+          </a:p>
+          <a:p>
+            <a:pPr lvl="2"/>
+            <a:r>
+              <a:rPr lang="en-US" sz="1600" dirty="0" err="1"/>
+              <a:t>deploymentMode</a:t>
+            </a:r>
+            <a:r>
+              <a:rPr lang="en-US" sz="1600" dirty="0"/>
+              <a:t> = primary | dr</a:t>
+            </a:r>
+          </a:p>
+          <a:p>
+            <a:pPr lvl="2"/>
+            <a:r>
+              <a:rPr lang="en-US" sz="1600" dirty="0" err="1"/>
+              <a:t>environmentMode</a:t>
+            </a:r>
+            <a:r>
+              <a:rPr lang="en-US" sz="1600" dirty="0"/>
+              <a:t> = prod | dev</a:t>
+            </a:r>
+          </a:p>
+          <a:p>
+            <a:pPr lvl="1"/>
+            <a:r>
+              <a:rPr lang="en-US" sz="1600" dirty="0"/>
+              <a:t>No secrets in code or parameter files, password passed in from environment variable</a:t>
+            </a:r>
+          </a:p>
+          <a:p>
+            <a:pPr marL="0" lvl="1" indent="0">
+              <a:buNone/>
+            </a:pPr>
+            <a:r>
+              <a:rPr lang="en-US" u="sng" dirty="0"/>
+              <a:t>No DNS reconfiguration in disaster situation</a:t>
+            </a:r>
+          </a:p>
+          <a:p>
+            <a:pPr marL="285750" lvl="1"/>
+            <a:r>
+              <a:rPr lang="en-US" sz="1600" dirty="0"/>
+              <a:t>Single, constant FQDN: Traffic Manager automatically routes traffic to live Web App</a:t>
+            </a:r>
+          </a:p>
+          <a:p>
+            <a:pPr marL="0" lvl="1" indent="0">
+              <a:buNone/>
+            </a:pPr>
+            <a:r>
+              <a:rPr lang="en-US" u="sng" dirty="0"/>
+              <a:t>Primary – Disaster Recovery</a:t>
+            </a:r>
+          </a:p>
+          <a:p>
+            <a:pPr marL="285750" lvl="1"/>
+            <a:r>
+              <a:rPr lang="en-US" sz="1600" dirty="0"/>
+              <a:t>In disaster, just redeploy </a:t>
+            </a:r>
+            <a:r>
+              <a:rPr lang="en-US" sz="1600" dirty="0" err="1"/>
+              <a:t>main.bicep</a:t>
+            </a:r>
+            <a:r>
+              <a:rPr lang="en-US" sz="1600" dirty="0"/>
+              <a:t> with </a:t>
+            </a:r>
+            <a:r>
+              <a:rPr lang="en-US" sz="1600" dirty="0" err="1"/>
+              <a:t>deploymentMode</a:t>
+            </a:r>
+            <a:r>
+              <a:rPr lang="en-US" sz="1600" dirty="0"/>
+              <a:t> set to dr, no other actions needed</a:t>
+            </a:r>
+          </a:p>
+          <a:p>
+            <a:pPr marL="285750" lvl="1"/>
+            <a:r>
+              <a:rPr lang="en-US" sz="1600" dirty="0"/>
+              <a:t>Database is automatically restored from copy</a:t>
+            </a:r>
+          </a:p>
+          <a:p>
+            <a:pPr marL="0" lvl="1" indent="0">
+              <a:buNone/>
+            </a:pPr>
+            <a:r>
+              <a:rPr lang="en-US" u="sng" dirty="0"/>
+              <a:t>Development environment</a:t>
+            </a:r>
+          </a:p>
+          <a:p>
+            <a:pPr marL="285750" lvl="1"/>
+            <a:r>
+              <a:rPr lang="en-US" sz="1600" dirty="0"/>
+              <a:t>Separate deployment</a:t>
+            </a:r>
+          </a:p>
+          <a:p>
+            <a:pPr marL="285750" lvl="1"/>
+            <a:r>
+              <a:rPr lang="en-US" sz="1600" dirty="0"/>
+              <a:t>Uses lower grade, cheaper component SKUs</a:t>
+            </a:r>
+          </a:p>
+          <a:p>
+            <a:endParaRPr lang="en-US" dirty="0"/>
+          </a:p>
+        </p:txBody>
+      </p:sp>
+      <p:sp>
+        <p:nvSpPr>
+          <p:cNvPr id="7" name="Slide Number Placeholder 6">
+            <a:extLst>
+              <a:ext uri="{FF2B5EF4-FFF2-40B4-BE49-F238E27FC236}">
+                <a16:creationId xmlns:a16="http://schemas.microsoft.com/office/drawing/2014/main" id="{A76A76CF-551D-D96B-4DD0-734D98124EC8}"/>
+              </a:ext>
+            </a:extLst>
+          </p:cNvPr>
+          <p:cNvSpPr>
+            <a:spLocks noGrp="1"/>
+          </p:cNvSpPr>
+          <p:nvPr>
+            <p:ph type="sldNum" sz="quarter" idx="13"/>
+          </p:nvPr>
+        </p:nvSpPr>
+        <p:spPr>
+          <a:xfrm>
+            <a:off x="10373350" y="6356349"/>
+            <a:ext cx="987552" cy="365125"/>
+          </a:xfrm>
+        </p:spPr>
+        <p:txBody>
+          <a:bodyPr/>
+          <a:lstStyle/>
+          <a:p>
+            <a:fld id="{A49DFD55-3C28-40EF-9E31-A92D2E4017FF}" type="slidenum">
+              <a:rPr lang="en-US" smtClean="0"/>
+              <a:pPr/>
+              <a:t>7</a:t>
+            </a:fld>
+            <a:endParaRPr lang="en-US" dirty="0"/>
+          </a:p>
+        </p:txBody>
+      </p:sp>
+    </p:spTree>
+    <p:extLst>
+      <p:ext uri="{BB962C8B-B14F-4D97-AF65-F5344CB8AC3E}">
+        <p14:creationId xmlns:p14="http://schemas.microsoft.com/office/powerpoint/2010/main" val="1400367988"/>
+      </p:ext>
+    </p:extLst>
+  </p:cSld>
+  <p:clrMapOvr>
+    <a:masterClrMapping/>
+  </p:clrMapOvr>
+</p:sld>
+</file>
+
+<file path=ppt/slides/slide8.xml><?xml version="1.0" encoding="utf-8"?>
+<p:sld xmlns:a="http://schemas.openxmlformats.org/drawingml/2006/main" xmlns:r="http://schemas.openxmlformats.org/officeDocument/2006/relationships" xmlns:p="http://schemas.openxmlformats.org/presentationml/2006/main">
+  <p:cSld>
+    <p:spTree>
+      <p:nvGrpSpPr>
+        <p:cNvPr id="1" name="">
+          <a:extLst>
+            <a:ext uri="{FF2B5EF4-FFF2-40B4-BE49-F238E27FC236}">
+              <a16:creationId xmlns:a16="http://schemas.microsoft.com/office/drawing/2014/main" id="{B2C3D0D8-DA1C-D17A-9FEC-808E5190CEDD}"/>
+            </a:ext>
+          </a:extLst>
+        </p:cNvPr>
+        <p:cNvGrpSpPr/>
+        <p:nvPr/>
+      </p:nvGrpSpPr>
+      <p:grpSpPr>
+        <a:xfrm>
+          <a:off x="0" y="0"/>
+          <a:ext cx="0" cy="0"/>
+          <a:chOff x="0" y="0"/>
+          <a:chExt cx="0" cy="0"/>
+        </a:xfrm>
+      </p:grpSpPr>
+      <p:sp>
+        <p:nvSpPr>
+          <p:cNvPr id="2" name="Title 1">
+            <a:extLst>
+              <a:ext uri="{FF2B5EF4-FFF2-40B4-BE49-F238E27FC236}">
+                <a16:creationId xmlns:a16="http://schemas.microsoft.com/office/drawing/2014/main" id="{3FD52074-8433-28E2-CB9E-10D742493B18}"/>
+              </a:ext>
+            </a:extLst>
+          </p:cNvPr>
+          <p:cNvSpPr>
+            <a:spLocks noGrp="1"/>
+          </p:cNvSpPr>
+          <p:nvPr>
+            <p:ph type="title"/>
+          </p:nvPr>
+        </p:nvSpPr>
+        <p:spPr>
+          <a:xfrm>
+            <a:off x="1341438" y="506895"/>
+            <a:ext cx="9953625" cy="660262"/>
+          </a:xfrm>
+        </p:spPr>
+        <p:txBody>
+          <a:bodyPr/>
+          <a:lstStyle/>
+          <a:p>
+            <a:r>
+              <a:rPr lang="en-US" dirty="0"/>
+              <a:t>Demo deployment</a:t>
+            </a:r>
+          </a:p>
+        </p:txBody>
+      </p:sp>
+      <p:sp>
+        <p:nvSpPr>
+          <p:cNvPr id="6" name="Content Placeholder 5">
+            <a:extLst>
+              <a:ext uri="{FF2B5EF4-FFF2-40B4-BE49-F238E27FC236}">
+                <a16:creationId xmlns:a16="http://schemas.microsoft.com/office/drawing/2014/main" id="{11B7893D-8A22-EA01-6F2D-54F7D7593EF2}"/>
+              </a:ext>
+            </a:extLst>
+          </p:cNvPr>
+          <p:cNvSpPr>
+            <a:spLocks noGrp="1"/>
+          </p:cNvSpPr>
+          <p:nvPr>
+            <p:ph sz="half" idx="14"/>
+          </p:nvPr>
+        </p:nvSpPr>
+        <p:spPr>
+          <a:xfrm>
+            <a:off x="1341437" y="1224556"/>
+            <a:ext cx="10170377" cy="5126549"/>
+          </a:xfrm>
+        </p:spPr>
+        <p:txBody>
+          <a:bodyPr>
+            <a:normAutofit lnSpcReduction="10000"/>
+          </a:bodyPr>
+          <a:lstStyle/>
+          <a:p>
+            <a:r>
+              <a:rPr lang="en-US" sz="2000" u="sng" dirty="0"/>
+              <a:t>Web API application</a:t>
+            </a:r>
+          </a:p>
+          <a:p>
+            <a:pPr lvl="1"/>
+            <a:r>
+              <a:rPr lang="en-US" sz="2000" dirty="0"/>
+              <a:t>API component from YADA demo app </a:t>
+            </a:r>
+            <a:r>
+              <a:rPr lang="en-US" sz="2000" dirty="0" err="1">
+                <a:hlinkClick r:id="rId2"/>
+              </a:rPr>
+              <a:t>microsoft</a:t>
+            </a:r>
+            <a:r>
+              <a:rPr lang="en-US" sz="2000" dirty="0">
+                <a:hlinkClick r:id="rId2"/>
+              </a:rPr>
+              <a:t>/YADA: Yet Another Demo App</a:t>
+            </a:r>
+            <a:endParaRPr lang="en-US" sz="2000" dirty="0"/>
+          </a:p>
+          <a:p>
+            <a:pPr lvl="1"/>
+            <a:r>
+              <a:rPr lang="en-US" sz="2000" dirty="0"/>
+              <a:t>Container image deployed to Web App by </a:t>
+            </a:r>
+            <a:r>
+              <a:rPr lang="en-US" sz="2000" dirty="0" err="1"/>
+              <a:t>IaC</a:t>
+            </a:r>
+            <a:r>
+              <a:rPr lang="en-US" sz="2000" dirty="0"/>
+              <a:t>, environment variables set appropriately</a:t>
+            </a:r>
+          </a:p>
+          <a:p>
+            <a:pPr lvl="1"/>
+            <a:r>
+              <a:rPr lang="en-US" sz="2000" dirty="0"/>
+              <a:t>To avoid certificate complexities, the demo environment uses non-TLS secured (http://) connections</a:t>
+            </a:r>
+            <a:br>
+              <a:rPr lang="en-US" sz="2000" dirty="0"/>
+            </a:br>
+            <a:r>
+              <a:rPr lang="en-US" sz="2000" dirty="0"/>
+              <a:t>(this will be changed for production)</a:t>
+            </a:r>
+          </a:p>
+          <a:p>
+            <a:pPr lvl="1"/>
+            <a:r>
+              <a:rPr lang="en-US" sz="2000" dirty="0"/>
+              <a:t>API exposes endpoints to:</a:t>
+            </a:r>
+          </a:p>
+          <a:p>
+            <a:pPr lvl="2"/>
+            <a:r>
+              <a:rPr lang="en-US" sz="2000" dirty="0"/>
+              <a:t>Query database for version</a:t>
+            </a:r>
+          </a:p>
+          <a:p>
+            <a:pPr lvl="2"/>
+            <a:r>
+              <a:rPr lang="en-US" sz="2000" dirty="0"/>
+              <a:t>Return client source IP</a:t>
+            </a:r>
+          </a:p>
+          <a:p>
+            <a:pPr lvl="2"/>
+            <a:r>
+              <a:rPr lang="en-US" sz="2000" dirty="0"/>
+              <a:t>Write client access events with source IP and timestamp to a table</a:t>
+            </a:r>
+          </a:p>
+          <a:p>
+            <a:pPr marL="0" lvl="1" indent="0">
+              <a:buNone/>
+            </a:pPr>
+            <a:r>
+              <a:rPr lang="en-US" sz="2000" u="sng" dirty="0"/>
+              <a:t>Database</a:t>
+            </a:r>
+          </a:p>
+          <a:p>
+            <a:pPr marL="285750" lvl="1"/>
+            <a:r>
+              <a:rPr lang="en-US" sz="2000" dirty="0"/>
+              <a:t>Empty / default PostgreSQL deployment, no data loaded</a:t>
+            </a:r>
+          </a:p>
+          <a:p>
+            <a:pPr marL="0" lvl="1" indent="0">
+              <a:buNone/>
+            </a:pPr>
+            <a:endParaRPr lang="en-US" sz="1600" dirty="0"/>
+          </a:p>
+          <a:p>
+            <a:pPr marL="285750" lvl="1"/>
+            <a:endParaRPr lang="en-US" sz="1600" dirty="0"/>
+          </a:p>
+          <a:p>
+            <a:endParaRPr lang="en-US" dirty="0"/>
+          </a:p>
+        </p:txBody>
+      </p:sp>
+      <p:sp>
+        <p:nvSpPr>
+          <p:cNvPr id="7" name="Slide Number Placeholder 6">
+            <a:extLst>
+              <a:ext uri="{FF2B5EF4-FFF2-40B4-BE49-F238E27FC236}">
+                <a16:creationId xmlns:a16="http://schemas.microsoft.com/office/drawing/2014/main" id="{DEF34208-E324-8C02-D13D-AB72E945B7C2}"/>
+              </a:ext>
+            </a:extLst>
+          </p:cNvPr>
+          <p:cNvSpPr>
+            <a:spLocks noGrp="1"/>
+          </p:cNvSpPr>
+          <p:nvPr>
+            <p:ph type="sldNum" sz="quarter" idx="13"/>
+          </p:nvPr>
+        </p:nvSpPr>
+        <p:spPr>
+          <a:xfrm>
+            <a:off x="10373350" y="6356349"/>
+            <a:ext cx="987552" cy="365125"/>
+          </a:xfrm>
+        </p:spPr>
+        <p:txBody>
+          <a:bodyPr/>
+          <a:lstStyle/>
+          <a:p>
+            <a:fld id="{A49DFD55-3C28-40EF-9E31-A92D2E4017FF}" type="slidenum">
+              <a:rPr lang="en-US" smtClean="0"/>
+              <a:pPr/>
+              <a:t>8</a:t>
+            </a:fld>
+            <a:endParaRPr lang="en-US" dirty="0"/>
+          </a:p>
+        </p:txBody>
+      </p:sp>
+    </p:spTree>
+    <p:extLst>
+      <p:ext uri="{BB962C8B-B14F-4D97-AF65-F5344CB8AC3E}">
+        <p14:creationId xmlns:p14="http://schemas.microsoft.com/office/powerpoint/2010/main" val="2018970457"/>
+      </p:ext>
+    </p:extLst>
+  </p:cSld>
+  <p:clrMapOvr>
+    <a:masterClrMapping/>
+  </p:clrMapOvr>
+</p:sld>
+</file>
+
+<file path=ppt/slides/slide9.xml><?xml version="1.0" encoding="utf-8"?>
+<p:sld xmlns:a="http://schemas.openxmlformats.org/drawingml/2006/main" xmlns:r="http://schemas.openxmlformats.org/officeDocument/2006/relationships" xmlns:p="http://schemas.openxmlformats.org/presentationml/2006/main">
+  <p:cSld>
+    <p:spTree>
+      <p:nvGrpSpPr>
+        <p:cNvPr id="1" name="">
+          <a:extLst>
+            <a:ext uri="{FF2B5EF4-FFF2-40B4-BE49-F238E27FC236}">
+              <a16:creationId xmlns:a16="http://schemas.microsoft.com/office/drawing/2014/main" id="{E0987E7B-D3A8-17F7-A8B9-0A04E01085C2}"/>
+            </a:ext>
+          </a:extLst>
+        </p:cNvPr>
+        <p:cNvGrpSpPr/>
+        <p:nvPr/>
+      </p:nvGrpSpPr>
+      <p:grpSpPr>
+        <a:xfrm>
+          <a:off x="0" y="0"/>
+          <a:ext cx="0" cy="0"/>
+          <a:chOff x="0" y="0"/>
+          <a:chExt cx="0" cy="0"/>
+        </a:xfrm>
+      </p:grpSpPr>
+      <p:sp>
+        <p:nvSpPr>
+          <p:cNvPr id="2" name="Title 1">
+            <a:extLst>
+              <a:ext uri="{FF2B5EF4-FFF2-40B4-BE49-F238E27FC236}">
+                <a16:creationId xmlns:a16="http://schemas.microsoft.com/office/drawing/2014/main" id="{6EE746FE-6A4E-D6C5-B2D0-068BE384E4CD}"/>
+              </a:ext>
+            </a:extLst>
+          </p:cNvPr>
+          <p:cNvSpPr>
+            <a:spLocks noGrp="1"/>
+          </p:cNvSpPr>
+          <p:nvPr>
+            <p:ph type="title"/>
+          </p:nvPr>
+        </p:nvSpPr>
+        <p:spPr>
+          <a:xfrm>
+            <a:off x="1341438" y="506895"/>
+            <a:ext cx="9953625" cy="660262"/>
+          </a:xfrm>
+        </p:spPr>
+        <p:txBody>
+          <a:bodyPr/>
+          <a:lstStyle/>
+          <a:p>
+            <a:r>
+              <a:rPr lang="en-US" dirty="0"/>
+              <a:t>test</a:t>
+            </a:r>
+          </a:p>
+        </p:txBody>
+      </p:sp>
+      <p:sp>
+        <p:nvSpPr>
+          <p:cNvPr id="6" name="Content Placeholder 5">
+            <a:extLst>
+              <a:ext uri="{FF2B5EF4-FFF2-40B4-BE49-F238E27FC236}">
+                <a16:creationId xmlns:a16="http://schemas.microsoft.com/office/drawing/2014/main" id="{25855E2E-9EDB-6E19-A737-906AC26190D0}"/>
+              </a:ext>
+            </a:extLst>
+          </p:cNvPr>
+          <p:cNvSpPr>
+            <a:spLocks noGrp="1"/>
+          </p:cNvSpPr>
+          <p:nvPr>
+            <p:ph sz="half" idx="14"/>
+          </p:nvPr>
+        </p:nvSpPr>
+        <p:spPr>
+          <a:xfrm>
+            <a:off x="1341437" y="1224556"/>
+            <a:ext cx="10170377" cy="5126549"/>
+          </a:xfrm>
+        </p:spPr>
+        <p:txBody>
+          <a:bodyPr>
+            <a:normAutofit fontScale="47500" lnSpcReduction="20000"/>
+          </a:bodyPr>
+          <a:lstStyle/>
+          <a:p>
+            <a:pPr marL="0" lvl="1" indent="0">
+              <a:buNone/>
+            </a:pPr>
+            <a:r>
+              <a:rPr lang="en-US" sz="1700" u="sng" dirty="0">
+                <a:latin typeface="Lucida Console" panose="020B0609040504020204" pitchFamily="49" charset="0"/>
+              </a:rPr>
+              <a:t>Database version</a:t>
+            </a:r>
+          </a:p>
+          <a:p>
+            <a:pPr marL="0" lvl="1" indent="0">
+              <a:buNone/>
+            </a:pPr>
+            <a:r>
+              <a:rPr lang="en-US" sz="1700" dirty="0">
+                <a:latin typeface="Lucida Console" panose="020B0609040504020204" pitchFamily="49" charset="0"/>
+              </a:rPr>
+              <a:t>http://novabank.dedroog.net/api/sqlversion</a:t>
+            </a:r>
+          </a:p>
+          <a:p>
+            <a:r>
+              <a:rPr lang="en-US" sz="1700" dirty="0">
+                <a:latin typeface="Lucida Console" panose="020B0609040504020204" pitchFamily="49" charset="0"/>
+              </a:rPr>
+              <a:t>{</a:t>
+            </a:r>
+          </a:p>
+          <a:p>
+            <a:r>
+              <a:rPr lang="en-US" sz="1700" dirty="0">
+                <a:latin typeface="Lucida Console" panose="020B0609040504020204" pitchFamily="49" charset="0"/>
+              </a:rPr>
+              <a:t>  "</a:t>
+            </a:r>
+            <a:r>
+              <a:rPr lang="en-US" sz="1700" dirty="0" err="1">
+                <a:latin typeface="Lucida Console" panose="020B0609040504020204" pitchFamily="49" charset="0"/>
+              </a:rPr>
+              <a:t>sql_output</a:t>
+            </a:r>
+            <a:r>
+              <a:rPr lang="en-US" sz="1700" dirty="0">
+                <a:latin typeface="Lucida Console" panose="020B0609040504020204" pitchFamily="49" charset="0"/>
+              </a:rPr>
+              <a:t>": "PostgreSQL 16.15 on x86_64-pc-linux-gnu, compiled by </a:t>
+            </a:r>
+            <a:r>
+              <a:rPr lang="en-US" sz="1700" dirty="0" err="1">
+                <a:latin typeface="Lucida Console" panose="020B0609040504020204" pitchFamily="49" charset="0"/>
+              </a:rPr>
+              <a:t>gcc</a:t>
+            </a:r>
+            <a:r>
+              <a:rPr lang="en-US" sz="1700" dirty="0">
+                <a:latin typeface="Lucida Console" panose="020B0609040504020204" pitchFamily="49" charset="0"/>
+              </a:rPr>
+              <a:t> (GCC) 13.2.0, 64-bit"</a:t>
+            </a:r>
+          </a:p>
+          <a:p>
+            <a:r>
+              <a:rPr lang="en-US" sz="1700" dirty="0">
+                <a:latin typeface="Lucida Console" panose="020B0609040504020204" pitchFamily="49" charset="0"/>
+              </a:rPr>
+              <a:t>}</a:t>
+            </a:r>
+          </a:p>
+          <a:p>
+            <a:r>
+              <a:rPr lang="en-US" sz="1700" u="sng" dirty="0">
+                <a:latin typeface="Lucida Console" panose="020B0609040504020204" pitchFamily="49" charset="0"/>
+              </a:rPr>
+              <a:t>Client IP</a:t>
+            </a:r>
+          </a:p>
+          <a:p>
+            <a:pPr marL="0" lvl="1" indent="0">
+              <a:buNone/>
+            </a:pPr>
+            <a:r>
+              <a:rPr lang="en-US" sz="1700" dirty="0">
+                <a:latin typeface="Lucida Console" panose="020B0609040504020204" pitchFamily="49" charset="0"/>
+              </a:rPr>
+              <a:t>http://novabank.dedroog.net/api/sqlsrcip</a:t>
+            </a:r>
+          </a:p>
+          <a:p>
+            <a:r>
+              <a:rPr lang="en-US" sz="1700" dirty="0">
+                <a:latin typeface="Lucida Console" panose="020B0609040504020204" pitchFamily="49" charset="0"/>
+                <a:cs typeface="Arial" panose="020B0604020202020204" pitchFamily="34" charset="0"/>
+              </a:rPr>
+              <a:t>{</a:t>
+            </a:r>
+          </a:p>
+          <a:p>
+            <a:r>
+              <a:rPr lang="en-US" sz="1700" dirty="0">
+                <a:latin typeface="Lucida Console" panose="020B0609040504020204" pitchFamily="49" charset="0"/>
+                <a:cs typeface="Arial" panose="020B0604020202020204" pitchFamily="34" charset="0"/>
+              </a:rPr>
+              <a:t>  "</a:t>
+            </a:r>
+            <a:r>
+              <a:rPr lang="en-US" sz="1700" dirty="0" err="1">
+                <a:latin typeface="Lucida Console" panose="020B0609040504020204" pitchFamily="49" charset="0"/>
+                <a:cs typeface="Arial" panose="020B0604020202020204" pitchFamily="34" charset="0"/>
+              </a:rPr>
+              <a:t>sql_output</a:t>
+            </a:r>
+            <a:r>
+              <a:rPr lang="en-US" sz="1700" dirty="0">
+                <a:latin typeface="Lucida Console" panose="020B0609040504020204" pitchFamily="49" charset="0"/>
+                <a:cs typeface="Arial" panose="020B0604020202020204" pitchFamily="34" charset="0"/>
+              </a:rPr>
+              <a:t>": "10.0.2.254"</a:t>
+            </a:r>
+          </a:p>
+          <a:p>
+            <a:r>
+              <a:rPr lang="en-US" sz="1700" dirty="0">
+                <a:latin typeface="Lucida Console" panose="020B0609040504020204" pitchFamily="49" charset="0"/>
+                <a:cs typeface="Arial" panose="020B0604020202020204" pitchFamily="34" charset="0"/>
+              </a:rPr>
+              <a:t>}</a:t>
+            </a:r>
+          </a:p>
+          <a:p>
+            <a:pPr marL="0" lvl="1" indent="0">
+              <a:buNone/>
+            </a:pPr>
+            <a:r>
+              <a:rPr lang="en-US" sz="1700" u="sng" dirty="0">
+                <a:latin typeface="Lucida Console" panose="020B0609040504020204" pitchFamily="49" charset="0"/>
+              </a:rPr>
+              <a:t>Create table</a:t>
+            </a:r>
+          </a:p>
+          <a:p>
+            <a:pPr marL="0" lvl="1" indent="0">
+              <a:buNone/>
+            </a:pPr>
+            <a:r>
+              <a:rPr lang="en-US" sz="1700" dirty="0">
+                <a:latin typeface="Lucida Console" panose="020B0609040504020204" pitchFamily="49" charset="0"/>
+              </a:rPr>
+              <a:t>http://novabank.dedroog.net//api/sqlsrcipinit</a:t>
+            </a:r>
+          </a:p>
+          <a:p>
+            <a:r>
+              <a:rPr lang="en-US" sz="1700" dirty="0">
+                <a:latin typeface="Lucida Console" panose="020B0609040504020204" pitchFamily="49" charset="0"/>
+              </a:rPr>
+              <a:t>{</a:t>
+            </a:r>
+          </a:p>
+          <a:p>
+            <a:r>
+              <a:rPr lang="en-US" sz="1700" dirty="0">
+                <a:latin typeface="Lucida Console" panose="020B0609040504020204" pitchFamily="49" charset="0"/>
+              </a:rPr>
+              <a:t>  "</a:t>
+            </a:r>
+            <a:r>
+              <a:rPr lang="en-US" sz="1700" dirty="0" err="1">
+                <a:latin typeface="Lucida Console" panose="020B0609040504020204" pitchFamily="49" charset="0"/>
+              </a:rPr>
+              <a:t>table_created</a:t>
+            </a:r>
+            <a:r>
+              <a:rPr lang="en-US" sz="1700" dirty="0">
+                <a:latin typeface="Lucida Console" panose="020B0609040504020204" pitchFamily="49" charset="0"/>
+              </a:rPr>
+              <a:t>": "</a:t>
+            </a:r>
+            <a:r>
+              <a:rPr lang="en-US" sz="1700" dirty="0" err="1">
+                <a:latin typeface="Lucida Console" panose="020B0609040504020204" pitchFamily="49" charset="0"/>
+              </a:rPr>
+              <a:t>srciplog</a:t>
+            </a:r>
+            <a:r>
+              <a:rPr lang="en-US" sz="1700" dirty="0">
+                <a:latin typeface="Lucida Console" panose="020B0609040504020204" pitchFamily="49" charset="0"/>
+              </a:rPr>
+              <a:t>"</a:t>
+            </a:r>
+          </a:p>
+          <a:p>
+            <a:r>
+              <a:rPr lang="en-US" sz="1700" dirty="0">
+                <a:latin typeface="Lucida Console" panose="020B0609040504020204" pitchFamily="49" charset="0"/>
+              </a:rPr>
+              <a:t>}</a:t>
+            </a:r>
+          </a:p>
+          <a:p>
+            <a:r>
+              <a:rPr lang="en-US" sz="1700" u="sng" dirty="0">
+                <a:latin typeface="Lucida Console" panose="020B0609040504020204" pitchFamily="49" charset="0"/>
+              </a:rPr>
+              <a:t>Log access</a:t>
+            </a:r>
+          </a:p>
+          <a:p>
+            <a:pPr marL="0" lvl="1" indent="0">
+              <a:buNone/>
+            </a:pPr>
+            <a:r>
+              <a:rPr lang="en-US" sz="1700" dirty="0">
+                <a:latin typeface="Lucida Console" panose="020B0609040504020204" pitchFamily="49" charset="0"/>
+              </a:rPr>
+              <a:t>http://novabank.dedroog.net//api/sqlsrciplog</a:t>
+            </a:r>
+          </a:p>
+          <a:p>
+            <a:r>
+              <a:rPr lang="en-US" sz="1700" dirty="0">
+                <a:latin typeface="Lucida Console" panose="020B0609040504020204" pitchFamily="49" charset="0"/>
+              </a:rPr>
+              <a:t>{</a:t>
+            </a:r>
+          </a:p>
+          <a:p>
+            <a:r>
+              <a:rPr lang="en-US" sz="1700" dirty="0">
+                <a:latin typeface="Lucida Console" panose="020B0609040504020204" pitchFamily="49" charset="0"/>
+              </a:rPr>
+              <a:t>  "</a:t>
+            </a:r>
+            <a:r>
+              <a:rPr lang="en-US" sz="1700" dirty="0" err="1">
+                <a:latin typeface="Lucida Console" panose="020B0609040504020204" pitchFamily="49" charset="0"/>
+              </a:rPr>
+              <a:t>srciplog</a:t>
+            </a:r>
+            <a:r>
+              <a:rPr lang="en-US" sz="1700" dirty="0">
+                <a:latin typeface="Lucida Console" panose="020B0609040504020204" pitchFamily="49" charset="0"/>
+              </a:rPr>
+              <a:t>": {</a:t>
+            </a:r>
+          </a:p>
+          <a:p>
+            <a:r>
+              <a:rPr lang="en-US" sz="1700" dirty="0">
+                <a:latin typeface="Lucida Console" panose="020B0609040504020204" pitchFamily="49" charset="0"/>
+              </a:rPr>
+              <a:t>    "</a:t>
+            </a:r>
+            <a:r>
+              <a:rPr lang="en-US" sz="1700" dirty="0" err="1">
+                <a:latin typeface="Lucida Console" panose="020B0609040504020204" pitchFamily="49" charset="0"/>
+              </a:rPr>
+              <a:t>ip</a:t>
+            </a:r>
+            <a:r>
+              <a:rPr lang="en-US" sz="1700" dirty="0">
+                <a:latin typeface="Lucida Console" panose="020B0609040504020204" pitchFamily="49" charset="0"/>
+              </a:rPr>
+              <a:t>": "10.0.2.254",</a:t>
+            </a:r>
+          </a:p>
+          <a:p>
+            <a:r>
+              <a:rPr lang="en-US" sz="1700" dirty="0">
+                <a:latin typeface="Lucida Console" panose="020B0609040504020204" pitchFamily="49" charset="0"/>
+              </a:rPr>
+              <a:t>    "timestamp": "2026-10-07 16:12:45.271077"</a:t>
+            </a:r>
+          </a:p>
+          <a:p>
+            <a:r>
+              <a:rPr lang="en-US" sz="1700" dirty="0">
+                <a:latin typeface="Lucida Console" panose="020B0609040504020204" pitchFamily="49" charset="0"/>
+              </a:rPr>
+              <a:t>  }</a:t>
+            </a:r>
+          </a:p>
+          <a:p>
+            <a:r>
+              <a:rPr lang="en-US" sz="1700" dirty="0">
+                <a:latin typeface="Lucida Console" panose="020B0609040504020204" pitchFamily="49" charset="0"/>
+              </a:rPr>
+              <a:t>}</a:t>
+            </a:r>
+          </a:p>
+          <a:p>
+            <a:pPr marL="0" lvl="1" indent="0">
+              <a:buNone/>
+            </a:pPr>
+            <a:endParaRPr lang="en-US" sz="1600" dirty="0"/>
+          </a:p>
+          <a:p>
+            <a:pPr marL="285750" lvl="1"/>
+            <a:endParaRPr lang="en-US" sz="1600" dirty="0"/>
+          </a:p>
+          <a:p>
+            <a:endParaRPr lang="en-US" dirty="0"/>
+          </a:p>
+        </p:txBody>
+      </p:sp>
+      <p:sp>
+        <p:nvSpPr>
+          <p:cNvPr id="7" name="Slide Number Placeholder 6">
+            <a:extLst>
+              <a:ext uri="{FF2B5EF4-FFF2-40B4-BE49-F238E27FC236}">
+                <a16:creationId xmlns:a16="http://schemas.microsoft.com/office/drawing/2014/main" id="{A9F5A11B-6355-0387-AB61-2505D71B5852}"/>
+              </a:ext>
+            </a:extLst>
+          </p:cNvPr>
+          <p:cNvSpPr>
+            <a:spLocks noGrp="1"/>
+          </p:cNvSpPr>
+          <p:nvPr>
+            <p:ph type="sldNum" sz="quarter" idx="13"/>
+          </p:nvPr>
+        </p:nvSpPr>
+        <p:spPr>
+          <a:xfrm>
+            <a:off x="10373350" y="6356349"/>
+            <a:ext cx="987552" cy="365125"/>
+          </a:xfrm>
+        </p:spPr>
+        <p:txBody>
+          <a:bodyPr/>
+          <a:lstStyle/>
+          <a:p>
+            <a:fld id="{A49DFD55-3C28-40EF-9E31-A92D2E4017FF}" type="slidenum">
+              <a:rPr lang="en-US" smtClean="0"/>
+              <a:pPr/>
+              <a:t>9</a:t>
+            </a:fld>
+            <a:endParaRPr lang="en-US" dirty="0"/>
+          </a:p>
+        </p:txBody>
+      </p:sp>
+    </p:spTree>
+    <p:extLst>
+      <p:ext uri="{BB962C8B-B14F-4D97-AF65-F5344CB8AC3E}">
+        <p14:creationId xmlns:p14="http://schemas.microsoft.com/office/powerpoint/2010/main" val="2440905073"/>
       </p:ext>
     </p:extLst>
   </p:cSld>

--- a/slides/novabank.pptx
+++ b/slides/novabank.pptx
@@ -5,10 +5,10 @@
     <p:sldMasterId id="2147483648" r:id="rId4"/>
   </p:sldMasterIdLst>
   <p:notesMasterIdLst>
-    <p:notesMasterId r:id="rId15"/>
+    <p:notesMasterId r:id="rId16"/>
   </p:notesMasterIdLst>
   <p:handoutMasterIdLst>
-    <p:handoutMasterId r:id="rId16"/>
+    <p:handoutMasterId r:id="rId17"/>
   </p:handoutMasterIdLst>
   <p:sldIdLst>
     <p:sldId id="278" r:id="rId5"/>
@@ -18,9 +18,10 @@
     <p:sldId id="286" r:id="rId9"/>
     <p:sldId id="282" r:id="rId10"/>
     <p:sldId id="283" r:id="rId11"/>
-    <p:sldId id="284" r:id="rId12"/>
-    <p:sldId id="287" r:id="rId13"/>
-    <p:sldId id="271" r:id="rId14"/>
+    <p:sldId id="288" r:id="rId12"/>
+    <p:sldId id="284" r:id="rId13"/>
+    <p:sldId id="287" r:id="rId14"/>
+    <p:sldId id="271" r:id="rId15"/>
   </p:sldIdLst>
   <p:sldSz cx="12192000" cy="6858000"/>
   <p:notesSz cx="6858000" cy="9144000"/>
@@ -133,7 +134,7 @@
 <file path=ppt/revisionInfo.xml><?xml version="1.0" encoding="utf-8"?>
 <p1510:revInfo xmlns:a="http://schemas.openxmlformats.org/drawingml/2006/main" xmlns:r="http://schemas.openxmlformats.org/officeDocument/2006/relationships" xmlns:p1510="http://schemas.microsoft.com/office/powerpoint/2015/10/main">
   <p1510:revLst>
-    <p1510:client id="{71F9AD6F-ACAE-4D67-8DDA-D98C7612B477}" v="45" dt="2026-10-07T16:13:00.148"/>
+    <p1510:client id="{71F9AD6F-ACAE-4D67-8DDA-D98C7612B477}" v="49" dt="2026-10-07T16:33:59.282"/>
   </p1510:revLst>
 </p1510:revInfo>
 </file>
@@ -143,7 +144,7 @@
   <pc:docChgLst>
     <pc:chgData name="Marc de Droog" userId="3ea1787d3693c09c" providerId="LiveId" clId="{20620065-C08F-41CF-B954-B8DD4409FD95}"/>
     <pc:docChg chg="addSld delSld modSld sldOrd">
-      <pc:chgData name="Marc de Droog" userId="3ea1787d3693c09c" providerId="LiveId" clId="{20620065-C08F-41CF-B954-B8DD4409FD95}" dt="2026-10-07T16:13:00.148" v="42"/>
+      <pc:chgData name="Marc de Droog" userId="3ea1787d3693c09c" providerId="LiveId" clId="{20620065-C08F-41CF-B954-B8DD4409FD95}" dt="2026-10-07T16:31:39.426" v="43"/>
       <pc:docMkLst>
         <pc:docMk/>
       </pc:docMkLst>
@@ -288,6 +289,13 @@
           <pc:sldMk cId="2600672683" sldId="287"/>
         </pc:sldMkLst>
       </pc:sldChg>
+      <pc:sldChg chg="add">
+        <pc:chgData name="Marc de Droog" userId="3ea1787d3693c09c" providerId="LiveId" clId="{20620065-C08F-41CF-B954-B8DD4409FD95}" dt="2026-10-07T16:31:39.426" v="43"/>
+        <pc:sldMkLst>
+          <pc:docMk/>
+          <pc:sldMk cId="4123477654" sldId="288"/>
+        </pc:sldMkLst>
+      </pc:sldChg>
     </pc:docChg>
   </pc:docChgLst>
 </pc:chgInfo>
@@ -980,7 +988,7 @@
           <a:p>
             <a:fld id="{22289C57-55D7-40A4-A101-E74FAC7A092B}" type="slidenum">
               <a:rPr lang="en-US" smtClean="0"/>
-              <a:t>10</a:t>
+              <a:t>11</a:t>
             </a:fld>
             <a:endParaRPr lang="en-US" dirty="0"/>
           </a:p>
@@ -6436,6 +6444,443 @@
   <p:cSld>
     <p:spTree>
       <p:nvGrpSpPr>
+        <p:cNvPr id="1" name="">
+          <a:extLst>
+            <a:ext uri="{FF2B5EF4-FFF2-40B4-BE49-F238E27FC236}">
+              <a16:creationId xmlns:a16="http://schemas.microsoft.com/office/drawing/2014/main" id="{E0987E7B-D3A8-17F7-A8B9-0A04E01085C2}"/>
+            </a:ext>
+          </a:extLst>
+        </p:cNvPr>
+        <p:cNvGrpSpPr/>
+        <p:nvPr/>
+      </p:nvGrpSpPr>
+      <p:grpSpPr>
+        <a:xfrm>
+          <a:off x="0" y="0"/>
+          <a:ext cx="0" cy="0"/>
+          <a:chOff x="0" y="0"/>
+          <a:chExt cx="0" cy="0"/>
+        </a:xfrm>
+      </p:grpSpPr>
+      <p:sp>
+        <p:nvSpPr>
+          <p:cNvPr id="2" name="Title 1">
+            <a:extLst>
+              <a:ext uri="{FF2B5EF4-FFF2-40B4-BE49-F238E27FC236}">
+                <a16:creationId xmlns:a16="http://schemas.microsoft.com/office/drawing/2014/main" id="{6EE746FE-6A4E-D6C5-B2D0-068BE384E4CD}"/>
+              </a:ext>
+            </a:extLst>
+          </p:cNvPr>
+          <p:cNvSpPr>
+            <a:spLocks noGrp="1"/>
+          </p:cNvSpPr>
+          <p:nvPr>
+            <p:ph type="title"/>
+          </p:nvPr>
+        </p:nvSpPr>
+        <p:spPr>
+          <a:xfrm>
+            <a:off x="1341438" y="506895"/>
+            <a:ext cx="9953625" cy="660262"/>
+          </a:xfrm>
+        </p:spPr>
+        <p:txBody>
+          <a:bodyPr/>
+          <a:lstStyle/>
+          <a:p>
+            <a:r>
+              <a:rPr lang="en-US" dirty="0"/>
+              <a:t>test</a:t>
+            </a:r>
+          </a:p>
+        </p:txBody>
+      </p:sp>
+      <p:sp>
+        <p:nvSpPr>
+          <p:cNvPr id="6" name="Content Placeholder 5">
+            <a:extLst>
+              <a:ext uri="{FF2B5EF4-FFF2-40B4-BE49-F238E27FC236}">
+                <a16:creationId xmlns:a16="http://schemas.microsoft.com/office/drawing/2014/main" id="{25855E2E-9EDB-6E19-A737-906AC26190D0}"/>
+              </a:ext>
+            </a:extLst>
+          </p:cNvPr>
+          <p:cNvSpPr>
+            <a:spLocks noGrp="1"/>
+          </p:cNvSpPr>
+          <p:nvPr>
+            <p:ph sz="half" idx="14"/>
+          </p:nvPr>
+        </p:nvSpPr>
+        <p:spPr>
+          <a:xfrm>
+            <a:off x="1341437" y="1224556"/>
+            <a:ext cx="10170377" cy="5126549"/>
+          </a:xfrm>
+        </p:spPr>
+        <p:txBody>
+          <a:bodyPr>
+            <a:normAutofit fontScale="47500" lnSpcReduction="20000"/>
+          </a:bodyPr>
+          <a:lstStyle/>
+          <a:p>
+            <a:pPr marL="0" lvl="1" indent="0">
+              <a:buNone/>
+            </a:pPr>
+            <a:r>
+              <a:rPr lang="en-US" sz="1700" u="sng" dirty="0">
+                <a:latin typeface="Lucida Console" panose="020B0609040504020204" pitchFamily="49" charset="0"/>
+              </a:rPr>
+              <a:t>Database version</a:t>
+            </a:r>
+          </a:p>
+          <a:p>
+            <a:pPr marL="0" lvl="1" indent="0">
+              <a:buNone/>
+            </a:pPr>
+            <a:r>
+              <a:rPr lang="en-US" sz="1700" dirty="0">
+                <a:latin typeface="Lucida Console" panose="020B0609040504020204" pitchFamily="49" charset="0"/>
+              </a:rPr>
+              <a:t>http://novabank.dedroog.net/api/sqlversion</a:t>
+            </a:r>
+          </a:p>
+          <a:p>
+            <a:r>
+              <a:rPr lang="en-US" sz="1700" dirty="0">
+                <a:latin typeface="Lucida Console" panose="020B0609040504020204" pitchFamily="49" charset="0"/>
+              </a:rPr>
+              <a:t>{</a:t>
+            </a:r>
+          </a:p>
+          <a:p>
+            <a:r>
+              <a:rPr lang="en-US" sz="1700" dirty="0">
+                <a:latin typeface="Lucida Console" panose="020B0609040504020204" pitchFamily="49" charset="0"/>
+              </a:rPr>
+              <a:t>  "</a:t>
+            </a:r>
+            <a:r>
+              <a:rPr lang="en-US" sz="1700" dirty="0" err="1">
+                <a:latin typeface="Lucida Console" panose="020B0609040504020204" pitchFamily="49" charset="0"/>
+              </a:rPr>
+              <a:t>sql_output</a:t>
+            </a:r>
+            <a:r>
+              <a:rPr lang="en-US" sz="1700" dirty="0">
+                <a:latin typeface="Lucida Console" panose="020B0609040504020204" pitchFamily="49" charset="0"/>
+              </a:rPr>
+              <a:t>": "PostgreSQL 16.15 on x86_64-pc-linux-gnu, compiled by </a:t>
+            </a:r>
+            <a:r>
+              <a:rPr lang="en-US" sz="1700" dirty="0" err="1">
+                <a:latin typeface="Lucida Console" panose="020B0609040504020204" pitchFamily="49" charset="0"/>
+              </a:rPr>
+              <a:t>gcc</a:t>
+            </a:r>
+            <a:r>
+              <a:rPr lang="en-US" sz="1700" dirty="0">
+                <a:latin typeface="Lucida Console" panose="020B0609040504020204" pitchFamily="49" charset="0"/>
+              </a:rPr>
+              <a:t> (GCC) 13.2.0, 64-bit"</a:t>
+            </a:r>
+          </a:p>
+          <a:p>
+            <a:r>
+              <a:rPr lang="en-US" sz="1700" dirty="0">
+                <a:latin typeface="Lucida Console" panose="020B0609040504020204" pitchFamily="49" charset="0"/>
+              </a:rPr>
+              <a:t>}</a:t>
+            </a:r>
+          </a:p>
+          <a:p>
+            <a:r>
+              <a:rPr lang="en-US" sz="1700" u="sng" dirty="0">
+                <a:latin typeface="Lucida Console" panose="020B0609040504020204" pitchFamily="49" charset="0"/>
+              </a:rPr>
+              <a:t>Client IP</a:t>
+            </a:r>
+          </a:p>
+          <a:p>
+            <a:pPr marL="0" lvl="1" indent="0">
+              <a:buNone/>
+            </a:pPr>
+            <a:r>
+              <a:rPr lang="en-US" sz="1700" dirty="0">
+                <a:latin typeface="Lucida Console" panose="020B0609040504020204" pitchFamily="49" charset="0"/>
+              </a:rPr>
+              <a:t>http://novabank.dedroog.net/api/sqlsrcip</a:t>
+            </a:r>
+          </a:p>
+          <a:p>
+            <a:r>
+              <a:rPr lang="en-US" sz="1700" dirty="0">
+                <a:latin typeface="Lucida Console" panose="020B0609040504020204" pitchFamily="49" charset="0"/>
+                <a:cs typeface="Arial" panose="020B0604020202020204" pitchFamily="34" charset="0"/>
+              </a:rPr>
+              <a:t>{</a:t>
+            </a:r>
+          </a:p>
+          <a:p>
+            <a:r>
+              <a:rPr lang="en-US" sz="1700" dirty="0">
+                <a:latin typeface="Lucida Console" panose="020B0609040504020204" pitchFamily="49" charset="0"/>
+                <a:cs typeface="Arial" panose="020B0604020202020204" pitchFamily="34" charset="0"/>
+              </a:rPr>
+              <a:t>  "</a:t>
+            </a:r>
+            <a:r>
+              <a:rPr lang="en-US" sz="1700" dirty="0" err="1">
+                <a:latin typeface="Lucida Console" panose="020B0609040504020204" pitchFamily="49" charset="0"/>
+                <a:cs typeface="Arial" panose="020B0604020202020204" pitchFamily="34" charset="0"/>
+              </a:rPr>
+              <a:t>sql_output</a:t>
+            </a:r>
+            <a:r>
+              <a:rPr lang="en-US" sz="1700" dirty="0">
+                <a:latin typeface="Lucida Console" panose="020B0609040504020204" pitchFamily="49" charset="0"/>
+                <a:cs typeface="Arial" panose="020B0604020202020204" pitchFamily="34" charset="0"/>
+              </a:rPr>
+              <a:t>": "10.0.2.254"</a:t>
+            </a:r>
+          </a:p>
+          <a:p>
+            <a:r>
+              <a:rPr lang="en-US" sz="1700" dirty="0">
+                <a:latin typeface="Lucida Console" panose="020B0609040504020204" pitchFamily="49" charset="0"/>
+                <a:cs typeface="Arial" panose="020B0604020202020204" pitchFamily="34" charset="0"/>
+              </a:rPr>
+              <a:t>}</a:t>
+            </a:r>
+          </a:p>
+          <a:p>
+            <a:pPr marL="0" lvl="1" indent="0">
+              <a:buNone/>
+            </a:pPr>
+            <a:r>
+              <a:rPr lang="en-US" sz="1700" u="sng" dirty="0">
+                <a:latin typeface="Lucida Console" panose="020B0609040504020204" pitchFamily="49" charset="0"/>
+              </a:rPr>
+              <a:t>Create table</a:t>
+            </a:r>
+          </a:p>
+          <a:p>
+            <a:pPr marL="0" lvl="1" indent="0">
+              <a:buNone/>
+            </a:pPr>
+            <a:r>
+              <a:rPr lang="en-US" sz="1700" dirty="0">
+                <a:latin typeface="Lucida Console" panose="020B0609040504020204" pitchFamily="49" charset="0"/>
+              </a:rPr>
+              <a:t>http://novabank.dedroog.net//api/sqlsrcipinit</a:t>
+            </a:r>
+          </a:p>
+          <a:p>
+            <a:r>
+              <a:rPr lang="en-US" sz="1700" dirty="0">
+                <a:latin typeface="Lucida Console" panose="020B0609040504020204" pitchFamily="49" charset="0"/>
+              </a:rPr>
+              <a:t>{</a:t>
+            </a:r>
+          </a:p>
+          <a:p>
+            <a:r>
+              <a:rPr lang="en-US" sz="1700" dirty="0">
+                <a:latin typeface="Lucida Console" panose="020B0609040504020204" pitchFamily="49" charset="0"/>
+              </a:rPr>
+              <a:t>  "</a:t>
+            </a:r>
+            <a:r>
+              <a:rPr lang="en-US" sz="1700" dirty="0" err="1">
+                <a:latin typeface="Lucida Console" panose="020B0609040504020204" pitchFamily="49" charset="0"/>
+              </a:rPr>
+              <a:t>table_created</a:t>
+            </a:r>
+            <a:r>
+              <a:rPr lang="en-US" sz="1700" dirty="0">
+                <a:latin typeface="Lucida Console" panose="020B0609040504020204" pitchFamily="49" charset="0"/>
+              </a:rPr>
+              <a:t>": "</a:t>
+            </a:r>
+            <a:r>
+              <a:rPr lang="en-US" sz="1700" dirty="0" err="1">
+                <a:latin typeface="Lucida Console" panose="020B0609040504020204" pitchFamily="49" charset="0"/>
+              </a:rPr>
+              <a:t>srciplog</a:t>
+            </a:r>
+            <a:r>
+              <a:rPr lang="en-US" sz="1700" dirty="0">
+                <a:latin typeface="Lucida Console" panose="020B0609040504020204" pitchFamily="49" charset="0"/>
+              </a:rPr>
+              <a:t>"</a:t>
+            </a:r>
+          </a:p>
+          <a:p>
+            <a:r>
+              <a:rPr lang="en-US" sz="1700" dirty="0">
+                <a:latin typeface="Lucida Console" panose="020B0609040504020204" pitchFamily="49" charset="0"/>
+              </a:rPr>
+              <a:t>}</a:t>
+            </a:r>
+          </a:p>
+          <a:p>
+            <a:r>
+              <a:rPr lang="en-US" sz="1700" u="sng" dirty="0">
+                <a:latin typeface="Lucida Console" panose="020B0609040504020204" pitchFamily="49" charset="0"/>
+              </a:rPr>
+              <a:t>Log access</a:t>
+            </a:r>
+          </a:p>
+          <a:p>
+            <a:pPr marL="0" lvl="1" indent="0">
+              <a:buNone/>
+            </a:pPr>
+            <a:r>
+              <a:rPr lang="en-US" sz="1700" dirty="0">
+                <a:latin typeface="Lucida Console" panose="020B0609040504020204" pitchFamily="49" charset="0"/>
+              </a:rPr>
+              <a:t>http://novabank.dedroog.net//api/sqlsrciplog</a:t>
+            </a:r>
+          </a:p>
+          <a:p>
+            <a:r>
+              <a:rPr lang="en-US" sz="1700" dirty="0">
+                <a:latin typeface="Lucida Console" panose="020B0609040504020204" pitchFamily="49" charset="0"/>
+              </a:rPr>
+              <a:t>{</a:t>
+            </a:r>
+          </a:p>
+          <a:p>
+            <a:r>
+              <a:rPr lang="en-US" sz="1700" dirty="0">
+                <a:latin typeface="Lucida Console" panose="020B0609040504020204" pitchFamily="49" charset="0"/>
+              </a:rPr>
+              <a:t>  "</a:t>
+            </a:r>
+            <a:r>
+              <a:rPr lang="en-US" sz="1700" dirty="0" err="1">
+                <a:latin typeface="Lucida Console" panose="020B0609040504020204" pitchFamily="49" charset="0"/>
+              </a:rPr>
+              <a:t>srciplog</a:t>
+            </a:r>
+            <a:r>
+              <a:rPr lang="en-US" sz="1700" dirty="0">
+                <a:latin typeface="Lucida Console" panose="020B0609040504020204" pitchFamily="49" charset="0"/>
+              </a:rPr>
+              <a:t>": {</a:t>
+            </a:r>
+          </a:p>
+          <a:p>
+            <a:r>
+              <a:rPr lang="en-US" sz="1700" dirty="0">
+                <a:latin typeface="Lucida Console" panose="020B0609040504020204" pitchFamily="49" charset="0"/>
+              </a:rPr>
+              <a:t>    "</a:t>
+            </a:r>
+            <a:r>
+              <a:rPr lang="en-US" sz="1700" dirty="0" err="1">
+                <a:latin typeface="Lucida Console" panose="020B0609040504020204" pitchFamily="49" charset="0"/>
+              </a:rPr>
+              <a:t>ip</a:t>
+            </a:r>
+            <a:r>
+              <a:rPr lang="en-US" sz="1700" dirty="0">
+                <a:latin typeface="Lucida Console" panose="020B0609040504020204" pitchFamily="49" charset="0"/>
+              </a:rPr>
+              <a:t>": "10.0.2.254",</a:t>
+            </a:r>
+          </a:p>
+          <a:p>
+            <a:r>
+              <a:rPr lang="en-US" sz="1700" dirty="0">
+                <a:latin typeface="Lucida Console" panose="020B0609040504020204" pitchFamily="49" charset="0"/>
+              </a:rPr>
+              <a:t>    "timestamp": "2026-10-07 16:12:45.271077"</a:t>
+            </a:r>
+          </a:p>
+          <a:p>
+            <a:r>
+              <a:rPr lang="en-US" sz="1700" dirty="0">
+                <a:latin typeface="Lucida Console" panose="020B0609040504020204" pitchFamily="49" charset="0"/>
+              </a:rPr>
+              <a:t>  }</a:t>
+            </a:r>
+          </a:p>
+          <a:p>
+            <a:r>
+              <a:rPr lang="en-US" sz="1700" dirty="0">
+                <a:latin typeface="Lucida Console" panose="020B0609040504020204" pitchFamily="49" charset="0"/>
+              </a:rPr>
+              <a:t>}</a:t>
+            </a:r>
+          </a:p>
+          <a:p>
+            <a:pPr marL="0" lvl="1" indent="0">
+              <a:buNone/>
+            </a:pPr>
+            <a:endParaRPr lang="en-US" sz="1600" dirty="0"/>
+          </a:p>
+          <a:p>
+            <a:pPr marL="285750" lvl="1"/>
+            <a:endParaRPr lang="en-US" sz="1600" dirty="0"/>
+          </a:p>
+          <a:p>
+            <a:endParaRPr lang="en-US" dirty="0"/>
+          </a:p>
+        </p:txBody>
+      </p:sp>
+      <p:sp>
+        <p:nvSpPr>
+          <p:cNvPr id="7" name="Slide Number Placeholder 6">
+            <a:extLst>
+              <a:ext uri="{FF2B5EF4-FFF2-40B4-BE49-F238E27FC236}">
+                <a16:creationId xmlns:a16="http://schemas.microsoft.com/office/drawing/2014/main" id="{A9F5A11B-6355-0387-AB61-2505D71B5852}"/>
+              </a:ext>
+            </a:extLst>
+          </p:cNvPr>
+          <p:cNvSpPr>
+            <a:spLocks noGrp="1"/>
+          </p:cNvSpPr>
+          <p:nvPr>
+            <p:ph type="sldNum" sz="quarter" idx="13"/>
+          </p:nvPr>
+        </p:nvSpPr>
+        <p:spPr>
+          <a:xfrm>
+            <a:off x="10373350" y="6356349"/>
+            <a:ext cx="987552" cy="365125"/>
+          </a:xfrm>
+        </p:spPr>
+        <p:txBody>
+          <a:bodyPr/>
+          <a:lstStyle/>
+          <a:p>
+            <a:fld id="{A49DFD55-3C28-40EF-9E31-A92D2E4017FF}" type="slidenum">
+              <a:rPr lang="en-US" smtClean="0"/>
+              <a:pPr/>
+              <a:t>10</a:t>
+            </a:fld>
+            <a:endParaRPr lang="en-US" dirty="0"/>
+          </a:p>
+        </p:txBody>
+      </p:sp>
+    </p:spTree>
+    <p:extLst>
+      <p:ext uri="{BB962C8B-B14F-4D97-AF65-F5344CB8AC3E}">
+        <p14:creationId xmlns:p14="http://schemas.microsoft.com/office/powerpoint/2010/main" val="2440905073"/>
+      </p:ext>
+    </p:extLst>
+  </p:cSld>
+  <p:clrMapOvr>
+    <a:masterClrMapping/>
+  </p:clrMapOvr>
+</p:sld>
+</file>
+
+<file path=ppt/slides/slide11.xml><?xml version="1.0" encoding="utf-8"?>
+<p:sld xmlns:a="http://schemas.openxmlformats.org/drawingml/2006/main" xmlns:r="http://schemas.openxmlformats.org/officeDocument/2006/relationships" xmlns:p="http://schemas.openxmlformats.org/presentationml/2006/main">
+  <p:cSld>
+    <p:spTree>
+      <p:nvGrpSpPr>
         <p:cNvPr id="1" name=""/>
         <p:cNvGrpSpPr/>
         <p:nvPr/>
@@ -6557,7 +7002,7 @@
             <a:fld id="{A49DFD55-3C28-40EF-9E31-A92D2E4017FF}" type="slidenum">
               <a:rPr lang="en-US" smtClean="0"/>
               <a:pPr/>
-              <a:t>10</a:t>
+              <a:t>11</a:t>
             </a:fld>
             <a:endParaRPr lang="en-US" dirty="0"/>
           </a:p>
@@ -7877,10 +8322,9 @@
           <a:lstStyle/>
           <a:p>
             <a:r>
-              <a:rPr lang="en-US"/>
+              <a:rPr lang="en-US" dirty="0"/>
               <a:t>development</a:t>
             </a:r>
-            <a:endParaRPr lang="en-US" dirty="0"/>
           </a:p>
         </p:txBody>
       </p:sp>
@@ -8092,6 +8536,291 @@
 </file>
 
 <file path=ppt/slides/slide8.xml><?xml version="1.0" encoding="utf-8"?>
+<p:sld xmlns:a="http://schemas.openxmlformats.org/drawingml/2006/main" xmlns:r="http://schemas.openxmlformats.org/officeDocument/2006/relationships" xmlns:p="http://schemas.openxmlformats.org/presentationml/2006/main">
+  <p:cSld>
+    <p:spTree>
+      <p:nvGrpSpPr>
+        <p:cNvPr id="1" name="">
+          <a:extLst>
+            <a:ext uri="{FF2B5EF4-FFF2-40B4-BE49-F238E27FC236}">
+              <a16:creationId xmlns:a16="http://schemas.microsoft.com/office/drawing/2014/main" id="{69916197-698B-9E61-B421-F705E810E1B4}"/>
+            </a:ext>
+          </a:extLst>
+        </p:cNvPr>
+        <p:cNvGrpSpPr/>
+        <p:nvPr/>
+      </p:nvGrpSpPr>
+      <p:grpSpPr>
+        <a:xfrm>
+          <a:off x="0" y="0"/>
+          <a:ext cx="0" cy="0"/>
+          <a:chOff x="0" y="0"/>
+          <a:chExt cx="0" cy="0"/>
+        </a:xfrm>
+      </p:grpSpPr>
+      <p:sp>
+        <p:nvSpPr>
+          <p:cNvPr id="2" name="Title 1">
+            <a:extLst>
+              <a:ext uri="{FF2B5EF4-FFF2-40B4-BE49-F238E27FC236}">
+                <a16:creationId xmlns:a16="http://schemas.microsoft.com/office/drawing/2014/main" id="{B63FDCE9-5099-8863-3BBE-C3E9A7F67F18}"/>
+              </a:ext>
+            </a:extLst>
+          </p:cNvPr>
+          <p:cNvSpPr>
+            <a:spLocks noGrp="1"/>
+          </p:cNvSpPr>
+          <p:nvPr>
+            <p:ph type="title"/>
+          </p:nvPr>
+        </p:nvSpPr>
+        <p:spPr>
+          <a:xfrm>
+            <a:off x="1341438" y="506895"/>
+            <a:ext cx="9953625" cy="660262"/>
+          </a:xfrm>
+        </p:spPr>
+        <p:txBody>
+          <a:bodyPr/>
+          <a:lstStyle/>
+          <a:p>
+            <a:r>
+              <a:rPr lang="en-US" dirty="0"/>
+              <a:t>Practical AI</a:t>
+            </a:r>
+          </a:p>
+        </p:txBody>
+      </p:sp>
+      <p:sp>
+        <p:nvSpPr>
+          <p:cNvPr id="6" name="Content Placeholder 5">
+            <a:extLst>
+              <a:ext uri="{FF2B5EF4-FFF2-40B4-BE49-F238E27FC236}">
+                <a16:creationId xmlns:a16="http://schemas.microsoft.com/office/drawing/2014/main" id="{E0BD3A4D-6EE9-88F9-43B8-92B31CA67A38}"/>
+              </a:ext>
+            </a:extLst>
+          </p:cNvPr>
+          <p:cNvSpPr>
+            <a:spLocks noGrp="1"/>
+          </p:cNvSpPr>
+          <p:nvPr>
+            <p:ph sz="half" idx="14"/>
+          </p:nvPr>
+        </p:nvSpPr>
+        <p:spPr>
+          <a:xfrm>
+            <a:off x="1341437" y="1224556"/>
+            <a:ext cx="10170377" cy="5265696"/>
+          </a:xfrm>
+        </p:spPr>
+        <p:txBody>
+          <a:bodyPr>
+            <a:normAutofit fontScale="92500" lnSpcReduction="10000"/>
+          </a:bodyPr>
+          <a:lstStyle/>
+          <a:p>
+            <a:pPr marL="0" lvl="1" indent="0">
+              <a:buNone/>
+            </a:pPr>
+            <a:r>
+              <a:rPr lang="en-US" sz="2400" u="sng" dirty="0"/>
+              <a:t>AI-assisted engineering</a:t>
+            </a:r>
+          </a:p>
+          <a:p>
+            <a:pPr marL="342900" lvl="0" indent="-342900" fontAlgn="t">
+              <a:buFont typeface="Arial" panose="020B0604020202020204" pitchFamily="34" charset="0"/>
+              <a:buChar char="•"/>
+            </a:pPr>
+            <a:r>
+              <a:rPr lang="en-US" dirty="0"/>
+              <a:t>All Bicep code was developed in </a:t>
+            </a:r>
+            <a:r>
+              <a:rPr lang="en-US" b="1" dirty="0"/>
+              <a:t>Visual Studio Code with GitHub Copilot</a:t>
+            </a:r>
+            <a:endParaRPr lang="en-US" dirty="0"/>
+          </a:p>
+          <a:p>
+            <a:pPr marL="342900" lvl="0" indent="-342900" fontAlgn="t">
+              <a:buFont typeface="Arial" panose="020B0604020202020204" pitchFamily="34" charset="0"/>
+              <a:buChar char="•"/>
+            </a:pPr>
+            <a:r>
+              <a:rPr lang="en-US" dirty="0"/>
+              <a:t>Copilot accelerated code generation, refactoring, troubleshooting, and documentation</a:t>
+            </a:r>
+          </a:p>
+          <a:p>
+            <a:pPr marL="342900" lvl="0" indent="-342900" fontAlgn="t">
+              <a:buFont typeface="Arial" panose="020B0604020202020204" pitchFamily="34" charset="0"/>
+              <a:buChar char="•"/>
+            </a:pPr>
+            <a:r>
+              <a:rPr lang="en-US" dirty="0"/>
+              <a:t>Generated code remained subject to human review, Bicep validation, deployment testing, and architectural judgement</a:t>
+            </a:r>
+          </a:p>
+          <a:p>
+            <a:pPr marL="0" lvl="1" indent="0">
+              <a:buNone/>
+            </a:pPr>
+            <a:r>
+              <a:rPr lang="en-US" sz="2400" u="sng" dirty="0"/>
+              <a:t>AI-assisted operations – options</a:t>
+            </a:r>
+          </a:p>
+          <a:p>
+            <a:pPr marL="342900" lvl="0" indent="-342900" fontAlgn="t">
+              <a:buFont typeface="Arial" panose="020B0604020202020204" pitchFamily="34" charset="0"/>
+              <a:buChar char="•"/>
+            </a:pPr>
+            <a:r>
+              <a:rPr lang="en-US" b="1" dirty="0" err="1"/>
+              <a:t>IaC</a:t>
+            </a:r>
+            <a:r>
+              <a:rPr lang="en-US" b="1" dirty="0"/>
+              <a:t> review agent:</a:t>
+            </a:r>
+            <a:r>
+              <a:rPr lang="en-US" dirty="0"/>
+              <a:t> Review pull requests for security, resilience, logging, tagging, and configuration gaps</a:t>
+            </a:r>
+          </a:p>
+          <a:p>
+            <a:pPr marL="342900" lvl="0" indent="-342900" fontAlgn="t">
+              <a:buFont typeface="Arial" panose="020B0604020202020204" pitchFamily="34" charset="0"/>
+              <a:buChar char="•"/>
+            </a:pPr>
+            <a:r>
+              <a:rPr lang="en-US" b="1" dirty="0"/>
+              <a:t>Operations agent:</a:t>
+            </a:r>
+            <a:r>
+              <a:rPr lang="en-US" dirty="0"/>
+              <a:t> Correlate Azure Monitor and Log Analytics data and summarize incidents</a:t>
+            </a:r>
+          </a:p>
+          <a:p>
+            <a:pPr marL="342900" lvl="0" indent="-342900" fontAlgn="t">
+              <a:buFont typeface="Arial" panose="020B0604020202020204" pitchFamily="34" charset="0"/>
+              <a:buChar char="•"/>
+            </a:pPr>
+            <a:r>
+              <a:rPr lang="en-US" b="1" dirty="0"/>
+              <a:t>Cost agent:</a:t>
+            </a:r>
+            <a:r>
+              <a:rPr lang="en-US" dirty="0"/>
+              <a:t> Identify underused capacity and recommend rightsizing, especially for development</a:t>
+            </a:r>
+          </a:p>
+          <a:p>
+            <a:pPr marL="342900" lvl="0" indent="-342900" fontAlgn="t">
+              <a:buFont typeface="Arial" panose="020B0604020202020204" pitchFamily="34" charset="0"/>
+              <a:buChar char="•"/>
+            </a:pPr>
+            <a:r>
+              <a:rPr lang="en-US" b="1" dirty="0"/>
+              <a:t>DR assistant:</a:t>
+            </a:r>
+            <a:r>
+              <a:rPr lang="en-US" dirty="0"/>
+              <a:t> Guide operators through the recovery runbook and verify completion of each step</a:t>
+            </a:r>
+          </a:p>
+          <a:p>
+            <a:pPr marL="342900" lvl="0" indent="-342900" fontAlgn="t">
+              <a:buFont typeface="Arial" panose="020B0604020202020204" pitchFamily="34" charset="0"/>
+              <a:buChar char="•"/>
+            </a:pPr>
+            <a:r>
+              <a:rPr lang="en-US" b="1" dirty="0"/>
+              <a:t>Knowledge agent:</a:t>
+            </a:r>
+            <a:r>
+              <a:rPr lang="en-US" dirty="0"/>
+              <a:t> Answer operational questions using approved architecture documentation and runbooks</a:t>
+            </a:r>
+          </a:p>
+          <a:p>
+            <a:pPr fontAlgn="t"/>
+            <a:r>
+              <a:rPr lang="en-US" dirty="0"/>
+              <a:t>AI supports engineers and operators, but production changes remain governed, auditable, and human-approved.</a:t>
+            </a:r>
+          </a:p>
+          <a:p>
+            <a:pPr lvl="0" fontAlgn="t"/>
+            <a:endParaRPr lang="en-US" dirty="0"/>
+          </a:p>
+          <a:p>
+            <a:pPr marL="342900" lvl="0" indent="-342900" fontAlgn="t">
+              <a:buFont typeface="Arial" panose="020B0604020202020204" pitchFamily="34" charset="0"/>
+              <a:buChar char="•"/>
+            </a:pPr>
+            <a:endParaRPr lang="en-US" dirty="0"/>
+          </a:p>
+          <a:p>
+            <a:pPr marL="342900" lvl="1" indent="-342900"/>
+            <a:endParaRPr lang="en-US" sz="2400" dirty="0"/>
+          </a:p>
+          <a:p>
+            <a:endParaRPr lang="en-US" dirty="0"/>
+          </a:p>
+        </p:txBody>
+      </p:sp>
+      <p:sp>
+        <p:nvSpPr>
+          <p:cNvPr id="7" name="Slide Number Placeholder 6">
+            <a:extLst>
+              <a:ext uri="{FF2B5EF4-FFF2-40B4-BE49-F238E27FC236}">
+                <a16:creationId xmlns:a16="http://schemas.microsoft.com/office/drawing/2014/main" id="{0F093864-101C-7E40-096E-B1797575AEAF}"/>
+              </a:ext>
+            </a:extLst>
+          </p:cNvPr>
+          <p:cNvSpPr>
+            <a:spLocks noGrp="1"/>
+          </p:cNvSpPr>
+          <p:nvPr>
+            <p:ph type="sldNum" sz="quarter" idx="13"/>
+          </p:nvPr>
+        </p:nvSpPr>
+        <p:spPr>
+          <a:xfrm>
+            <a:off x="10373350" y="6356349"/>
+            <a:ext cx="987552" cy="365125"/>
+          </a:xfrm>
+        </p:spPr>
+        <p:txBody>
+          <a:bodyPr/>
+          <a:lstStyle/>
+          <a:p>
+            <a:fld id="{A49DFD55-3C28-40EF-9E31-A92D2E4017FF}" type="slidenum">
+              <a:rPr lang="en-US" smtClean="0"/>
+              <a:pPr/>
+              <a:t>8</a:t>
+            </a:fld>
+            <a:endParaRPr lang="en-US" dirty="0"/>
+          </a:p>
+        </p:txBody>
+      </p:sp>
+    </p:spTree>
+    <p:extLst>
+      <p:ext uri="{BB962C8B-B14F-4D97-AF65-F5344CB8AC3E}">
+        <p14:creationId xmlns:p14="http://schemas.microsoft.com/office/powerpoint/2010/main" val="4123477654"/>
+      </p:ext>
+    </p:extLst>
+  </p:cSld>
+  <p:clrMapOvr>
+    <a:masterClrMapping/>
+  </p:clrMapOvr>
+</p:sld>
+</file>
+
+<file path=ppt/slides/slide9.xml><?xml version="1.0" encoding="utf-8"?>
 <p:sld xmlns:a="http://schemas.openxmlformats.org/drawingml/2006/main" xmlns:r="http://schemas.openxmlformats.org/officeDocument/2006/relationships" xmlns:p="http://schemas.openxmlformats.org/presentationml/2006/main">
   <p:cSld>
     <p:spTree>
@@ -8317,7 +9046,7 @@
             <a:fld id="{A49DFD55-3C28-40EF-9E31-A92D2E4017FF}" type="slidenum">
               <a:rPr lang="en-US" smtClean="0"/>
               <a:pPr/>
-              <a:t>8</a:t>
+              <a:t>9</a:t>
             </a:fld>
             <a:endParaRPr lang="en-US" dirty="0"/>
           </a:p>
@@ -8327,443 +9056,6 @@
     <p:extLst>
       <p:ext uri="{BB962C8B-B14F-4D97-AF65-F5344CB8AC3E}">
         <p14:creationId xmlns:p14="http://schemas.microsoft.com/office/powerpoint/2010/main" val="2018970457"/>
-      </p:ext>
-    </p:extLst>
-  </p:cSld>
-  <p:clrMapOvr>
-    <a:masterClrMapping/>
-  </p:clrMapOvr>
-</p:sld>
-</file>
-
-<file path=ppt/slides/slide9.xml><?xml version="1.0" encoding="utf-8"?>
-<p:sld xmlns:a="http://schemas.openxmlformats.org/drawingml/2006/main" xmlns:r="http://schemas.openxmlformats.org/officeDocument/2006/relationships" xmlns:p="http://schemas.openxmlformats.org/presentationml/2006/main">
-  <p:cSld>
-    <p:spTree>
-      <p:nvGrpSpPr>
-        <p:cNvPr id="1" name="">
-          <a:extLst>
-            <a:ext uri="{FF2B5EF4-FFF2-40B4-BE49-F238E27FC236}">
-              <a16:creationId xmlns:a16="http://schemas.microsoft.com/office/drawing/2014/main" id="{E0987E7B-D3A8-17F7-A8B9-0A04E01085C2}"/>
-            </a:ext>
-          </a:extLst>
-        </p:cNvPr>
-        <p:cNvGrpSpPr/>
-        <p:nvPr/>
-      </p:nvGrpSpPr>
-      <p:grpSpPr>
-        <a:xfrm>
-          <a:off x="0" y="0"/>
-          <a:ext cx="0" cy="0"/>
-          <a:chOff x="0" y="0"/>
-          <a:chExt cx="0" cy="0"/>
-        </a:xfrm>
-      </p:grpSpPr>
-      <p:sp>
-        <p:nvSpPr>
-          <p:cNvPr id="2" name="Title 1">
-            <a:extLst>
-              <a:ext uri="{FF2B5EF4-FFF2-40B4-BE49-F238E27FC236}">
-                <a16:creationId xmlns:a16="http://schemas.microsoft.com/office/drawing/2014/main" id="{6EE746FE-6A4E-D6C5-B2D0-068BE384E4CD}"/>
-              </a:ext>
-            </a:extLst>
-          </p:cNvPr>
-          <p:cNvSpPr>
-            <a:spLocks noGrp="1"/>
-          </p:cNvSpPr>
-          <p:nvPr>
-            <p:ph type="title"/>
-          </p:nvPr>
-        </p:nvSpPr>
-        <p:spPr>
-          <a:xfrm>
-            <a:off x="1341438" y="506895"/>
-            <a:ext cx="9953625" cy="660262"/>
-          </a:xfrm>
-        </p:spPr>
-        <p:txBody>
-          <a:bodyPr/>
-          <a:lstStyle/>
-          <a:p>
-            <a:r>
-              <a:rPr lang="en-US" dirty="0"/>
-              <a:t>test</a:t>
-            </a:r>
-          </a:p>
-        </p:txBody>
-      </p:sp>
-      <p:sp>
-        <p:nvSpPr>
-          <p:cNvPr id="6" name="Content Placeholder 5">
-            <a:extLst>
-              <a:ext uri="{FF2B5EF4-FFF2-40B4-BE49-F238E27FC236}">
-                <a16:creationId xmlns:a16="http://schemas.microsoft.com/office/drawing/2014/main" id="{25855E2E-9EDB-6E19-A737-906AC26190D0}"/>
-              </a:ext>
-            </a:extLst>
-          </p:cNvPr>
-          <p:cNvSpPr>
-            <a:spLocks noGrp="1"/>
-          </p:cNvSpPr>
-          <p:nvPr>
-            <p:ph sz="half" idx="14"/>
-          </p:nvPr>
-        </p:nvSpPr>
-        <p:spPr>
-          <a:xfrm>
-            <a:off x="1341437" y="1224556"/>
-            <a:ext cx="10170377" cy="5126549"/>
-          </a:xfrm>
-        </p:spPr>
-        <p:txBody>
-          <a:bodyPr>
-            <a:normAutofit fontScale="47500" lnSpcReduction="20000"/>
-          </a:bodyPr>
-          <a:lstStyle/>
-          <a:p>
-            <a:pPr marL="0" lvl="1" indent="0">
-              <a:buNone/>
-            </a:pPr>
-            <a:r>
-              <a:rPr lang="en-US" sz="1700" u="sng" dirty="0">
-                <a:latin typeface="Lucida Console" panose="020B0609040504020204" pitchFamily="49" charset="0"/>
-              </a:rPr>
-              <a:t>Database version</a:t>
-            </a:r>
-          </a:p>
-          <a:p>
-            <a:pPr marL="0" lvl="1" indent="0">
-              <a:buNone/>
-            </a:pPr>
-            <a:r>
-              <a:rPr lang="en-US" sz="1700" dirty="0">
-                <a:latin typeface="Lucida Console" panose="020B0609040504020204" pitchFamily="49" charset="0"/>
-              </a:rPr>
-              <a:t>http://novabank.dedroog.net/api/sqlversion</a:t>
-            </a:r>
-          </a:p>
-          <a:p>
-            <a:r>
-              <a:rPr lang="en-US" sz="1700" dirty="0">
-                <a:latin typeface="Lucida Console" panose="020B0609040504020204" pitchFamily="49" charset="0"/>
-              </a:rPr>
-              <a:t>{</a:t>
-            </a:r>
-          </a:p>
-          <a:p>
-            <a:r>
-              <a:rPr lang="en-US" sz="1700" dirty="0">
-                <a:latin typeface="Lucida Console" panose="020B0609040504020204" pitchFamily="49" charset="0"/>
-              </a:rPr>
-              <a:t>  "</a:t>
-            </a:r>
-            <a:r>
-              <a:rPr lang="en-US" sz="1700" dirty="0" err="1">
-                <a:latin typeface="Lucida Console" panose="020B0609040504020204" pitchFamily="49" charset="0"/>
-              </a:rPr>
-              <a:t>sql_output</a:t>
-            </a:r>
-            <a:r>
-              <a:rPr lang="en-US" sz="1700" dirty="0">
-                <a:latin typeface="Lucida Console" panose="020B0609040504020204" pitchFamily="49" charset="0"/>
-              </a:rPr>
-              <a:t>": "PostgreSQL 16.15 on x86_64-pc-linux-gnu, compiled by </a:t>
-            </a:r>
-            <a:r>
-              <a:rPr lang="en-US" sz="1700" dirty="0" err="1">
-                <a:latin typeface="Lucida Console" panose="020B0609040504020204" pitchFamily="49" charset="0"/>
-              </a:rPr>
-              <a:t>gcc</a:t>
-            </a:r>
-            <a:r>
-              <a:rPr lang="en-US" sz="1700" dirty="0">
-                <a:latin typeface="Lucida Console" panose="020B0609040504020204" pitchFamily="49" charset="0"/>
-              </a:rPr>
-              <a:t> (GCC) 13.2.0, 64-bit"</a:t>
-            </a:r>
-          </a:p>
-          <a:p>
-            <a:r>
-              <a:rPr lang="en-US" sz="1700" dirty="0">
-                <a:latin typeface="Lucida Console" panose="020B0609040504020204" pitchFamily="49" charset="0"/>
-              </a:rPr>
-              <a:t>}</a:t>
-            </a:r>
-          </a:p>
-          <a:p>
-            <a:r>
-              <a:rPr lang="en-US" sz="1700" u="sng" dirty="0">
-                <a:latin typeface="Lucida Console" panose="020B0609040504020204" pitchFamily="49" charset="0"/>
-              </a:rPr>
-              <a:t>Client IP</a:t>
-            </a:r>
-          </a:p>
-          <a:p>
-            <a:pPr marL="0" lvl="1" indent="0">
-              <a:buNone/>
-            </a:pPr>
-            <a:r>
-              <a:rPr lang="en-US" sz="1700" dirty="0">
-                <a:latin typeface="Lucida Console" panose="020B0609040504020204" pitchFamily="49" charset="0"/>
-              </a:rPr>
-              <a:t>http://novabank.dedroog.net/api/sqlsrcip</a:t>
-            </a:r>
-          </a:p>
-          <a:p>
-            <a:r>
-              <a:rPr lang="en-US" sz="1700" dirty="0">
-                <a:latin typeface="Lucida Console" panose="020B0609040504020204" pitchFamily="49" charset="0"/>
-                <a:cs typeface="Arial" panose="020B0604020202020204" pitchFamily="34" charset="0"/>
-              </a:rPr>
-              <a:t>{</a:t>
-            </a:r>
-          </a:p>
-          <a:p>
-            <a:r>
-              <a:rPr lang="en-US" sz="1700" dirty="0">
-                <a:latin typeface="Lucida Console" panose="020B0609040504020204" pitchFamily="49" charset="0"/>
-                <a:cs typeface="Arial" panose="020B0604020202020204" pitchFamily="34" charset="0"/>
-              </a:rPr>
-              <a:t>  "</a:t>
-            </a:r>
-            <a:r>
-              <a:rPr lang="en-US" sz="1700" dirty="0" err="1">
-                <a:latin typeface="Lucida Console" panose="020B0609040504020204" pitchFamily="49" charset="0"/>
-                <a:cs typeface="Arial" panose="020B0604020202020204" pitchFamily="34" charset="0"/>
-              </a:rPr>
-              <a:t>sql_output</a:t>
-            </a:r>
-            <a:r>
-              <a:rPr lang="en-US" sz="1700" dirty="0">
-                <a:latin typeface="Lucida Console" panose="020B0609040504020204" pitchFamily="49" charset="0"/>
-                <a:cs typeface="Arial" panose="020B0604020202020204" pitchFamily="34" charset="0"/>
-              </a:rPr>
-              <a:t>": "10.0.2.254"</a:t>
-            </a:r>
-          </a:p>
-          <a:p>
-            <a:r>
-              <a:rPr lang="en-US" sz="1700" dirty="0">
-                <a:latin typeface="Lucida Console" panose="020B0609040504020204" pitchFamily="49" charset="0"/>
-                <a:cs typeface="Arial" panose="020B0604020202020204" pitchFamily="34" charset="0"/>
-              </a:rPr>
-              <a:t>}</a:t>
-            </a:r>
-          </a:p>
-          <a:p>
-            <a:pPr marL="0" lvl="1" indent="0">
-              <a:buNone/>
-            </a:pPr>
-            <a:r>
-              <a:rPr lang="en-US" sz="1700" u="sng" dirty="0">
-                <a:latin typeface="Lucida Console" panose="020B0609040504020204" pitchFamily="49" charset="0"/>
-              </a:rPr>
-              <a:t>Create table</a:t>
-            </a:r>
-          </a:p>
-          <a:p>
-            <a:pPr marL="0" lvl="1" indent="0">
-              <a:buNone/>
-            </a:pPr>
-            <a:r>
-              <a:rPr lang="en-US" sz="1700" dirty="0">
-                <a:latin typeface="Lucida Console" panose="020B0609040504020204" pitchFamily="49" charset="0"/>
-              </a:rPr>
-              <a:t>http://novabank.dedroog.net//api/sqlsrcipinit</a:t>
-            </a:r>
-          </a:p>
-          <a:p>
-            <a:r>
-              <a:rPr lang="en-US" sz="1700" dirty="0">
-                <a:latin typeface="Lucida Console" panose="020B0609040504020204" pitchFamily="49" charset="0"/>
-              </a:rPr>
-              <a:t>{</a:t>
-            </a:r>
-          </a:p>
-          <a:p>
-            <a:r>
-              <a:rPr lang="en-US" sz="1700" dirty="0">
-                <a:latin typeface="Lucida Console" panose="020B0609040504020204" pitchFamily="49" charset="0"/>
-              </a:rPr>
-              <a:t>  "</a:t>
-            </a:r>
-            <a:r>
-              <a:rPr lang="en-US" sz="1700" dirty="0" err="1">
-                <a:latin typeface="Lucida Console" panose="020B0609040504020204" pitchFamily="49" charset="0"/>
-              </a:rPr>
-              <a:t>table_created</a:t>
-            </a:r>
-            <a:r>
-              <a:rPr lang="en-US" sz="1700" dirty="0">
-                <a:latin typeface="Lucida Console" panose="020B0609040504020204" pitchFamily="49" charset="0"/>
-              </a:rPr>
-              <a:t>": "</a:t>
-            </a:r>
-            <a:r>
-              <a:rPr lang="en-US" sz="1700" dirty="0" err="1">
-                <a:latin typeface="Lucida Console" panose="020B0609040504020204" pitchFamily="49" charset="0"/>
-              </a:rPr>
-              <a:t>srciplog</a:t>
-            </a:r>
-            <a:r>
-              <a:rPr lang="en-US" sz="1700" dirty="0">
-                <a:latin typeface="Lucida Console" panose="020B0609040504020204" pitchFamily="49" charset="0"/>
-              </a:rPr>
-              <a:t>"</a:t>
-            </a:r>
-          </a:p>
-          <a:p>
-            <a:r>
-              <a:rPr lang="en-US" sz="1700" dirty="0">
-                <a:latin typeface="Lucida Console" panose="020B0609040504020204" pitchFamily="49" charset="0"/>
-              </a:rPr>
-              <a:t>}</a:t>
-            </a:r>
-          </a:p>
-          <a:p>
-            <a:r>
-              <a:rPr lang="en-US" sz="1700" u="sng" dirty="0">
-                <a:latin typeface="Lucida Console" panose="020B0609040504020204" pitchFamily="49" charset="0"/>
-              </a:rPr>
-              <a:t>Log access</a:t>
-            </a:r>
-          </a:p>
-          <a:p>
-            <a:pPr marL="0" lvl="1" indent="0">
-              <a:buNone/>
-            </a:pPr>
-            <a:r>
-              <a:rPr lang="en-US" sz="1700" dirty="0">
-                <a:latin typeface="Lucida Console" panose="020B0609040504020204" pitchFamily="49" charset="0"/>
-              </a:rPr>
-              <a:t>http://novabank.dedroog.net//api/sqlsrciplog</a:t>
-            </a:r>
-          </a:p>
-          <a:p>
-            <a:r>
-              <a:rPr lang="en-US" sz="1700" dirty="0">
-                <a:latin typeface="Lucida Console" panose="020B0609040504020204" pitchFamily="49" charset="0"/>
-              </a:rPr>
-              <a:t>{</a:t>
-            </a:r>
-          </a:p>
-          <a:p>
-            <a:r>
-              <a:rPr lang="en-US" sz="1700" dirty="0">
-                <a:latin typeface="Lucida Console" panose="020B0609040504020204" pitchFamily="49" charset="0"/>
-              </a:rPr>
-              <a:t>  "</a:t>
-            </a:r>
-            <a:r>
-              <a:rPr lang="en-US" sz="1700" dirty="0" err="1">
-                <a:latin typeface="Lucida Console" panose="020B0609040504020204" pitchFamily="49" charset="0"/>
-              </a:rPr>
-              <a:t>srciplog</a:t>
-            </a:r>
-            <a:r>
-              <a:rPr lang="en-US" sz="1700" dirty="0">
-                <a:latin typeface="Lucida Console" panose="020B0609040504020204" pitchFamily="49" charset="0"/>
-              </a:rPr>
-              <a:t>": {</a:t>
-            </a:r>
-          </a:p>
-          <a:p>
-            <a:r>
-              <a:rPr lang="en-US" sz="1700" dirty="0">
-                <a:latin typeface="Lucida Console" panose="020B0609040504020204" pitchFamily="49" charset="0"/>
-              </a:rPr>
-              <a:t>    "</a:t>
-            </a:r>
-            <a:r>
-              <a:rPr lang="en-US" sz="1700" dirty="0" err="1">
-                <a:latin typeface="Lucida Console" panose="020B0609040504020204" pitchFamily="49" charset="0"/>
-              </a:rPr>
-              <a:t>ip</a:t>
-            </a:r>
-            <a:r>
-              <a:rPr lang="en-US" sz="1700" dirty="0">
-                <a:latin typeface="Lucida Console" panose="020B0609040504020204" pitchFamily="49" charset="0"/>
-              </a:rPr>
-              <a:t>": "10.0.2.254",</a:t>
-            </a:r>
-          </a:p>
-          <a:p>
-            <a:r>
-              <a:rPr lang="en-US" sz="1700" dirty="0">
-                <a:latin typeface="Lucida Console" panose="020B0609040504020204" pitchFamily="49" charset="0"/>
-              </a:rPr>
-              <a:t>    "timestamp": "2026-10-07 16:12:45.271077"</a:t>
-            </a:r>
-          </a:p>
-          <a:p>
-            <a:r>
-              <a:rPr lang="en-US" sz="1700" dirty="0">
-                <a:latin typeface="Lucida Console" panose="020B0609040504020204" pitchFamily="49" charset="0"/>
-              </a:rPr>
-              <a:t>  }</a:t>
-            </a:r>
-          </a:p>
-          <a:p>
-            <a:r>
-              <a:rPr lang="en-US" sz="1700" dirty="0">
-                <a:latin typeface="Lucida Console" panose="020B0609040504020204" pitchFamily="49" charset="0"/>
-              </a:rPr>
-              <a:t>}</a:t>
-            </a:r>
-          </a:p>
-          <a:p>
-            <a:pPr marL="0" lvl="1" indent="0">
-              <a:buNone/>
-            </a:pPr>
-            <a:endParaRPr lang="en-US" sz="1600" dirty="0"/>
-          </a:p>
-          <a:p>
-            <a:pPr marL="285750" lvl="1"/>
-            <a:endParaRPr lang="en-US" sz="1600" dirty="0"/>
-          </a:p>
-          <a:p>
-            <a:endParaRPr lang="en-US" dirty="0"/>
-          </a:p>
-        </p:txBody>
-      </p:sp>
-      <p:sp>
-        <p:nvSpPr>
-          <p:cNvPr id="7" name="Slide Number Placeholder 6">
-            <a:extLst>
-              <a:ext uri="{FF2B5EF4-FFF2-40B4-BE49-F238E27FC236}">
-                <a16:creationId xmlns:a16="http://schemas.microsoft.com/office/drawing/2014/main" id="{A9F5A11B-6355-0387-AB61-2505D71B5852}"/>
-              </a:ext>
-            </a:extLst>
-          </p:cNvPr>
-          <p:cNvSpPr>
-            <a:spLocks noGrp="1"/>
-          </p:cNvSpPr>
-          <p:nvPr>
-            <p:ph type="sldNum" sz="quarter" idx="13"/>
-          </p:nvPr>
-        </p:nvSpPr>
-        <p:spPr>
-          <a:xfrm>
-            <a:off x="10373350" y="6356349"/>
-            <a:ext cx="987552" cy="365125"/>
-          </a:xfrm>
-        </p:spPr>
-        <p:txBody>
-          <a:bodyPr/>
-          <a:lstStyle/>
-          <a:p>
-            <a:fld id="{A49DFD55-3C28-40EF-9E31-A92D2E4017FF}" type="slidenum">
-              <a:rPr lang="en-US" smtClean="0"/>
-              <a:pPr/>
-              <a:t>9</a:t>
-            </a:fld>
-            <a:endParaRPr lang="en-US" dirty="0"/>
-          </a:p>
-        </p:txBody>
-      </p:sp>
-    </p:spTree>
-    <p:extLst>
-      <p:ext uri="{BB962C8B-B14F-4D97-AF65-F5344CB8AC3E}">
-        <p14:creationId xmlns:p14="http://schemas.microsoft.com/office/powerpoint/2010/main" val="2440905073"/>
       </p:ext>
     </p:extLst>
   </p:cSld>

--- a/slides/novabank.pptx
+++ b/slides/novabank.pptx
@@ -5,10 +5,10 @@
     <p:sldMasterId id="2147483648" r:id="rId4"/>
   </p:sldMasterIdLst>
   <p:notesMasterIdLst>
-    <p:notesMasterId r:id="rId16"/>
+    <p:notesMasterId r:id="rId18"/>
   </p:notesMasterIdLst>
   <p:handoutMasterIdLst>
-    <p:handoutMasterId r:id="rId17"/>
+    <p:handoutMasterId r:id="rId19"/>
   </p:handoutMasterIdLst>
   <p:sldIdLst>
     <p:sldId id="278" r:id="rId5"/>
@@ -17,11 +17,13 @@
     <p:sldId id="280" r:id="rId8"/>
     <p:sldId id="286" r:id="rId9"/>
     <p:sldId id="282" r:id="rId10"/>
-    <p:sldId id="283" r:id="rId11"/>
-    <p:sldId id="288" r:id="rId12"/>
-    <p:sldId id="284" r:id="rId13"/>
-    <p:sldId id="287" r:id="rId14"/>
-    <p:sldId id="271" r:id="rId15"/>
+    <p:sldId id="289" r:id="rId11"/>
+    <p:sldId id="290" r:id="rId12"/>
+    <p:sldId id="283" r:id="rId13"/>
+    <p:sldId id="288" r:id="rId14"/>
+    <p:sldId id="284" r:id="rId15"/>
+    <p:sldId id="287" r:id="rId16"/>
+    <p:sldId id="271" r:id="rId17"/>
   </p:sldIdLst>
   <p:sldSz cx="12192000" cy="6858000"/>
   <p:notesSz cx="6858000" cy="9144000"/>
@@ -134,13 +136,67 @@
 <file path=ppt/revisionInfo.xml><?xml version="1.0" encoding="utf-8"?>
 <p1510:revInfo xmlns:a="http://schemas.openxmlformats.org/drawingml/2006/main" xmlns:r="http://schemas.openxmlformats.org/officeDocument/2006/relationships" xmlns:p1510="http://schemas.microsoft.com/office/powerpoint/2015/10/main">
   <p1510:revLst>
-    <p1510:client id="{71F9AD6F-ACAE-4D67-8DDA-D98C7612B477}" v="49" dt="2026-10-07T16:33:59.282"/>
+    <p1510:client id="{71F9AD6F-ACAE-4D67-8DDA-D98C7612B477}" v="51" dt="2026-10-07T16:38:43.351"/>
   </p1510:revLst>
 </p1510:revInfo>
 </file>
 
 <file path=ppt/changesInfos/changesInfo1.xml><?xml version="1.0" encoding="utf-8"?>
 <pc:chgInfo xmlns:a="http://schemas.openxmlformats.org/drawingml/2006/main" xmlns:r="http://schemas.openxmlformats.org/officeDocument/2006/relationships" xmlns:ac="http://schemas.microsoft.com/office/drawing/2013/main/command" xmlns:pc="http://schemas.microsoft.com/office/powerpoint/2013/main/command">
+  <pc:docChgLst>
+    <pc:chgData name="Marc de Droog" userId="df9411d4-8164-4834-947f-ec80a422ebbb" providerId="ADAL" clId="{20620065-C08F-41CF-B954-B8DD4409FD95}"/>
+    <pc:docChg chg="custSel addSld modSld">
+      <pc:chgData name="Marc de Droog" userId="df9411d4-8164-4834-947f-ec80a422ebbb" providerId="ADAL" clId="{20620065-C08F-41CF-B954-B8DD4409FD95}" dt="2026-10-07T16:39:51.161" v="21" actId="1076"/>
+      <pc:docMkLst>
+        <pc:docMk/>
+      </pc:docMkLst>
+      <pc:sldChg chg="addSp delSp modSp mod delAnim">
+        <pc:chgData name="Marc de Droog" userId="df9411d4-8164-4834-947f-ec80a422ebbb" providerId="ADAL" clId="{20620065-C08F-41CF-B954-B8DD4409FD95}" dt="2026-10-07T16:39:31.795" v="19" actId="2085"/>
+        <pc:sldMkLst>
+          <pc:docMk/>
+          <pc:sldMk cId="1030026327" sldId="282"/>
+        </pc:sldMkLst>
+        <pc:spChg chg="add mod">
+          <ac:chgData name="Marc de Droog" userId="df9411d4-8164-4834-947f-ec80a422ebbb" providerId="ADAL" clId="{20620065-C08F-41CF-B954-B8DD4409FD95}" dt="2026-10-07T16:39:31.795" v="19" actId="2085"/>
+          <ac:spMkLst>
+            <pc:docMk/>
+            <pc:sldMk cId="1030026327" sldId="282"/>
+            <ac:spMk id="2" creationId="{C1C38860-9AFD-ED39-0655-6FF7B6DAE142}"/>
+          </ac:spMkLst>
+        </pc:spChg>
+        <pc:spChg chg="del">
+          <ac:chgData name="Marc de Droog" userId="df9411d4-8164-4834-947f-ec80a422ebbb" providerId="ADAL" clId="{20620065-C08F-41CF-B954-B8DD4409FD95}" dt="2026-10-07T16:38:36.055" v="0" actId="478"/>
+          <ac:spMkLst>
+            <pc:docMk/>
+            <pc:sldMk cId="1030026327" sldId="282"/>
+            <ac:spMk id="7" creationId="{0C807597-5FEF-B45E-C0A3-0E21ACA3E6EB}"/>
+          </ac:spMkLst>
+        </pc:spChg>
+      </pc:sldChg>
+      <pc:sldChg chg="addSp modSp add mod">
+        <pc:chgData name="Marc de Droog" userId="df9411d4-8164-4834-947f-ec80a422ebbb" providerId="ADAL" clId="{20620065-C08F-41CF-B954-B8DD4409FD95}" dt="2026-10-07T16:39:51.161" v="21" actId="1076"/>
+        <pc:sldMkLst>
+          <pc:docMk/>
+          <pc:sldMk cId="1318324342" sldId="289"/>
+        </pc:sldMkLst>
+        <pc:spChg chg="add mod">
+          <ac:chgData name="Marc de Droog" userId="df9411d4-8164-4834-947f-ec80a422ebbb" providerId="ADAL" clId="{20620065-C08F-41CF-B954-B8DD4409FD95}" dt="2026-10-07T16:39:51.161" v="21" actId="1076"/>
+          <ac:spMkLst>
+            <pc:docMk/>
+            <pc:sldMk cId="1318324342" sldId="289"/>
+            <ac:spMk id="3" creationId="{245B0CF3-BC1F-AE03-EB90-42697053C12B}"/>
+          </ac:spMkLst>
+        </pc:spChg>
+      </pc:sldChg>
+      <pc:sldChg chg="add">
+        <pc:chgData name="Marc de Droog" userId="df9411d4-8164-4834-947f-ec80a422ebbb" providerId="ADAL" clId="{20620065-C08F-41CF-B954-B8DD4409FD95}" dt="2026-10-07T16:38:43.347" v="2"/>
+        <pc:sldMkLst>
+          <pc:docMk/>
+          <pc:sldMk cId="1559361486" sldId="290"/>
+        </pc:sldMkLst>
+      </pc:sldChg>
+    </pc:docChg>
+  </pc:docChgLst>
   <pc:docChgLst>
     <pc:chgData name="Marc de Droog" userId="3ea1787d3693c09c" providerId="LiveId" clId="{20620065-C08F-41CF-B954-B8DD4409FD95}"/>
     <pc:docChg chg="addSld delSld modSld sldOrd">
@@ -988,7 +1044,7 @@
           <a:p>
             <a:fld id="{22289C57-55D7-40A4-A101-E74FAC7A092B}" type="slidenum">
               <a:rPr lang="en-US" smtClean="0"/>
-              <a:t>11</a:t>
+              <a:t>13</a:t>
             </a:fld>
             <a:endParaRPr lang="en-US" dirty="0"/>
           </a:p>
@@ -6447,6 +6503,536 @@
         <p:cNvPr id="1" name="">
           <a:extLst>
             <a:ext uri="{FF2B5EF4-FFF2-40B4-BE49-F238E27FC236}">
+              <a16:creationId xmlns:a16="http://schemas.microsoft.com/office/drawing/2014/main" id="{69916197-698B-9E61-B421-F705E810E1B4}"/>
+            </a:ext>
+          </a:extLst>
+        </p:cNvPr>
+        <p:cNvGrpSpPr/>
+        <p:nvPr/>
+      </p:nvGrpSpPr>
+      <p:grpSpPr>
+        <a:xfrm>
+          <a:off x="0" y="0"/>
+          <a:ext cx="0" cy="0"/>
+          <a:chOff x="0" y="0"/>
+          <a:chExt cx="0" cy="0"/>
+        </a:xfrm>
+      </p:grpSpPr>
+      <p:sp>
+        <p:nvSpPr>
+          <p:cNvPr id="2" name="Title 1">
+            <a:extLst>
+              <a:ext uri="{FF2B5EF4-FFF2-40B4-BE49-F238E27FC236}">
+                <a16:creationId xmlns:a16="http://schemas.microsoft.com/office/drawing/2014/main" id="{B63FDCE9-5099-8863-3BBE-C3E9A7F67F18}"/>
+              </a:ext>
+            </a:extLst>
+          </p:cNvPr>
+          <p:cNvSpPr>
+            <a:spLocks noGrp="1"/>
+          </p:cNvSpPr>
+          <p:nvPr>
+            <p:ph type="title"/>
+          </p:nvPr>
+        </p:nvSpPr>
+        <p:spPr>
+          <a:xfrm>
+            <a:off x="1341438" y="506895"/>
+            <a:ext cx="9953625" cy="660262"/>
+          </a:xfrm>
+        </p:spPr>
+        <p:txBody>
+          <a:bodyPr/>
+          <a:lstStyle/>
+          <a:p>
+            <a:r>
+              <a:rPr lang="en-US" dirty="0"/>
+              <a:t>Practical AI</a:t>
+            </a:r>
+          </a:p>
+        </p:txBody>
+      </p:sp>
+      <p:sp>
+        <p:nvSpPr>
+          <p:cNvPr id="6" name="Content Placeholder 5">
+            <a:extLst>
+              <a:ext uri="{FF2B5EF4-FFF2-40B4-BE49-F238E27FC236}">
+                <a16:creationId xmlns:a16="http://schemas.microsoft.com/office/drawing/2014/main" id="{E0BD3A4D-6EE9-88F9-43B8-92B31CA67A38}"/>
+              </a:ext>
+            </a:extLst>
+          </p:cNvPr>
+          <p:cNvSpPr>
+            <a:spLocks noGrp="1"/>
+          </p:cNvSpPr>
+          <p:nvPr>
+            <p:ph sz="half" idx="14"/>
+          </p:nvPr>
+        </p:nvSpPr>
+        <p:spPr>
+          <a:xfrm>
+            <a:off x="1341437" y="1224556"/>
+            <a:ext cx="10170377" cy="5265696"/>
+          </a:xfrm>
+        </p:spPr>
+        <p:txBody>
+          <a:bodyPr>
+            <a:normAutofit fontScale="92500" lnSpcReduction="10000"/>
+          </a:bodyPr>
+          <a:lstStyle/>
+          <a:p>
+            <a:pPr marL="0" lvl="1" indent="0">
+              <a:buNone/>
+            </a:pPr>
+            <a:r>
+              <a:rPr lang="en-US" sz="2400" u="sng" dirty="0"/>
+              <a:t>AI-assisted engineering</a:t>
+            </a:r>
+          </a:p>
+          <a:p>
+            <a:pPr marL="342900" lvl="0" indent="-342900" fontAlgn="t">
+              <a:buFont typeface="Arial" panose="020B0604020202020204" pitchFamily="34" charset="0"/>
+              <a:buChar char="•"/>
+            </a:pPr>
+            <a:r>
+              <a:rPr lang="en-US" dirty="0"/>
+              <a:t>All Bicep code was developed in </a:t>
+            </a:r>
+            <a:r>
+              <a:rPr lang="en-US" b="1" dirty="0"/>
+              <a:t>Visual Studio Code with GitHub Copilot</a:t>
+            </a:r>
+            <a:endParaRPr lang="en-US" dirty="0"/>
+          </a:p>
+          <a:p>
+            <a:pPr marL="342900" lvl="0" indent="-342900" fontAlgn="t">
+              <a:buFont typeface="Arial" panose="020B0604020202020204" pitchFamily="34" charset="0"/>
+              <a:buChar char="•"/>
+            </a:pPr>
+            <a:r>
+              <a:rPr lang="en-US" dirty="0"/>
+              <a:t>Copilot accelerated code generation, refactoring, troubleshooting, and documentation</a:t>
+            </a:r>
+          </a:p>
+          <a:p>
+            <a:pPr marL="342900" lvl="0" indent="-342900" fontAlgn="t">
+              <a:buFont typeface="Arial" panose="020B0604020202020204" pitchFamily="34" charset="0"/>
+              <a:buChar char="•"/>
+            </a:pPr>
+            <a:r>
+              <a:rPr lang="en-US" dirty="0"/>
+              <a:t>Generated code remained subject to human review, Bicep validation, deployment testing, and architectural judgement</a:t>
+            </a:r>
+          </a:p>
+          <a:p>
+            <a:pPr marL="0" lvl="1" indent="0">
+              <a:buNone/>
+            </a:pPr>
+            <a:r>
+              <a:rPr lang="en-US" sz="2400" u="sng" dirty="0"/>
+              <a:t>AI-assisted operations – options</a:t>
+            </a:r>
+          </a:p>
+          <a:p>
+            <a:pPr marL="342900" lvl="0" indent="-342900" fontAlgn="t">
+              <a:buFont typeface="Arial" panose="020B0604020202020204" pitchFamily="34" charset="0"/>
+              <a:buChar char="•"/>
+            </a:pPr>
+            <a:r>
+              <a:rPr lang="en-US" b="1" dirty="0" err="1"/>
+              <a:t>IaC</a:t>
+            </a:r>
+            <a:r>
+              <a:rPr lang="en-US" b="1" dirty="0"/>
+              <a:t> review agent:</a:t>
+            </a:r>
+            <a:r>
+              <a:rPr lang="en-US" dirty="0"/>
+              <a:t> Review pull requests for security, resilience, logging, tagging, and configuration gaps</a:t>
+            </a:r>
+          </a:p>
+          <a:p>
+            <a:pPr marL="342900" lvl="0" indent="-342900" fontAlgn="t">
+              <a:buFont typeface="Arial" panose="020B0604020202020204" pitchFamily="34" charset="0"/>
+              <a:buChar char="•"/>
+            </a:pPr>
+            <a:r>
+              <a:rPr lang="en-US" b="1" dirty="0"/>
+              <a:t>Operations agent:</a:t>
+            </a:r>
+            <a:r>
+              <a:rPr lang="en-US" dirty="0"/>
+              <a:t> Correlate Azure Monitor and Log Analytics data and summarize incidents</a:t>
+            </a:r>
+          </a:p>
+          <a:p>
+            <a:pPr marL="342900" lvl="0" indent="-342900" fontAlgn="t">
+              <a:buFont typeface="Arial" panose="020B0604020202020204" pitchFamily="34" charset="0"/>
+              <a:buChar char="•"/>
+            </a:pPr>
+            <a:r>
+              <a:rPr lang="en-US" b="1" dirty="0"/>
+              <a:t>Cost agent:</a:t>
+            </a:r>
+            <a:r>
+              <a:rPr lang="en-US" dirty="0"/>
+              <a:t> Identify underused capacity and recommend rightsizing, especially for development</a:t>
+            </a:r>
+          </a:p>
+          <a:p>
+            <a:pPr marL="342900" lvl="0" indent="-342900" fontAlgn="t">
+              <a:buFont typeface="Arial" panose="020B0604020202020204" pitchFamily="34" charset="0"/>
+              <a:buChar char="•"/>
+            </a:pPr>
+            <a:r>
+              <a:rPr lang="en-US" b="1" dirty="0"/>
+              <a:t>DR assistant:</a:t>
+            </a:r>
+            <a:r>
+              <a:rPr lang="en-US" dirty="0"/>
+              <a:t> Guide operators through the recovery runbook and verify completion of each step</a:t>
+            </a:r>
+          </a:p>
+          <a:p>
+            <a:pPr marL="342900" lvl="0" indent="-342900" fontAlgn="t">
+              <a:buFont typeface="Arial" panose="020B0604020202020204" pitchFamily="34" charset="0"/>
+              <a:buChar char="•"/>
+            </a:pPr>
+            <a:r>
+              <a:rPr lang="en-US" b="1" dirty="0"/>
+              <a:t>Knowledge agent:</a:t>
+            </a:r>
+            <a:r>
+              <a:rPr lang="en-US" dirty="0"/>
+              <a:t> Answer operational questions using approved architecture documentation and runbooks</a:t>
+            </a:r>
+          </a:p>
+          <a:p>
+            <a:pPr fontAlgn="t"/>
+            <a:r>
+              <a:rPr lang="en-US" dirty="0"/>
+              <a:t>AI supports engineers and operators, but production changes remain governed, auditable, and human-approved.</a:t>
+            </a:r>
+          </a:p>
+          <a:p>
+            <a:pPr lvl="0" fontAlgn="t"/>
+            <a:endParaRPr lang="en-US" dirty="0"/>
+          </a:p>
+          <a:p>
+            <a:pPr marL="342900" lvl="0" indent="-342900" fontAlgn="t">
+              <a:buFont typeface="Arial" panose="020B0604020202020204" pitchFamily="34" charset="0"/>
+              <a:buChar char="•"/>
+            </a:pPr>
+            <a:endParaRPr lang="en-US" dirty="0"/>
+          </a:p>
+          <a:p>
+            <a:pPr marL="342900" lvl="1" indent="-342900"/>
+            <a:endParaRPr lang="en-US" sz="2400" dirty="0"/>
+          </a:p>
+          <a:p>
+            <a:endParaRPr lang="en-US" dirty="0"/>
+          </a:p>
+        </p:txBody>
+      </p:sp>
+      <p:sp>
+        <p:nvSpPr>
+          <p:cNvPr id="7" name="Slide Number Placeholder 6">
+            <a:extLst>
+              <a:ext uri="{FF2B5EF4-FFF2-40B4-BE49-F238E27FC236}">
+                <a16:creationId xmlns:a16="http://schemas.microsoft.com/office/drawing/2014/main" id="{0F093864-101C-7E40-096E-B1797575AEAF}"/>
+              </a:ext>
+            </a:extLst>
+          </p:cNvPr>
+          <p:cNvSpPr>
+            <a:spLocks noGrp="1"/>
+          </p:cNvSpPr>
+          <p:nvPr>
+            <p:ph type="sldNum" sz="quarter" idx="13"/>
+          </p:nvPr>
+        </p:nvSpPr>
+        <p:spPr>
+          <a:xfrm>
+            <a:off x="10373350" y="6356349"/>
+            <a:ext cx="987552" cy="365125"/>
+          </a:xfrm>
+        </p:spPr>
+        <p:txBody>
+          <a:bodyPr/>
+          <a:lstStyle/>
+          <a:p>
+            <a:fld id="{A49DFD55-3C28-40EF-9E31-A92D2E4017FF}" type="slidenum">
+              <a:rPr lang="en-US" smtClean="0"/>
+              <a:pPr/>
+              <a:t>10</a:t>
+            </a:fld>
+            <a:endParaRPr lang="en-US" dirty="0"/>
+          </a:p>
+        </p:txBody>
+      </p:sp>
+    </p:spTree>
+    <p:extLst>
+      <p:ext uri="{BB962C8B-B14F-4D97-AF65-F5344CB8AC3E}">
+        <p14:creationId xmlns:p14="http://schemas.microsoft.com/office/powerpoint/2010/main" val="4123477654"/>
+      </p:ext>
+    </p:extLst>
+  </p:cSld>
+  <p:clrMapOvr>
+    <a:masterClrMapping/>
+  </p:clrMapOvr>
+</p:sld>
+</file>
+
+<file path=ppt/slides/slide11.xml><?xml version="1.0" encoding="utf-8"?>
+<p:sld xmlns:a="http://schemas.openxmlformats.org/drawingml/2006/main" xmlns:r="http://schemas.openxmlformats.org/officeDocument/2006/relationships" xmlns:p="http://schemas.openxmlformats.org/presentationml/2006/main">
+  <p:cSld>
+    <p:spTree>
+      <p:nvGrpSpPr>
+        <p:cNvPr id="1" name="">
+          <a:extLst>
+            <a:ext uri="{FF2B5EF4-FFF2-40B4-BE49-F238E27FC236}">
+              <a16:creationId xmlns:a16="http://schemas.microsoft.com/office/drawing/2014/main" id="{B2C3D0D8-DA1C-D17A-9FEC-808E5190CEDD}"/>
+            </a:ext>
+          </a:extLst>
+        </p:cNvPr>
+        <p:cNvGrpSpPr/>
+        <p:nvPr/>
+      </p:nvGrpSpPr>
+      <p:grpSpPr>
+        <a:xfrm>
+          <a:off x="0" y="0"/>
+          <a:ext cx="0" cy="0"/>
+          <a:chOff x="0" y="0"/>
+          <a:chExt cx="0" cy="0"/>
+        </a:xfrm>
+      </p:grpSpPr>
+      <p:sp>
+        <p:nvSpPr>
+          <p:cNvPr id="2" name="Title 1">
+            <a:extLst>
+              <a:ext uri="{FF2B5EF4-FFF2-40B4-BE49-F238E27FC236}">
+                <a16:creationId xmlns:a16="http://schemas.microsoft.com/office/drawing/2014/main" id="{3FD52074-8433-28E2-CB9E-10D742493B18}"/>
+              </a:ext>
+            </a:extLst>
+          </p:cNvPr>
+          <p:cNvSpPr>
+            <a:spLocks noGrp="1"/>
+          </p:cNvSpPr>
+          <p:nvPr>
+            <p:ph type="title"/>
+          </p:nvPr>
+        </p:nvSpPr>
+        <p:spPr>
+          <a:xfrm>
+            <a:off x="1341438" y="506895"/>
+            <a:ext cx="9953625" cy="660262"/>
+          </a:xfrm>
+        </p:spPr>
+        <p:txBody>
+          <a:bodyPr/>
+          <a:lstStyle/>
+          <a:p>
+            <a:r>
+              <a:rPr lang="en-US" dirty="0"/>
+              <a:t>Demo deployment</a:t>
+            </a:r>
+          </a:p>
+        </p:txBody>
+      </p:sp>
+      <p:sp>
+        <p:nvSpPr>
+          <p:cNvPr id="6" name="Content Placeholder 5">
+            <a:extLst>
+              <a:ext uri="{FF2B5EF4-FFF2-40B4-BE49-F238E27FC236}">
+                <a16:creationId xmlns:a16="http://schemas.microsoft.com/office/drawing/2014/main" id="{11B7893D-8A22-EA01-6F2D-54F7D7593EF2}"/>
+              </a:ext>
+            </a:extLst>
+          </p:cNvPr>
+          <p:cNvSpPr>
+            <a:spLocks noGrp="1"/>
+          </p:cNvSpPr>
+          <p:nvPr>
+            <p:ph sz="half" idx="14"/>
+          </p:nvPr>
+        </p:nvSpPr>
+        <p:spPr>
+          <a:xfrm>
+            <a:off x="1341437" y="1224556"/>
+            <a:ext cx="10170377" cy="5126549"/>
+          </a:xfrm>
+        </p:spPr>
+        <p:txBody>
+          <a:bodyPr>
+            <a:normAutofit lnSpcReduction="10000"/>
+          </a:bodyPr>
+          <a:lstStyle/>
+          <a:p>
+            <a:r>
+              <a:rPr lang="en-US" sz="2000" u="sng" dirty="0"/>
+              <a:t>Web API application</a:t>
+            </a:r>
+          </a:p>
+          <a:p>
+            <a:pPr lvl="1"/>
+            <a:r>
+              <a:rPr lang="en-US" sz="2000" dirty="0"/>
+              <a:t>API component from YADA demo app </a:t>
+            </a:r>
+            <a:r>
+              <a:rPr lang="en-US" sz="2000" dirty="0" err="1">
+                <a:hlinkClick r:id="rId2"/>
+              </a:rPr>
+              <a:t>microsoft</a:t>
+            </a:r>
+            <a:r>
+              <a:rPr lang="en-US" sz="2000" dirty="0">
+                <a:hlinkClick r:id="rId2"/>
+              </a:rPr>
+              <a:t>/YADA: Yet Another Demo App</a:t>
+            </a:r>
+            <a:endParaRPr lang="en-US" sz="2000" dirty="0"/>
+          </a:p>
+          <a:p>
+            <a:pPr lvl="1"/>
+            <a:r>
+              <a:rPr lang="en-US" sz="2000" dirty="0"/>
+              <a:t>Container image deployed to Web App by </a:t>
+            </a:r>
+            <a:r>
+              <a:rPr lang="en-US" sz="2000" dirty="0" err="1"/>
+              <a:t>IaC</a:t>
+            </a:r>
+            <a:r>
+              <a:rPr lang="en-US" sz="2000" dirty="0"/>
+              <a:t>, environment variables set appropriately</a:t>
+            </a:r>
+          </a:p>
+          <a:p>
+            <a:pPr lvl="1"/>
+            <a:r>
+              <a:rPr lang="en-US" sz="2000" dirty="0"/>
+              <a:t>To avoid certificate complexities, the demo environment uses non-TLS secured (http://) connections</a:t>
+            </a:r>
+            <a:br>
+              <a:rPr lang="en-US" sz="2000" dirty="0"/>
+            </a:br>
+            <a:r>
+              <a:rPr lang="en-US" sz="2000" dirty="0"/>
+              <a:t>(this will be changed for production)</a:t>
+            </a:r>
+          </a:p>
+          <a:p>
+            <a:pPr lvl="1"/>
+            <a:r>
+              <a:rPr lang="en-US" sz="2000" dirty="0"/>
+              <a:t>API exposes endpoints to:</a:t>
+            </a:r>
+          </a:p>
+          <a:p>
+            <a:pPr lvl="2"/>
+            <a:r>
+              <a:rPr lang="en-US" sz="2000" dirty="0"/>
+              <a:t>Query database for version</a:t>
+            </a:r>
+          </a:p>
+          <a:p>
+            <a:pPr lvl="2"/>
+            <a:r>
+              <a:rPr lang="en-US" sz="2000" dirty="0"/>
+              <a:t>Return client source IP</a:t>
+            </a:r>
+          </a:p>
+          <a:p>
+            <a:pPr lvl="2"/>
+            <a:r>
+              <a:rPr lang="en-US" sz="2000" dirty="0"/>
+              <a:t>Write client access events with source IP and timestamp to a table</a:t>
+            </a:r>
+          </a:p>
+          <a:p>
+            <a:pPr marL="0" lvl="1" indent="0">
+              <a:buNone/>
+            </a:pPr>
+            <a:r>
+              <a:rPr lang="en-US" sz="2000" u="sng" dirty="0"/>
+              <a:t>Database</a:t>
+            </a:r>
+          </a:p>
+          <a:p>
+            <a:pPr marL="285750" lvl="1"/>
+            <a:r>
+              <a:rPr lang="en-US" sz="2000" dirty="0"/>
+              <a:t>Empty / default PostgreSQL deployment, no data loaded</a:t>
+            </a:r>
+          </a:p>
+          <a:p>
+            <a:pPr marL="0" lvl="1" indent="0">
+              <a:buNone/>
+            </a:pPr>
+            <a:endParaRPr lang="en-US" sz="1600" dirty="0"/>
+          </a:p>
+          <a:p>
+            <a:pPr marL="285750" lvl="1"/>
+            <a:endParaRPr lang="en-US" sz="1600" dirty="0"/>
+          </a:p>
+          <a:p>
+            <a:endParaRPr lang="en-US" dirty="0"/>
+          </a:p>
+        </p:txBody>
+      </p:sp>
+      <p:sp>
+        <p:nvSpPr>
+          <p:cNvPr id="7" name="Slide Number Placeholder 6">
+            <a:extLst>
+              <a:ext uri="{FF2B5EF4-FFF2-40B4-BE49-F238E27FC236}">
+                <a16:creationId xmlns:a16="http://schemas.microsoft.com/office/drawing/2014/main" id="{DEF34208-E324-8C02-D13D-AB72E945B7C2}"/>
+              </a:ext>
+            </a:extLst>
+          </p:cNvPr>
+          <p:cNvSpPr>
+            <a:spLocks noGrp="1"/>
+          </p:cNvSpPr>
+          <p:nvPr>
+            <p:ph type="sldNum" sz="quarter" idx="13"/>
+          </p:nvPr>
+        </p:nvSpPr>
+        <p:spPr>
+          <a:xfrm>
+            <a:off x="10373350" y="6356349"/>
+            <a:ext cx="987552" cy="365125"/>
+          </a:xfrm>
+        </p:spPr>
+        <p:txBody>
+          <a:bodyPr/>
+          <a:lstStyle/>
+          <a:p>
+            <a:fld id="{A49DFD55-3C28-40EF-9E31-A92D2E4017FF}" type="slidenum">
+              <a:rPr lang="en-US" smtClean="0"/>
+              <a:pPr/>
+              <a:t>11</a:t>
+            </a:fld>
+            <a:endParaRPr lang="en-US" dirty="0"/>
+          </a:p>
+        </p:txBody>
+      </p:sp>
+    </p:spTree>
+    <p:extLst>
+      <p:ext uri="{BB962C8B-B14F-4D97-AF65-F5344CB8AC3E}">
+        <p14:creationId xmlns:p14="http://schemas.microsoft.com/office/powerpoint/2010/main" val="2018970457"/>
+      </p:ext>
+    </p:extLst>
+  </p:cSld>
+  <p:clrMapOvr>
+    <a:masterClrMapping/>
+  </p:clrMapOvr>
+</p:sld>
+</file>
+
+<file path=ppt/slides/slide12.xml><?xml version="1.0" encoding="utf-8"?>
+<p:sld xmlns:a="http://schemas.openxmlformats.org/drawingml/2006/main" xmlns:r="http://schemas.openxmlformats.org/officeDocument/2006/relationships" xmlns:p="http://schemas.openxmlformats.org/presentationml/2006/main">
+  <p:cSld>
+    <p:spTree>
+      <p:nvGrpSpPr>
+        <p:cNvPr id="1" name="">
+          <a:extLst>
+            <a:ext uri="{FF2B5EF4-FFF2-40B4-BE49-F238E27FC236}">
               <a16:creationId xmlns:a16="http://schemas.microsoft.com/office/drawing/2014/main" id="{E0987E7B-D3A8-17F7-A8B9-0A04E01085C2}"/>
             </a:ext>
           </a:extLst>
@@ -6857,7 +7443,7 @@
             <a:fld id="{A49DFD55-3C28-40EF-9E31-A92D2E4017FF}" type="slidenum">
               <a:rPr lang="en-US" smtClean="0"/>
               <a:pPr/>
-              <a:t>10</a:t>
+              <a:t>12</a:t>
             </a:fld>
             <a:endParaRPr lang="en-US" dirty="0"/>
           </a:p>
@@ -6876,7 +7462,7 @@
 </p:sld>
 </file>
 
-<file path=ppt/slides/slide11.xml><?xml version="1.0" encoding="utf-8"?>
+<file path=ppt/slides/slide13.xml><?xml version="1.0" encoding="utf-8"?>
 <p:sld xmlns:a="http://schemas.openxmlformats.org/drawingml/2006/main" xmlns:r="http://schemas.openxmlformats.org/officeDocument/2006/relationships" xmlns:p="http://schemas.openxmlformats.org/presentationml/2006/main">
   <p:cSld>
     <p:spTree>
@@ -7002,7 +7588,7 @@
             <a:fld id="{A49DFD55-3C28-40EF-9E31-A92D2E4017FF}" type="slidenum">
               <a:rPr lang="en-US" smtClean="0"/>
               <a:pPr/>
-              <a:t>11</a:t>
+              <a:t>13</a:t>
             </a:fld>
             <a:endParaRPr lang="en-US" dirty="0"/>
           </a:p>
@@ -8082,10 +8668,10 @@
       </p:pic>
       <p:sp>
         <p:nvSpPr>
-          <p:cNvPr id="7" name="Rectangle 6">
-            <a:extLst>
-              <a:ext uri="{FF2B5EF4-FFF2-40B4-BE49-F238E27FC236}">
-                <a16:creationId xmlns:a16="http://schemas.microsoft.com/office/drawing/2014/main" id="{0C807597-5FEF-B45E-C0A3-0E21ACA3E6EB}"/>
+          <p:cNvPr id="2" name="Rectangle 1">
+            <a:extLst>
+              <a:ext uri="{FF2B5EF4-FFF2-40B4-BE49-F238E27FC236}">
+                <a16:creationId xmlns:a16="http://schemas.microsoft.com/office/drawing/2014/main" id="{C1C38860-9AFD-ED39-0655-6FF7B6DAE142}"/>
               </a:ext>
             </a:extLst>
           </p:cNvPr>
@@ -8094,8 +8680,8 @@
         </p:nvSpPr>
         <p:spPr>
           <a:xfrm>
-            <a:off x="6401001" y="240632"/>
-            <a:ext cx="3953299" cy="5621153"/>
+            <a:off x="6391275" y="276225"/>
+            <a:ext cx="4210050" cy="5505450"/>
           </a:xfrm>
           <a:prstGeom prst="rect">
             <a:avLst/>
@@ -8142,137 +8728,254 @@
   <p:clrMapOvr>
     <a:masterClrMapping/>
   </p:clrMapOvr>
-  <p:timing>
-    <p:tnLst>
-      <p:par>
-        <p:cTn id="1" dur="indefinite" restart="never" nodeType="tmRoot">
-          <p:childTnLst>
-            <p:seq concurrent="1" nextAc="seek">
-              <p:cTn id="2" dur="indefinite" nodeType="mainSeq">
-                <p:childTnLst>
-                  <p:par>
-                    <p:cTn id="3" fill="hold">
-                      <p:stCondLst>
-                        <p:cond delay="indefinite"/>
-                      </p:stCondLst>
-                      <p:childTnLst>
-                        <p:par>
-                          <p:cTn id="4" fill="hold">
-                            <p:stCondLst>
-                              <p:cond delay="0"/>
-                            </p:stCondLst>
-                            <p:childTnLst>
-                              <p:par>
-                                <p:cTn id="5" presetID="35" presetClass="path" presetSubtype="0" accel="50000" decel="50000" fill="hold" grpId="0" nodeType="clickEffect">
-                                  <p:stCondLst>
-                                    <p:cond delay="0"/>
-                                  </p:stCondLst>
-                                  <p:childTnLst>
-                                    <p:animMotion origin="layout" path="M -0.08789 2.59259E-6 L -0.33789 2.59259E-6 " pathEditMode="relative" rAng="0" ptsTypes="AA">
-                                      <p:cBhvr>
-                                        <p:cTn id="6" dur="2000" fill="hold"/>
-                                        <p:tgtEl>
-                                          <p:spTgt spid="7"/>
-                                        </p:tgtEl>
-                                        <p:attrNameLst>
-                                          <p:attrName>ppt_x</p:attrName>
-                                          <p:attrName>ppt_y</p:attrName>
-                                        </p:attrNameLst>
-                                      </p:cBhvr>
-                                      <p:rCtr x="-12500" y="0"/>
-                                    </p:animMotion>
-                                  </p:childTnLst>
-                                </p:cTn>
-                              </p:par>
-                            </p:childTnLst>
-                          </p:cTn>
-                        </p:par>
-                      </p:childTnLst>
-                    </p:cTn>
-                  </p:par>
-                  <p:par>
-                    <p:cTn id="7" fill="hold">
-                      <p:stCondLst>
-                        <p:cond delay="indefinite"/>
-                      </p:stCondLst>
-                      <p:childTnLst>
-                        <p:par>
-                          <p:cTn id="8" fill="hold">
-                            <p:stCondLst>
-                              <p:cond delay="0"/>
-                            </p:stCondLst>
-                            <p:childTnLst>
-                              <p:par>
-                                <p:cTn id="9" presetID="10" presetClass="exit" presetSubtype="0" fill="hold" grpId="1" nodeType="clickEffect">
-                                  <p:stCondLst>
-                                    <p:cond delay="0"/>
-                                  </p:stCondLst>
-                                  <p:childTnLst>
-                                    <p:animEffect transition="out" filter="fade">
-                                      <p:cBhvr>
-                                        <p:cTn id="10" dur="500"/>
-                                        <p:tgtEl>
-                                          <p:spTgt spid="7"/>
-                                        </p:tgtEl>
-                                      </p:cBhvr>
-                                    </p:animEffect>
-                                    <p:set>
-                                      <p:cBhvr>
-                                        <p:cTn id="11" dur="1" fill="hold">
-                                          <p:stCondLst>
-                                            <p:cond delay="499"/>
-                                          </p:stCondLst>
-                                        </p:cTn>
-                                        <p:tgtEl>
-                                          <p:spTgt spid="7"/>
-                                        </p:tgtEl>
-                                        <p:attrNameLst>
-                                          <p:attrName>style.visibility</p:attrName>
-                                        </p:attrNameLst>
-                                      </p:cBhvr>
-                                      <p:to>
-                                        <p:strVal val="hidden"/>
-                                      </p:to>
-                                    </p:set>
-                                  </p:childTnLst>
-                                </p:cTn>
-                              </p:par>
-                            </p:childTnLst>
-                          </p:cTn>
-                        </p:par>
-                      </p:childTnLst>
-                    </p:cTn>
-                  </p:par>
-                </p:childTnLst>
-              </p:cTn>
-              <p:prevCondLst>
-                <p:cond evt="onPrev" delay="0">
-                  <p:tgtEl>
-                    <p:sldTgt/>
-                  </p:tgtEl>
-                </p:cond>
-              </p:prevCondLst>
-              <p:nextCondLst>
-                <p:cond evt="onNext" delay="0">
-                  <p:tgtEl>
-                    <p:sldTgt/>
-                  </p:tgtEl>
-                </p:cond>
-              </p:nextCondLst>
-            </p:seq>
-          </p:childTnLst>
-        </p:cTn>
-      </p:par>
-    </p:tnLst>
-    <p:bldLst>
-      <p:bldP spid="7" grpId="0" animBg="1"/>
-      <p:bldP spid="7" grpId="1" animBg="1"/>
-    </p:bldLst>
-  </p:timing>
 </p:sld>
 </file>
 
 <file path=ppt/slides/slide7.xml><?xml version="1.0" encoding="utf-8"?>
+<p:sld xmlns:a="http://schemas.openxmlformats.org/drawingml/2006/main" xmlns:r="http://schemas.openxmlformats.org/officeDocument/2006/relationships" xmlns:p="http://schemas.openxmlformats.org/presentationml/2006/main">
+  <p:cSld>
+    <p:spTree>
+      <p:nvGrpSpPr>
+        <p:cNvPr id="1" name="">
+          <a:extLst>
+            <a:ext uri="{FF2B5EF4-FFF2-40B4-BE49-F238E27FC236}">
+              <a16:creationId xmlns:a16="http://schemas.microsoft.com/office/drawing/2014/main" id="{DBD25786-1404-1AFF-B110-B282BCF943E2}"/>
+            </a:ext>
+          </a:extLst>
+        </p:cNvPr>
+        <p:cNvGrpSpPr/>
+        <p:nvPr/>
+      </p:nvGrpSpPr>
+      <p:grpSpPr>
+        <a:xfrm>
+          <a:off x="0" y="0"/>
+          <a:ext cx="0" cy="0"/>
+          <a:chOff x="0" y="0"/>
+          <a:chExt cx="0" cy="0"/>
+        </a:xfrm>
+      </p:grpSpPr>
+      <p:sp>
+        <p:nvSpPr>
+          <p:cNvPr id="4" name="Slide Number Placeholder 3">
+            <a:extLst>
+              <a:ext uri="{FF2B5EF4-FFF2-40B4-BE49-F238E27FC236}">
+                <a16:creationId xmlns:a16="http://schemas.microsoft.com/office/drawing/2014/main" id="{01F89A52-DE53-C76D-6380-20376DE5BB84}"/>
+              </a:ext>
+            </a:extLst>
+          </p:cNvPr>
+          <p:cNvSpPr>
+            <a:spLocks noGrp="1"/>
+          </p:cNvSpPr>
+          <p:nvPr>
+            <p:ph type="sldNum" sz="quarter" idx="12"/>
+          </p:nvPr>
+        </p:nvSpPr>
+        <p:spPr/>
+        <p:txBody>
+          <a:bodyPr/>
+          <a:lstStyle/>
+          <a:p>
+            <a:fld id="{A49DFD55-3C28-40EF-9E31-A92D2E4017FF}" type="slidenum">
+              <a:rPr lang="en-US" smtClean="0"/>
+              <a:pPr/>
+              <a:t>7</a:t>
+            </a:fld>
+            <a:endParaRPr lang="en-US" dirty="0"/>
+          </a:p>
+        </p:txBody>
+      </p:sp>
+      <p:pic>
+        <p:nvPicPr>
+          <p:cNvPr id="6" name="Picture 5">
+            <a:extLst>
+              <a:ext uri="{FF2B5EF4-FFF2-40B4-BE49-F238E27FC236}">
+                <a16:creationId xmlns:a16="http://schemas.microsoft.com/office/drawing/2014/main" id="{A99B565D-2C00-238E-1A9A-CD153845895A}"/>
+              </a:ext>
+            </a:extLst>
+          </p:cNvPr>
+          <p:cNvPicPr>
+            <a:picLocks noChangeAspect="1"/>
+          </p:cNvPicPr>
+          <p:nvPr/>
+        </p:nvPicPr>
+        <p:blipFill>
+          <a:blip r:embed="rId2"/>
+          <a:stretch>
+            <a:fillRect/>
+          </a:stretch>
+        </p:blipFill>
+        <p:spPr>
+          <a:xfrm>
+            <a:off x="1981793" y="0"/>
+            <a:ext cx="8228413" cy="6858000"/>
+          </a:xfrm>
+          <a:prstGeom prst="rect">
+            <a:avLst/>
+          </a:prstGeom>
+        </p:spPr>
+      </p:pic>
+      <p:sp>
+        <p:nvSpPr>
+          <p:cNvPr id="3" name="Rectangle 2">
+            <a:extLst>
+              <a:ext uri="{FF2B5EF4-FFF2-40B4-BE49-F238E27FC236}">
+                <a16:creationId xmlns:a16="http://schemas.microsoft.com/office/drawing/2014/main" id="{245B0CF3-BC1F-AE03-EB90-42697053C12B}"/>
+              </a:ext>
+            </a:extLst>
+          </p:cNvPr>
+          <p:cNvSpPr/>
+          <p:nvPr/>
+        </p:nvSpPr>
+        <p:spPr>
+          <a:xfrm>
+            <a:off x="2095500" y="323850"/>
+            <a:ext cx="4210050" cy="5505450"/>
+          </a:xfrm>
+          <a:prstGeom prst="rect">
+            <a:avLst/>
+          </a:prstGeom>
+          <a:solidFill>
+            <a:schemeClr val="bg1"/>
+          </a:solidFill>
+          <a:ln>
+            <a:noFill/>
+          </a:ln>
+        </p:spPr>
+        <p:style>
+          <a:lnRef idx="2">
+            <a:schemeClr val="accent1">
+              <a:shade val="15000"/>
+            </a:schemeClr>
+          </a:lnRef>
+          <a:fillRef idx="1">
+            <a:schemeClr val="accent1"/>
+          </a:fillRef>
+          <a:effectRef idx="0">
+            <a:schemeClr val="accent1"/>
+          </a:effectRef>
+          <a:fontRef idx="minor">
+            <a:schemeClr val="lt1"/>
+          </a:fontRef>
+        </p:style>
+        <p:txBody>
+          <a:bodyPr rtlCol="0" anchor="ctr"/>
+          <a:lstStyle/>
+          <a:p>
+            <a:pPr algn="ctr"/>
+            <a:endParaRPr lang="en-US"/>
+          </a:p>
+        </p:txBody>
+      </p:sp>
+    </p:spTree>
+    <p:extLst>
+      <p:ext uri="{BB962C8B-B14F-4D97-AF65-F5344CB8AC3E}">
+        <p14:creationId xmlns:p14="http://schemas.microsoft.com/office/powerpoint/2010/main" val="1318324342"/>
+      </p:ext>
+    </p:extLst>
+  </p:cSld>
+  <p:clrMapOvr>
+    <a:masterClrMapping/>
+  </p:clrMapOvr>
+</p:sld>
+</file>
+
+<file path=ppt/slides/slide8.xml><?xml version="1.0" encoding="utf-8"?>
+<p:sld xmlns:a="http://schemas.openxmlformats.org/drawingml/2006/main" xmlns:r="http://schemas.openxmlformats.org/officeDocument/2006/relationships" xmlns:p="http://schemas.openxmlformats.org/presentationml/2006/main">
+  <p:cSld>
+    <p:spTree>
+      <p:nvGrpSpPr>
+        <p:cNvPr id="1" name="">
+          <a:extLst>
+            <a:ext uri="{FF2B5EF4-FFF2-40B4-BE49-F238E27FC236}">
+              <a16:creationId xmlns:a16="http://schemas.microsoft.com/office/drawing/2014/main" id="{23A3ECC8-8AE6-1DD1-D209-3E9DF397D527}"/>
+            </a:ext>
+          </a:extLst>
+        </p:cNvPr>
+        <p:cNvGrpSpPr/>
+        <p:nvPr/>
+      </p:nvGrpSpPr>
+      <p:grpSpPr>
+        <a:xfrm>
+          <a:off x="0" y="0"/>
+          <a:ext cx="0" cy="0"/>
+          <a:chOff x="0" y="0"/>
+          <a:chExt cx="0" cy="0"/>
+        </a:xfrm>
+      </p:grpSpPr>
+      <p:sp>
+        <p:nvSpPr>
+          <p:cNvPr id="4" name="Slide Number Placeholder 3">
+            <a:extLst>
+              <a:ext uri="{FF2B5EF4-FFF2-40B4-BE49-F238E27FC236}">
+                <a16:creationId xmlns:a16="http://schemas.microsoft.com/office/drawing/2014/main" id="{DFA287FD-D3B4-1A49-AE64-4D159B8F6B90}"/>
+              </a:ext>
+            </a:extLst>
+          </p:cNvPr>
+          <p:cNvSpPr>
+            <a:spLocks noGrp="1"/>
+          </p:cNvSpPr>
+          <p:nvPr>
+            <p:ph type="sldNum" sz="quarter" idx="12"/>
+          </p:nvPr>
+        </p:nvSpPr>
+        <p:spPr/>
+        <p:txBody>
+          <a:bodyPr/>
+          <a:lstStyle/>
+          <a:p>
+            <a:fld id="{A49DFD55-3C28-40EF-9E31-A92D2E4017FF}" type="slidenum">
+              <a:rPr lang="en-US" smtClean="0"/>
+              <a:pPr/>
+              <a:t>8</a:t>
+            </a:fld>
+            <a:endParaRPr lang="en-US" dirty="0"/>
+          </a:p>
+        </p:txBody>
+      </p:sp>
+      <p:pic>
+        <p:nvPicPr>
+          <p:cNvPr id="6" name="Picture 5">
+            <a:extLst>
+              <a:ext uri="{FF2B5EF4-FFF2-40B4-BE49-F238E27FC236}">
+                <a16:creationId xmlns:a16="http://schemas.microsoft.com/office/drawing/2014/main" id="{AE77952B-1624-3D41-FAFC-3170EE03FF63}"/>
+              </a:ext>
+            </a:extLst>
+          </p:cNvPr>
+          <p:cNvPicPr>
+            <a:picLocks noChangeAspect="1"/>
+          </p:cNvPicPr>
+          <p:nvPr/>
+        </p:nvPicPr>
+        <p:blipFill>
+          <a:blip r:embed="rId2"/>
+          <a:stretch>
+            <a:fillRect/>
+          </a:stretch>
+        </p:blipFill>
+        <p:spPr>
+          <a:xfrm>
+            <a:off x="1981793" y="0"/>
+            <a:ext cx="8228413" cy="6858000"/>
+          </a:xfrm>
+          <a:prstGeom prst="rect">
+            <a:avLst/>
+          </a:prstGeom>
+        </p:spPr>
+      </p:pic>
+    </p:spTree>
+    <p:extLst>
+      <p:ext uri="{BB962C8B-B14F-4D97-AF65-F5344CB8AC3E}">
+        <p14:creationId xmlns:p14="http://schemas.microsoft.com/office/powerpoint/2010/main" val="1559361486"/>
+      </p:ext>
+    </p:extLst>
+  </p:cSld>
+  <p:clrMapOvr>
+    <a:masterClrMapping/>
+  </p:clrMapOvr>
+</p:sld>
+</file>
+
+<file path=ppt/slides/slide9.xml><?xml version="1.0" encoding="utf-8"?>
 <p:sld xmlns:a="http://schemas.openxmlformats.org/drawingml/2006/main" xmlns:r="http://schemas.openxmlformats.org/officeDocument/2006/relationships" xmlns:p="http://schemas.openxmlformats.org/presentationml/2006/main">
   <p:cSld>
     <p:spTree>
@@ -8516,7 +9219,7 @@
             <a:fld id="{A49DFD55-3C28-40EF-9E31-A92D2E4017FF}" type="slidenum">
               <a:rPr lang="en-US" smtClean="0"/>
               <a:pPr/>
-              <a:t>7</a:t>
+              <a:t>9</a:t>
             </a:fld>
             <a:endParaRPr lang="en-US" dirty="0"/>
           </a:p>
@@ -8526,536 +9229,6 @@
     <p:extLst>
       <p:ext uri="{BB962C8B-B14F-4D97-AF65-F5344CB8AC3E}">
         <p14:creationId xmlns:p14="http://schemas.microsoft.com/office/powerpoint/2010/main" val="1400367988"/>
-      </p:ext>
-    </p:extLst>
-  </p:cSld>
-  <p:clrMapOvr>
-    <a:masterClrMapping/>
-  </p:clrMapOvr>
-</p:sld>
-</file>
-
-<file path=ppt/slides/slide8.xml><?xml version="1.0" encoding="utf-8"?>
-<p:sld xmlns:a="http://schemas.openxmlformats.org/drawingml/2006/main" xmlns:r="http://schemas.openxmlformats.org/officeDocument/2006/relationships" xmlns:p="http://schemas.openxmlformats.org/presentationml/2006/main">
-  <p:cSld>
-    <p:spTree>
-      <p:nvGrpSpPr>
-        <p:cNvPr id="1" name="">
-          <a:extLst>
-            <a:ext uri="{FF2B5EF4-FFF2-40B4-BE49-F238E27FC236}">
-              <a16:creationId xmlns:a16="http://schemas.microsoft.com/office/drawing/2014/main" id="{69916197-698B-9E61-B421-F705E810E1B4}"/>
-            </a:ext>
-          </a:extLst>
-        </p:cNvPr>
-        <p:cNvGrpSpPr/>
-        <p:nvPr/>
-      </p:nvGrpSpPr>
-      <p:grpSpPr>
-        <a:xfrm>
-          <a:off x="0" y="0"/>
-          <a:ext cx="0" cy="0"/>
-          <a:chOff x="0" y="0"/>
-          <a:chExt cx="0" cy="0"/>
-        </a:xfrm>
-      </p:grpSpPr>
-      <p:sp>
-        <p:nvSpPr>
-          <p:cNvPr id="2" name="Title 1">
-            <a:extLst>
-              <a:ext uri="{FF2B5EF4-FFF2-40B4-BE49-F238E27FC236}">
-                <a16:creationId xmlns:a16="http://schemas.microsoft.com/office/drawing/2014/main" id="{B63FDCE9-5099-8863-3BBE-C3E9A7F67F18}"/>
-              </a:ext>
-            </a:extLst>
-          </p:cNvPr>
-          <p:cNvSpPr>
-            <a:spLocks noGrp="1"/>
-          </p:cNvSpPr>
-          <p:nvPr>
-            <p:ph type="title"/>
-          </p:nvPr>
-        </p:nvSpPr>
-        <p:spPr>
-          <a:xfrm>
-            <a:off x="1341438" y="506895"/>
-            <a:ext cx="9953625" cy="660262"/>
-          </a:xfrm>
-        </p:spPr>
-        <p:txBody>
-          <a:bodyPr/>
-          <a:lstStyle/>
-          <a:p>
-            <a:r>
-              <a:rPr lang="en-US" dirty="0"/>
-              <a:t>Practical AI</a:t>
-            </a:r>
-          </a:p>
-        </p:txBody>
-      </p:sp>
-      <p:sp>
-        <p:nvSpPr>
-          <p:cNvPr id="6" name="Content Placeholder 5">
-            <a:extLst>
-              <a:ext uri="{FF2B5EF4-FFF2-40B4-BE49-F238E27FC236}">
-                <a16:creationId xmlns:a16="http://schemas.microsoft.com/office/drawing/2014/main" id="{E0BD3A4D-6EE9-88F9-43B8-92B31CA67A38}"/>
-              </a:ext>
-            </a:extLst>
-          </p:cNvPr>
-          <p:cNvSpPr>
-            <a:spLocks noGrp="1"/>
-          </p:cNvSpPr>
-          <p:nvPr>
-            <p:ph sz="half" idx="14"/>
-          </p:nvPr>
-        </p:nvSpPr>
-        <p:spPr>
-          <a:xfrm>
-            <a:off x="1341437" y="1224556"/>
-            <a:ext cx="10170377" cy="5265696"/>
-          </a:xfrm>
-        </p:spPr>
-        <p:txBody>
-          <a:bodyPr>
-            <a:normAutofit fontScale="92500" lnSpcReduction="10000"/>
-          </a:bodyPr>
-          <a:lstStyle/>
-          <a:p>
-            <a:pPr marL="0" lvl="1" indent="0">
-              <a:buNone/>
-            </a:pPr>
-            <a:r>
-              <a:rPr lang="en-US" sz="2400" u="sng" dirty="0"/>
-              <a:t>AI-assisted engineering</a:t>
-            </a:r>
-          </a:p>
-          <a:p>
-            <a:pPr marL="342900" lvl="0" indent="-342900" fontAlgn="t">
-              <a:buFont typeface="Arial" panose="020B0604020202020204" pitchFamily="34" charset="0"/>
-              <a:buChar char="•"/>
-            </a:pPr>
-            <a:r>
-              <a:rPr lang="en-US" dirty="0"/>
-              <a:t>All Bicep code was developed in </a:t>
-            </a:r>
-            <a:r>
-              <a:rPr lang="en-US" b="1" dirty="0"/>
-              <a:t>Visual Studio Code with GitHub Copilot</a:t>
-            </a:r>
-            <a:endParaRPr lang="en-US" dirty="0"/>
-          </a:p>
-          <a:p>
-            <a:pPr marL="342900" lvl="0" indent="-342900" fontAlgn="t">
-              <a:buFont typeface="Arial" panose="020B0604020202020204" pitchFamily="34" charset="0"/>
-              <a:buChar char="•"/>
-            </a:pPr>
-            <a:r>
-              <a:rPr lang="en-US" dirty="0"/>
-              <a:t>Copilot accelerated code generation, refactoring, troubleshooting, and documentation</a:t>
-            </a:r>
-          </a:p>
-          <a:p>
-            <a:pPr marL="342900" lvl="0" indent="-342900" fontAlgn="t">
-              <a:buFont typeface="Arial" panose="020B0604020202020204" pitchFamily="34" charset="0"/>
-              <a:buChar char="•"/>
-            </a:pPr>
-            <a:r>
-              <a:rPr lang="en-US" dirty="0"/>
-              <a:t>Generated code remained subject to human review, Bicep validation, deployment testing, and architectural judgement</a:t>
-            </a:r>
-          </a:p>
-          <a:p>
-            <a:pPr marL="0" lvl="1" indent="0">
-              <a:buNone/>
-            </a:pPr>
-            <a:r>
-              <a:rPr lang="en-US" sz="2400" u="sng" dirty="0"/>
-              <a:t>AI-assisted operations – options</a:t>
-            </a:r>
-          </a:p>
-          <a:p>
-            <a:pPr marL="342900" lvl="0" indent="-342900" fontAlgn="t">
-              <a:buFont typeface="Arial" panose="020B0604020202020204" pitchFamily="34" charset="0"/>
-              <a:buChar char="•"/>
-            </a:pPr>
-            <a:r>
-              <a:rPr lang="en-US" b="1" dirty="0" err="1"/>
-              <a:t>IaC</a:t>
-            </a:r>
-            <a:r>
-              <a:rPr lang="en-US" b="1" dirty="0"/>
-              <a:t> review agent:</a:t>
-            </a:r>
-            <a:r>
-              <a:rPr lang="en-US" dirty="0"/>
-              <a:t> Review pull requests for security, resilience, logging, tagging, and configuration gaps</a:t>
-            </a:r>
-          </a:p>
-          <a:p>
-            <a:pPr marL="342900" lvl="0" indent="-342900" fontAlgn="t">
-              <a:buFont typeface="Arial" panose="020B0604020202020204" pitchFamily="34" charset="0"/>
-              <a:buChar char="•"/>
-            </a:pPr>
-            <a:r>
-              <a:rPr lang="en-US" b="1" dirty="0"/>
-              <a:t>Operations agent:</a:t>
-            </a:r>
-            <a:r>
-              <a:rPr lang="en-US" dirty="0"/>
-              <a:t> Correlate Azure Monitor and Log Analytics data and summarize incidents</a:t>
-            </a:r>
-          </a:p>
-          <a:p>
-            <a:pPr marL="342900" lvl="0" indent="-342900" fontAlgn="t">
-              <a:buFont typeface="Arial" panose="020B0604020202020204" pitchFamily="34" charset="0"/>
-              <a:buChar char="•"/>
-            </a:pPr>
-            <a:r>
-              <a:rPr lang="en-US" b="1" dirty="0"/>
-              <a:t>Cost agent:</a:t>
-            </a:r>
-            <a:r>
-              <a:rPr lang="en-US" dirty="0"/>
-              <a:t> Identify underused capacity and recommend rightsizing, especially for development</a:t>
-            </a:r>
-          </a:p>
-          <a:p>
-            <a:pPr marL="342900" lvl="0" indent="-342900" fontAlgn="t">
-              <a:buFont typeface="Arial" panose="020B0604020202020204" pitchFamily="34" charset="0"/>
-              <a:buChar char="•"/>
-            </a:pPr>
-            <a:r>
-              <a:rPr lang="en-US" b="1" dirty="0"/>
-              <a:t>DR assistant:</a:t>
-            </a:r>
-            <a:r>
-              <a:rPr lang="en-US" dirty="0"/>
-              <a:t> Guide operators through the recovery runbook and verify completion of each step</a:t>
-            </a:r>
-          </a:p>
-          <a:p>
-            <a:pPr marL="342900" lvl="0" indent="-342900" fontAlgn="t">
-              <a:buFont typeface="Arial" panose="020B0604020202020204" pitchFamily="34" charset="0"/>
-              <a:buChar char="•"/>
-            </a:pPr>
-            <a:r>
-              <a:rPr lang="en-US" b="1" dirty="0"/>
-              <a:t>Knowledge agent:</a:t>
-            </a:r>
-            <a:r>
-              <a:rPr lang="en-US" dirty="0"/>
-              <a:t> Answer operational questions using approved architecture documentation and runbooks</a:t>
-            </a:r>
-          </a:p>
-          <a:p>
-            <a:pPr fontAlgn="t"/>
-            <a:r>
-              <a:rPr lang="en-US" dirty="0"/>
-              <a:t>AI supports engineers and operators, but production changes remain governed, auditable, and human-approved.</a:t>
-            </a:r>
-          </a:p>
-          <a:p>
-            <a:pPr lvl="0" fontAlgn="t"/>
-            <a:endParaRPr lang="en-US" dirty="0"/>
-          </a:p>
-          <a:p>
-            <a:pPr marL="342900" lvl="0" indent="-342900" fontAlgn="t">
-              <a:buFont typeface="Arial" panose="020B0604020202020204" pitchFamily="34" charset="0"/>
-              <a:buChar char="•"/>
-            </a:pPr>
-            <a:endParaRPr lang="en-US" dirty="0"/>
-          </a:p>
-          <a:p>
-            <a:pPr marL="342900" lvl="1" indent="-342900"/>
-            <a:endParaRPr lang="en-US" sz="2400" dirty="0"/>
-          </a:p>
-          <a:p>
-            <a:endParaRPr lang="en-US" dirty="0"/>
-          </a:p>
-        </p:txBody>
-      </p:sp>
-      <p:sp>
-        <p:nvSpPr>
-          <p:cNvPr id="7" name="Slide Number Placeholder 6">
-            <a:extLst>
-              <a:ext uri="{FF2B5EF4-FFF2-40B4-BE49-F238E27FC236}">
-                <a16:creationId xmlns:a16="http://schemas.microsoft.com/office/drawing/2014/main" id="{0F093864-101C-7E40-096E-B1797575AEAF}"/>
-              </a:ext>
-            </a:extLst>
-          </p:cNvPr>
-          <p:cNvSpPr>
-            <a:spLocks noGrp="1"/>
-          </p:cNvSpPr>
-          <p:nvPr>
-            <p:ph type="sldNum" sz="quarter" idx="13"/>
-          </p:nvPr>
-        </p:nvSpPr>
-        <p:spPr>
-          <a:xfrm>
-            <a:off x="10373350" y="6356349"/>
-            <a:ext cx="987552" cy="365125"/>
-          </a:xfrm>
-        </p:spPr>
-        <p:txBody>
-          <a:bodyPr/>
-          <a:lstStyle/>
-          <a:p>
-            <a:fld id="{A49DFD55-3C28-40EF-9E31-A92D2E4017FF}" type="slidenum">
-              <a:rPr lang="en-US" smtClean="0"/>
-              <a:pPr/>
-              <a:t>8</a:t>
-            </a:fld>
-            <a:endParaRPr lang="en-US" dirty="0"/>
-          </a:p>
-        </p:txBody>
-      </p:sp>
-    </p:spTree>
-    <p:extLst>
-      <p:ext uri="{BB962C8B-B14F-4D97-AF65-F5344CB8AC3E}">
-        <p14:creationId xmlns:p14="http://schemas.microsoft.com/office/powerpoint/2010/main" val="4123477654"/>
-      </p:ext>
-    </p:extLst>
-  </p:cSld>
-  <p:clrMapOvr>
-    <a:masterClrMapping/>
-  </p:clrMapOvr>
-</p:sld>
-</file>
-
-<file path=ppt/slides/slide9.xml><?xml version="1.0" encoding="utf-8"?>
-<p:sld xmlns:a="http://schemas.openxmlformats.org/drawingml/2006/main" xmlns:r="http://schemas.openxmlformats.org/officeDocument/2006/relationships" xmlns:p="http://schemas.openxmlformats.org/presentationml/2006/main">
-  <p:cSld>
-    <p:spTree>
-      <p:nvGrpSpPr>
-        <p:cNvPr id="1" name="">
-          <a:extLst>
-            <a:ext uri="{FF2B5EF4-FFF2-40B4-BE49-F238E27FC236}">
-              <a16:creationId xmlns:a16="http://schemas.microsoft.com/office/drawing/2014/main" id="{B2C3D0D8-DA1C-D17A-9FEC-808E5190CEDD}"/>
-            </a:ext>
-          </a:extLst>
-        </p:cNvPr>
-        <p:cNvGrpSpPr/>
-        <p:nvPr/>
-      </p:nvGrpSpPr>
-      <p:grpSpPr>
-        <a:xfrm>
-          <a:off x="0" y="0"/>
-          <a:ext cx="0" cy="0"/>
-          <a:chOff x="0" y="0"/>
-          <a:chExt cx="0" cy="0"/>
-        </a:xfrm>
-      </p:grpSpPr>
-      <p:sp>
-        <p:nvSpPr>
-          <p:cNvPr id="2" name="Title 1">
-            <a:extLst>
-              <a:ext uri="{FF2B5EF4-FFF2-40B4-BE49-F238E27FC236}">
-                <a16:creationId xmlns:a16="http://schemas.microsoft.com/office/drawing/2014/main" id="{3FD52074-8433-28E2-CB9E-10D742493B18}"/>
-              </a:ext>
-            </a:extLst>
-          </p:cNvPr>
-          <p:cNvSpPr>
-            <a:spLocks noGrp="1"/>
-          </p:cNvSpPr>
-          <p:nvPr>
-            <p:ph type="title"/>
-          </p:nvPr>
-        </p:nvSpPr>
-        <p:spPr>
-          <a:xfrm>
-            <a:off x="1341438" y="506895"/>
-            <a:ext cx="9953625" cy="660262"/>
-          </a:xfrm>
-        </p:spPr>
-        <p:txBody>
-          <a:bodyPr/>
-          <a:lstStyle/>
-          <a:p>
-            <a:r>
-              <a:rPr lang="en-US" dirty="0"/>
-              <a:t>Demo deployment</a:t>
-            </a:r>
-          </a:p>
-        </p:txBody>
-      </p:sp>
-      <p:sp>
-        <p:nvSpPr>
-          <p:cNvPr id="6" name="Content Placeholder 5">
-            <a:extLst>
-              <a:ext uri="{FF2B5EF4-FFF2-40B4-BE49-F238E27FC236}">
-                <a16:creationId xmlns:a16="http://schemas.microsoft.com/office/drawing/2014/main" id="{11B7893D-8A22-EA01-6F2D-54F7D7593EF2}"/>
-              </a:ext>
-            </a:extLst>
-          </p:cNvPr>
-          <p:cNvSpPr>
-            <a:spLocks noGrp="1"/>
-          </p:cNvSpPr>
-          <p:nvPr>
-            <p:ph sz="half" idx="14"/>
-          </p:nvPr>
-        </p:nvSpPr>
-        <p:spPr>
-          <a:xfrm>
-            <a:off x="1341437" y="1224556"/>
-            <a:ext cx="10170377" cy="5126549"/>
-          </a:xfrm>
-        </p:spPr>
-        <p:txBody>
-          <a:bodyPr>
-            <a:normAutofit lnSpcReduction="10000"/>
-          </a:bodyPr>
-          <a:lstStyle/>
-          <a:p>
-            <a:r>
-              <a:rPr lang="en-US" sz="2000" u="sng" dirty="0"/>
-              <a:t>Web API application</a:t>
-            </a:r>
-          </a:p>
-          <a:p>
-            <a:pPr lvl="1"/>
-            <a:r>
-              <a:rPr lang="en-US" sz="2000" dirty="0"/>
-              <a:t>API component from YADA demo app </a:t>
-            </a:r>
-            <a:r>
-              <a:rPr lang="en-US" sz="2000" dirty="0" err="1">
-                <a:hlinkClick r:id="rId2"/>
-              </a:rPr>
-              <a:t>microsoft</a:t>
-            </a:r>
-            <a:r>
-              <a:rPr lang="en-US" sz="2000" dirty="0">
-                <a:hlinkClick r:id="rId2"/>
-              </a:rPr>
-              <a:t>/YADA: Yet Another Demo App</a:t>
-            </a:r>
-            <a:endParaRPr lang="en-US" sz="2000" dirty="0"/>
-          </a:p>
-          <a:p>
-            <a:pPr lvl="1"/>
-            <a:r>
-              <a:rPr lang="en-US" sz="2000" dirty="0"/>
-              <a:t>Container image deployed to Web App by </a:t>
-            </a:r>
-            <a:r>
-              <a:rPr lang="en-US" sz="2000" dirty="0" err="1"/>
-              <a:t>IaC</a:t>
-            </a:r>
-            <a:r>
-              <a:rPr lang="en-US" sz="2000" dirty="0"/>
-              <a:t>, environment variables set appropriately</a:t>
-            </a:r>
-          </a:p>
-          <a:p>
-            <a:pPr lvl="1"/>
-            <a:r>
-              <a:rPr lang="en-US" sz="2000" dirty="0"/>
-              <a:t>To avoid certificate complexities, the demo environment uses non-TLS secured (http://) connections</a:t>
-            </a:r>
-            <a:br>
-              <a:rPr lang="en-US" sz="2000" dirty="0"/>
-            </a:br>
-            <a:r>
-              <a:rPr lang="en-US" sz="2000" dirty="0"/>
-              <a:t>(this will be changed for production)</a:t>
-            </a:r>
-          </a:p>
-          <a:p>
-            <a:pPr lvl="1"/>
-            <a:r>
-              <a:rPr lang="en-US" sz="2000" dirty="0"/>
-              <a:t>API exposes endpoints to:</a:t>
-            </a:r>
-          </a:p>
-          <a:p>
-            <a:pPr lvl="2"/>
-            <a:r>
-              <a:rPr lang="en-US" sz="2000" dirty="0"/>
-              <a:t>Query database for version</a:t>
-            </a:r>
-          </a:p>
-          <a:p>
-            <a:pPr lvl="2"/>
-            <a:r>
-              <a:rPr lang="en-US" sz="2000" dirty="0"/>
-              <a:t>Return client source IP</a:t>
-            </a:r>
-          </a:p>
-          <a:p>
-            <a:pPr lvl="2"/>
-            <a:r>
-              <a:rPr lang="en-US" sz="2000" dirty="0"/>
-              <a:t>Write client access events with source IP and timestamp to a table</a:t>
-            </a:r>
-          </a:p>
-          <a:p>
-            <a:pPr marL="0" lvl="1" indent="0">
-              <a:buNone/>
-            </a:pPr>
-            <a:r>
-              <a:rPr lang="en-US" sz="2000" u="sng" dirty="0"/>
-              <a:t>Database</a:t>
-            </a:r>
-          </a:p>
-          <a:p>
-            <a:pPr marL="285750" lvl="1"/>
-            <a:r>
-              <a:rPr lang="en-US" sz="2000" dirty="0"/>
-              <a:t>Empty / default PostgreSQL deployment, no data loaded</a:t>
-            </a:r>
-          </a:p>
-          <a:p>
-            <a:pPr marL="0" lvl="1" indent="0">
-              <a:buNone/>
-            </a:pPr>
-            <a:endParaRPr lang="en-US" sz="1600" dirty="0"/>
-          </a:p>
-          <a:p>
-            <a:pPr marL="285750" lvl="1"/>
-            <a:endParaRPr lang="en-US" sz="1600" dirty="0"/>
-          </a:p>
-          <a:p>
-            <a:endParaRPr lang="en-US" dirty="0"/>
-          </a:p>
-        </p:txBody>
-      </p:sp>
-      <p:sp>
-        <p:nvSpPr>
-          <p:cNvPr id="7" name="Slide Number Placeholder 6">
-            <a:extLst>
-              <a:ext uri="{FF2B5EF4-FFF2-40B4-BE49-F238E27FC236}">
-                <a16:creationId xmlns:a16="http://schemas.microsoft.com/office/drawing/2014/main" id="{DEF34208-E324-8C02-D13D-AB72E945B7C2}"/>
-              </a:ext>
-            </a:extLst>
-          </p:cNvPr>
-          <p:cNvSpPr>
-            <a:spLocks noGrp="1"/>
-          </p:cNvSpPr>
-          <p:nvPr>
-            <p:ph type="sldNum" sz="quarter" idx="13"/>
-          </p:nvPr>
-        </p:nvSpPr>
-        <p:spPr>
-          <a:xfrm>
-            <a:off x="10373350" y="6356349"/>
-            <a:ext cx="987552" cy="365125"/>
-          </a:xfrm>
-        </p:spPr>
-        <p:txBody>
-          <a:bodyPr/>
-          <a:lstStyle/>
-          <a:p>
-            <a:fld id="{A49DFD55-3C28-40EF-9E31-A92D2E4017FF}" type="slidenum">
-              <a:rPr lang="en-US" smtClean="0"/>
-              <a:pPr/>
-              <a:t>9</a:t>
-            </a:fld>
-            <a:endParaRPr lang="en-US" dirty="0"/>
-          </a:p>
-        </p:txBody>
-      </p:sp>
-    </p:spTree>
-    <p:extLst>
-      <p:ext uri="{BB962C8B-B14F-4D97-AF65-F5344CB8AC3E}">
-        <p14:creationId xmlns:p14="http://schemas.microsoft.com/office/powerpoint/2010/main" val="2018970457"/>
       </p:ext>
     </p:extLst>
   </p:cSld>
@@ -9857,6 +10030,35 @@
 </file>
 
 <file path=customXml/item1.xml><?xml version="1.0" encoding="utf-8"?>
+<?mso-contentType ?>
+<FormTemplates xmlns="http://schemas.microsoft.com/sharepoint/v3/contenttype/forms">
+  <Display>DocumentLibraryForm</Display>
+  <Edit>DocumentLibraryForm</Edit>
+  <New>DocumentLibraryForm</New>
+</FormTemplates>
+</file>
+
+<file path=customXml/item2.xml><?xml version="1.0" encoding="utf-8"?>
+<p:properties xmlns:p="http://schemas.microsoft.com/office/2006/metadata/properties" xmlns:xsi="http://www.w3.org/2001/XMLSchema-instance" xmlns:pc="http://schemas.microsoft.com/office/infopath/2007/PartnerControls">
+  <documentManagement>
+    <_ip_UnifiedCompliancePolicyUIAction xmlns="http://schemas.microsoft.com/sharepoint/v3" xsi:nil="true"/>
+    <Image xmlns="71af3243-3dd4-4a8d-8c0d-dd76da1f02a5">
+      <Url xsi:nil="true"/>
+      <Description xsi:nil="true"/>
+    </Image>
+    <Status xmlns="71af3243-3dd4-4a8d-8c0d-dd76da1f02a5">Not started</Status>
+    <Background xmlns="71af3243-3dd4-4a8d-8c0d-dd76da1f02a5">false</Background>
+    <_ip_UnifiedCompliancePolicyProperties xmlns="http://schemas.microsoft.com/sharepoint/v3" xsi:nil="true"/>
+    <ImageTagsTaxHTField xmlns="71af3243-3dd4-4a8d-8c0d-dd76da1f02a5">
+      <Terms xmlns="http://schemas.microsoft.com/office/infopath/2007/PartnerControls"/>
+    </ImageTagsTaxHTField>
+    <TaxCatchAll xmlns="230e9df3-be65-4c73-a93b-d1236ebd677e" xsi:nil="true"/>
+    <MediaServiceKeyPoints xmlns="71af3243-3dd4-4a8d-8c0d-dd76da1f02a5" xsi:nil="true"/>
+  </documentManagement>
+</p:properties>
+</file>
+
+<file path=customXml/item3.xml><?xml version="1.0" encoding="utf-8"?>
 <ct:contentTypeSchema xmlns:ct="http://schemas.microsoft.com/office/2006/metadata/contentType" xmlns:ma="http://schemas.microsoft.com/office/2006/metadata/properties/metaAttributes" ct:_="" ma:_="" ma:contentTypeName="Document" ma:contentTypeID="0x01010079F111ED35F8CC479449609E8A0923A6" ma:contentTypeVersion="28" ma:contentTypeDescription="Create a new document." ma:contentTypeScope="" ma:versionID="60f5a4f2d2b0abadcf532d48ebf9cb71">
   <xsd:schema xmlns:xsd="http://www.w3.org/2001/XMLSchema" xmlns:xs="http://www.w3.org/2001/XMLSchema" xmlns:p="http://schemas.microsoft.com/office/2006/metadata/properties" xmlns:ns1="http://schemas.microsoft.com/sharepoint/v3" xmlns:ns2="71af3243-3dd4-4a8d-8c0d-dd76da1f02a5" xmlns:ns3="16c05727-aa75-4e4a-9b5f-8a80a1165891" xmlns:ns4="230e9df3-be65-4c73-a93b-d1236ebd677e" targetNamespace="http://schemas.microsoft.com/office/2006/metadata/properties" ma:root="true" ma:fieldsID="7dd78129e6a1811f84807ad11c651531" ns1:_="" ns2:_="" ns3:_="" ns4:_="">
     <xsd:import namespace="http://schemas.microsoft.com/sharepoint/v3"/>
@@ -10168,36 +10370,34 @@
 </ct:contentTypeSchema>
 </file>
 
-<file path=customXml/item2.xml><?xml version="1.0" encoding="utf-8"?>
-<p:properties xmlns:p="http://schemas.microsoft.com/office/2006/metadata/properties" xmlns:xsi="http://www.w3.org/2001/XMLSchema-instance" xmlns:pc="http://schemas.microsoft.com/office/infopath/2007/PartnerControls">
-  <documentManagement>
-    <_ip_UnifiedCompliancePolicyUIAction xmlns="http://schemas.microsoft.com/sharepoint/v3" xsi:nil="true"/>
-    <Image xmlns="71af3243-3dd4-4a8d-8c0d-dd76da1f02a5">
-      <Url xsi:nil="true"/>
-      <Description xsi:nil="true"/>
-    </Image>
-    <Status xmlns="71af3243-3dd4-4a8d-8c0d-dd76da1f02a5">Not started</Status>
-    <Background xmlns="71af3243-3dd4-4a8d-8c0d-dd76da1f02a5">false</Background>
-    <_ip_UnifiedCompliancePolicyProperties xmlns="http://schemas.microsoft.com/sharepoint/v3" xsi:nil="true"/>
-    <ImageTagsTaxHTField xmlns="71af3243-3dd4-4a8d-8c0d-dd76da1f02a5">
-      <Terms xmlns="http://schemas.microsoft.com/office/infopath/2007/PartnerControls"/>
-    </ImageTagsTaxHTField>
-    <TaxCatchAll xmlns="230e9df3-be65-4c73-a93b-d1236ebd677e" xsi:nil="true"/>
-    <MediaServiceKeyPoints xmlns="71af3243-3dd4-4a8d-8c0d-dd76da1f02a5" xsi:nil="true"/>
-  </documentManagement>
-</p:properties>
+<file path=customXml/itemProps1.xml><?xml version="1.0" encoding="utf-8"?>
+<ds:datastoreItem xmlns:ds="http://schemas.openxmlformats.org/officeDocument/2006/customXml" ds:itemID="{CABF691C-888B-4061-8A6F-D5CE84A0254B}">
+  <ds:schemaRefs>
+    <ds:schemaRef ds:uri="http://schemas.microsoft.com/sharepoint/v3/contenttype/forms"/>
+  </ds:schemaRefs>
+</ds:datastoreItem>
 </file>
 
-<file path=customXml/item3.xml><?xml version="1.0" encoding="utf-8"?>
-<?mso-contentType ?>
-<FormTemplates xmlns="http://schemas.microsoft.com/sharepoint/v3/contenttype/forms">
-  <Display>DocumentLibraryForm</Display>
-  <Edit>DocumentLibraryForm</Edit>
-  <New>DocumentLibraryForm</New>
-</FormTemplates>
+<file path=customXml/itemProps2.xml><?xml version="1.0" encoding="utf-8"?>
+<ds:datastoreItem xmlns:ds="http://schemas.openxmlformats.org/officeDocument/2006/customXml" ds:itemID="{49168DCE-134F-4610-A6AA-88CEBE8D71D2}">
+  <ds:schemaRefs>
+    <ds:schemaRef ds:uri="http://schemas.microsoft.com/office/2006/metadata/properties"/>
+    <ds:schemaRef ds:uri="http://www.w3.org/XML/1998/namespace"/>
+    <ds:schemaRef ds:uri="http://schemas.microsoft.com/office/infopath/2007/PartnerControls"/>
+    <ds:schemaRef ds:uri="http://schemas.microsoft.com/office/2006/documentManagement/types"/>
+    <ds:schemaRef ds:uri="http://purl.org/dc/dcmitype/"/>
+    <ds:schemaRef ds:uri="http://schemas.openxmlformats.org/package/2006/metadata/core-properties"/>
+    <ds:schemaRef ds:uri="http://purl.org/dc/terms/"/>
+    <ds:schemaRef ds:uri="http://purl.org/dc/elements/1.1/"/>
+    <ds:schemaRef ds:uri="230e9df3-be65-4c73-a93b-d1236ebd677e"/>
+    <ds:schemaRef ds:uri="16c05727-aa75-4e4a-9b5f-8a80a1165891"/>
+    <ds:schemaRef ds:uri="71af3243-3dd4-4a8d-8c0d-dd76da1f02a5"/>
+    <ds:schemaRef ds:uri="http://schemas.microsoft.com/sharepoint/v3"/>
+  </ds:schemaRefs>
+</ds:datastoreItem>
 </file>
 
-<file path=customXml/itemProps1.xml><?xml version="1.0" encoding="utf-8"?>
+<file path=customXml/itemProps3.xml><?xml version="1.0" encoding="utf-8"?>
 <ds:datastoreItem xmlns:ds="http://schemas.openxmlformats.org/officeDocument/2006/customXml" ds:itemID="{5EDE3176-A15D-46A3-BDDB-64A0D7363224}">
   <ds:schemaRefs>
     <ds:schemaRef ds:uri="http://schemas.microsoft.com/office/2006/metadata/contentType"/>
@@ -10218,26 +10418,6 @@
 </ds:datastoreItem>
 </file>
 
-<file path=customXml/itemProps2.xml><?xml version="1.0" encoding="utf-8"?>
-<ds:datastoreItem xmlns:ds="http://schemas.openxmlformats.org/officeDocument/2006/customXml" ds:itemID="{49168DCE-134F-4610-A6AA-88CEBE8D71D2}">
-  <ds:schemaRefs>
-    <ds:schemaRef ds:uri="http://schemas.microsoft.com/office/2006/metadata/properties"/>
-    <ds:schemaRef ds:uri="http://schemas.microsoft.com/office/infopath/2007/PartnerControls"/>
-    <ds:schemaRef ds:uri="http://schemas.microsoft.com/sharepoint/v3"/>
-    <ds:schemaRef ds:uri="71af3243-3dd4-4a8d-8c0d-dd76da1f02a5"/>
-    <ds:schemaRef ds:uri="230e9df3-be65-4c73-a93b-d1236ebd677e"/>
-  </ds:schemaRefs>
-</ds:datastoreItem>
-</file>
-
-<file path=customXml/itemProps3.xml><?xml version="1.0" encoding="utf-8"?>
-<ds:datastoreItem xmlns:ds="http://schemas.openxmlformats.org/officeDocument/2006/customXml" ds:itemID="{CABF691C-888B-4061-8A6F-D5CE84A0254B}">
-  <ds:schemaRefs>
-    <ds:schemaRef ds:uri="http://schemas.microsoft.com/sharepoint/v3/contenttype/forms"/>
-  </ds:schemaRefs>
-</ds:datastoreItem>
-</file>
-
 <file path=docMetadata/LabelInfo.xml><?xml version="1.0" encoding="utf-8"?>
 <clbl:labelList xmlns:clbl="http://schemas.microsoft.com/office/2020/mipLabelMetadata">
   <clbl:label id="{f42aa342-8706-4288-bd11-ebb85995028c}" enabled="1" method="Privileged" siteId="{72f988bf-86f1-41af-91ab-2d7cd011db47}" removed="0"/>
